--- a/slides/dia1.pptx
+++ b/slides/dia1.pptx
@@ -1,50 +1,53 @@
 
 <file path=ppt/presentation.xml><?xml version="1.0" encoding="utf-8"?>
-<p:presentation xmlns:a="http://schemas.openxmlformats.org/drawingml/2006/main" xmlns:r="http://schemas.openxmlformats.org/officeDocument/2006/relationships" xmlns:mc="http://schemas.openxmlformats.org/markup-compatibility/2006" xmlns:mv="urn:schemas-microsoft-com:mac:vml" xmlns:p="http://schemas.openxmlformats.org/presentationml/2006/main" xmlns:c="http://schemas.openxmlformats.org/drawingml/2006/chart" xmlns:dgm="http://schemas.openxmlformats.org/drawingml/2006/diagram" xmlns:o="urn:schemas-microsoft-com:office:office" xmlns:v="urn:schemas-microsoft-com:vml" xmlns:pvml="urn:schemas-microsoft-com:office:powerpoint" xmlns:com="http://schemas.openxmlformats.org/drawingml/2006/compatibility" xmlns:p14="http://schemas.microsoft.com/office/powerpoint/2010/main" xmlns:p15="http://schemas.microsoft.com/office/powerpoint/2012/main" xmlns:ahyp="http://schemas.microsoft.com/office/drawing/2018/hyperlinkcolor" autoCompressPictures="0" strictFirstAndLastChars="0" saveSubsetFonts="1" showSpecialPlsOnTitleSld="0">
+<p:presentation xmlns:a="http://schemas.openxmlformats.org/drawingml/2006/main" xmlns:r="http://schemas.openxmlformats.org/officeDocument/2006/relationships" xmlns:p="http://schemas.openxmlformats.org/presentationml/2006/main" showSpecialPlsOnTitleSld="0" strictFirstAndLastChars="0" saveSubsetFonts="1" autoCompressPictures="0">
   <p:sldMasterIdLst>
-    <p:sldMasterId id="2147483660" r:id="rId4"/>
+    <p:sldMasterId id="2147483660" r:id="rId1"/>
   </p:sldMasterIdLst>
   <p:notesMasterIdLst>
-    <p:notesMasterId r:id="rId5"/>
+    <p:notesMasterId r:id="rId37"/>
   </p:notesMasterIdLst>
   <p:sldIdLst>
-    <p:sldId id="256" r:id="rId6"/>
-    <p:sldId id="257" r:id="rId7"/>
-    <p:sldId id="258" r:id="rId8"/>
-    <p:sldId id="259" r:id="rId9"/>
-    <p:sldId id="260" r:id="rId10"/>
-    <p:sldId id="261" r:id="rId11"/>
-    <p:sldId id="262" r:id="rId12"/>
-    <p:sldId id="263" r:id="rId13"/>
-    <p:sldId id="264" r:id="rId14"/>
-    <p:sldId id="265" r:id="rId15"/>
-    <p:sldId id="266" r:id="rId16"/>
-    <p:sldId id="267" r:id="rId17"/>
-    <p:sldId id="268" r:id="rId18"/>
-    <p:sldId id="269" r:id="rId19"/>
-    <p:sldId id="270" r:id="rId20"/>
-    <p:sldId id="271" r:id="rId21"/>
-    <p:sldId id="272" r:id="rId22"/>
-    <p:sldId id="273" r:id="rId23"/>
-    <p:sldId id="274" r:id="rId24"/>
-    <p:sldId id="275" r:id="rId25"/>
-    <p:sldId id="276" r:id="rId26"/>
-    <p:sldId id="277" r:id="rId27"/>
-    <p:sldId id="278" r:id="rId28"/>
-    <p:sldId id="279" r:id="rId29"/>
-    <p:sldId id="280" r:id="rId30"/>
-    <p:sldId id="281" r:id="rId31"/>
-    <p:sldId id="282" r:id="rId32"/>
-    <p:sldId id="283" r:id="rId33"/>
-    <p:sldId id="284" r:id="rId34"/>
-    <p:sldId id="285" r:id="rId35"/>
-    <p:sldId id="286" r:id="rId36"/>
-    <p:sldId id="287" r:id="rId37"/>
+    <p:sldId id="256" r:id="rId2"/>
+    <p:sldId id="257" r:id="rId3"/>
+    <p:sldId id="259" r:id="rId4"/>
+    <p:sldId id="260" r:id="rId5"/>
+    <p:sldId id="261" r:id="rId6"/>
+    <p:sldId id="262" r:id="rId7"/>
+    <p:sldId id="263" r:id="rId8"/>
+    <p:sldId id="264" r:id="rId9"/>
+    <p:sldId id="265" r:id="rId10"/>
+    <p:sldId id="266" r:id="rId11"/>
+    <p:sldId id="267" r:id="rId12"/>
+    <p:sldId id="268" r:id="rId13"/>
+    <p:sldId id="269" r:id="rId14"/>
+    <p:sldId id="270" r:id="rId15"/>
+    <p:sldId id="271" r:id="rId16"/>
+    <p:sldId id="273" r:id="rId17"/>
+    <p:sldId id="274" r:id="rId18"/>
+    <p:sldId id="275" r:id="rId19"/>
+    <p:sldId id="276" r:id="rId20"/>
+    <p:sldId id="277" r:id="rId21"/>
+    <p:sldId id="278" r:id="rId22"/>
+    <p:sldId id="279" r:id="rId23"/>
+    <p:sldId id="280" r:id="rId24"/>
+    <p:sldId id="281" r:id="rId25"/>
+    <p:sldId id="282" r:id="rId26"/>
+    <p:sldId id="283" r:id="rId27"/>
+    <p:sldId id="284" r:id="rId28"/>
+    <p:sldId id="286" r:id="rId29"/>
+    <p:sldId id="287" r:id="rId30"/>
+    <p:sldId id="288" r:id="rId31"/>
+    <p:sldId id="289" r:id="rId32"/>
+    <p:sldId id="290" r:id="rId33"/>
+    <p:sldId id="291" r:id="rId34"/>
+    <p:sldId id="292" r:id="rId35"/>
+    <p:sldId id="293" r:id="rId36"/>
   </p:sldIdLst>
-  <p:sldSz cy="5143500" cx="9144000"/>
+  <p:sldSz cx="9144000" cy="5143500" type="screen16x9"/>
   <p:notesSz cx="6858000" cy="9144000"/>
   <p:defaultTextStyle>
-    <a:defPPr lvl="0" marR="0" rtl="0" algn="l">
+    <a:defPPr marR="0" lvl="0" algn="l" rtl="0">
       <a:lnSpc>
         <a:spcPct val="100000"/>
       </a:lnSpc>
@@ -55,7 +58,7 @@
         <a:spcPts val="0"/>
       </a:spcAft>
     </a:defPPr>
-    <a:lvl1pPr lvl="0" marR="0" rtl="0" algn="l">
+    <a:lvl1pPr marR="0" lvl="0" algn="l" rtl="0">
       <a:lnSpc>
         <a:spcPct val="100000"/>
       </a:lnSpc>
@@ -69,7 +72,7 @@
         <a:srgbClr val="000000"/>
       </a:buClr>
       <a:buFont typeface="Arial"/>
-      <a:defRPr b="0" i="0" sz="1400" u="none" cap="none" strike="noStrike">
+      <a:defRPr sz="1400" b="0" i="0" u="none" strike="noStrike" cap="none">
         <a:solidFill>
           <a:srgbClr val="000000"/>
         </a:solidFill>
@@ -79,7 +82,7 @@
         <a:sym typeface="Arial"/>
       </a:defRPr>
     </a:lvl1pPr>
-    <a:lvl2pPr lvl="1" marR="0" rtl="0" algn="l">
+    <a:lvl2pPr marR="0" lvl="1" algn="l" rtl="0">
       <a:lnSpc>
         <a:spcPct val="100000"/>
       </a:lnSpc>
@@ -93,7 +96,7 @@
         <a:srgbClr val="000000"/>
       </a:buClr>
       <a:buFont typeface="Arial"/>
-      <a:defRPr b="0" i="0" sz="1400" u="none" cap="none" strike="noStrike">
+      <a:defRPr sz="1400" b="0" i="0" u="none" strike="noStrike" cap="none">
         <a:solidFill>
           <a:srgbClr val="000000"/>
         </a:solidFill>
@@ -103,7 +106,7 @@
         <a:sym typeface="Arial"/>
       </a:defRPr>
     </a:lvl2pPr>
-    <a:lvl3pPr lvl="2" marR="0" rtl="0" algn="l">
+    <a:lvl3pPr marR="0" lvl="2" algn="l" rtl="0">
       <a:lnSpc>
         <a:spcPct val="100000"/>
       </a:lnSpc>
@@ -117,7 +120,7 @@
         <a:srgbClr val="000000"/>
       </a:buClr>
       <a:buFont typeface="Arial"/>
-      <a:defRPr b="0" i="0" sz="1400" u="none" cap="none" strike="noStrike">
+      <a:defRPr sz="1400" b="0" i="0" u="none" strike="noStrike" cap="none">
         <a:solidFill>
           <a:srgbClr val="000000"/>
         </a:solidFill>
@@ -127,7 +130,7 @@
         <a:sym typeface="Arial"/>
       </a:defRPr>
     </a:lvl3pPr>
-    <a:lvl4pPr lvl="3" marR="0" rtl="0" algn="l">
+    <a:lvl4pPr marR="0" lvl="3" algn="l" rtl="0">
       <a:lnSpc>
         <a:spcPct val="100000"/>
       </a:lnSpc>
@@ -141,7 +144,7 @@
         <a:srgbClr val="000000"/>
       </a:buClr>
       <a:buFont typeface="Arial"/>
-      <a:defRPr b="0" i="0" sz="1400" u="none" cap="none" strike="noStrike">
+      <a:defRPr sz="1400" b="0" i="0" u="none" strike="noStrike" cap="none">
         <a:solidFill>
           <a:srgbClr val="000000"/>
         </a:solidFill>
@@ -151,7 +154,7 @@
         <a:sym typeface="Arial"/>
       </a:defRPr>
     </a:lvl4pPr>
-    <a:lvl5pPr lvl="4" marR="0" rtl="0" algn="l">
+    <a:lvl5pPr marR="0" lvl="4" algn="l" rtl="0">
       <a:lnSpc>
         <a:spcPct val="100000"/>
       </a:lnSpc>
@@ -165,7 +168,7 @@
         <a:srgbClr val="000000"/>
       </a:buClr>
       <a:buFont typeface="Arial"/>
-      <a:defRPr b="0" i="0" sz="1400" u="none" cap="none" strike="noStrike">
+      <a:defRPr sz="1400" b="0" i="0" u="none" strike="noStrike" cap="none">
         <a:solidFill>
           <a:srgbClr val="000000"/>
         </a:solidFill>
@@ -175,7 +178,7 @@
         <a:sym typeface="Arial"/>
       </a:defRPr>
     </a:lvl5pPr>
-    <a:lvl6pPr lvl="5" marR="0" rtl="0" algn="l">
+    <a:lvl6pPr marR="0" lvl="5" algn="l" rtl="0">
       <a:lnSpc>
         <a:spcPct val="100000"/>
       </a:lnSpc>
@@ -189,7 +192,7 @@
         <a:srgbClr val="000000"/>
       </a:buClr>
       <a:buFont typeface="Arial"/>
-      <a:defRPr b="0" i="0" sz="1400" u="none" cap="none" strike="noStrike">
+      <a:defRPr sz="1400" b="0" i="0" u="none" strike="noStrike" cap="none">
         <a:solidFill>
           <a:srgbClr val="000000"/>
         </a:solidFill>
@@ -199,7 +202,7 @@
         <a:sym typeface="Arial"/>
       </a:defRPr>
     </a:lvl6pPr>
-    <a:lvl7pPr lvl="6" marR="0" rtl="0" algn="l">
+    <a:lvl7pPr marR="0" lvl="6" algn="l" rtl="0">
       <a:lnSpc>
         <a:spcPct val="100000"/>
       </a:lnSpc>
@@ -213,7 +216,7 @@
         <a:srgbClr val="000000"/>
       </a:buClr>
       <a:buFont typeface="Arial"/>
-      <a:defRPr b="0" i="0" sz="1400" u="none" cap="none" strike="noStrike">
+      <a:defRPr sz="1400" b="0" i="0" u="none" strike="noStrike" cap="none">
         <a:solidFill>
           <a:srgbClr val="000000"/>
         </a:solidFill>
@@ -223,7 +226,7 @@
         <a:sym typeface="Arial"/>
       </a:defRPr>
     </a:lvl7pPr>
-    <a:lvl8pPr lvl="7" marR="0" rtl="0" algn="l">
+    <a:lvl8pPr marR="0" lvl="7" algn="l" rtl="0">
       <a:lnSpc>
         <a:spcPct val="100000"/>
       </a:lnSpc>
@@ -237,7 +240,7 @@
         <a:srgbClr val="000000"/>
       </a:buClr>
       <a:buFont typeface="Arial"/>
-      <a:defRPr b="0" i="0" sz="1400" u="none" cap="none" strike="noStrike">
+      <a:defRPr sz="1400" b="0" i="0" u="none" strike="noStrike" cap="none">
         <a:solidFill>
           <a:srgbClr val="000000"/>
         </a:solidFill>
@@ -247,7 +250,7 @@
         <a:sym typeface="Arial"/>
       </a:defRPr>
     </a:lvl8pPr>
-    <a:lvl9pPr lvl="8" marR="0" rtl="0" algn="l">
+    <a:lvl9pPr marR="0" lvl="8" algn="l" rtl="0">
       <a:lnSpc>
         <a:spcPct val="100000"/>
       </a:lnSpc>
@@ -261,7 +264,7 @@
         <a:srgbClr val="000000"/>
       </a:buClr>
       <a:buFont typeface="Arial"/>
-      <a:defRPr b="0" i="0" sz="1400" u="none" cap="none" strike="noStrike">
+      <a:defRPr sz="1400" b="0" i="0" u="none" strike="noStrike" cap="none">
         <a:solidFill>
           <a:srgbClr val="000000"/>
         </a:solidFill>
@@ -274,7 +277,7 @@
   </p:defaultTextStyle>
   <p:extLst>
     <p:ext uri="{EFAFB233-063F-42B5-8137-9DF3F51BA10A}">
-      <p15:sldGuideLst>
+      <p15:sldGuideLst xmlns:p15="http://schemas.microsoft.com/office/powerpoint/2012/main">
         <p15:guide id="1" orient="horz" pos="1620">
           <p15:clr>
             <a:srgbClr val="747775"/>
@@ -292,11 +295,16 @@
 </file>
 
 <file path=ppt/notesMasters/notesMaster1.xml><?xml version="1.0" encoding="utf-8"?>
-<p:notesMaster xmlns:a="http://schemas.openxmlformats.org/drawingml/2006/main" xmlns:r="http://schemas.openxmlformats.org/officeDocument/2006/relationships" xmlns:mc="http://schemas.openxmlformats.org/markup-compatibility/2006" xmlns:mv="urn:schemas-microsoft-com:mac:vml" xmlns:p="http://schemas.openxmlformats.org/presentationml/2006/main" xmlns:c="http://schemas.openxmlformats.org/drawingml/2006/chart" xmlns:dgm="http://schemas.openxmlformats.org/drawingml/2006/diagram" xmlns:o="urn:schemas-microsoft-com:office:office" xmlns:v="urn:schemas-microsoft-com:vml" xmlns:pvml="urn:schemas-microsoft-com:office:powerpoint" xmlns:com="http://schemas.openxmlformats.org/drawingml/2006/compatibility" xmlns:p14="http://schemas.microsoft.com/office/powerpoint/2010/main" xmlns:p15="http://schemas.microsoft.com/office/powerpoint/2012/main" xmlns:ahyp="http://schemas.microsoft.com/office/drawing/2018/hyperlinkcolor">
+<p:notesMaster xmlns:a="http://schemas.openxmlformats.org/drawingml/2006/main" xmlns:r="http://schemas.openxmlformats.org/officeDocument/2006/relationships" xmlns:p="http://schemas.openxmlformats.org/presentationml/2006/main">
   <p:cSld>
+    <p:bg>
+      <p:bgRef idx="1001">
+        <a:schemeClr val="bg1"/>
+      </p:bgRef>
+    </p:bg>
     <p:spTree>
       <p:nvGrpSpPr>
-        <p:cNvPr id="2" name="Shape 2"/>
+        <p:cNvPr id="1" name="Shape 2"/>
         <p:cNvGrpSpPr/>
         <p:nvPr/>
       </p:nvGrpSpPr>
@@ -311,9 +319,11 @@
       <p:sp>
         <p:nvSpPr>
           <p:cNvPr id="3" name="Google Shape;3;n"/>
-          <p:cNvSpPr/>
+          <p:cNvSpPr>
+            <a:spLocks noGrp="1" noRot="1" noChangeAspect="1"/>
+          </p:cNvSpPr>
           <p:nvPr>
-            <p:ph idx="2" type="sldImg"/>
+            <p:ph type="sldImg" idx="2"/>
           </p:nvPr>
         </p:nvSpPr>
         <p:spPr>
@@ -322,9 +332,13 @@
             <a:ext cx="6096075" cy="3429000"/>
           </a:xfrm>
           <a:custGeom>
-            <a:rect b="b" l="l" r="r" t="t"/>
+            <a:avLst/>
+            <a:gdLst/>
+            <a:ahLst/>
+            <a:cxnLst/>
+            <a:rect l="l" t="t" r="r" b="b"/>
             <a:pathLst>
-              <a:path extrusionOk="0" h="120000" w="120000">
+              <a:path w="120000" h="120000" extrusionOk="0">
                 <a:moveTo>
                   <a:pt x="0" y="0"/>
                 </a:moveTo>
@@ -342,23 +356,25 @@
             </a:pathLst>
           </a:custGeom>
           <a:noFill/>
-          <a:ln cap="flat" cmpd="sng" w="9525">
+          <a:ln w="9525" cap="flat" cmpd="sng">
             <a:solidFill>
               <a:srgbClr val="000000"/>
             </a:solidFill>
             <a:prstDash val="solid"/>
             <a:round/>
-            <a:headEnd len="sm" w="sm" type="none"/>
-            <a:tailEnd len="sm" w="sm" type="none"/>
+            <a:headEnd type="none" w="sm" len="sm"/>
+            <a:tailEnd type="none" w="sm" len="sm"/>
           </a:ln>
         </p:spPr>
       </p:sp>
       <p:sp>
         <p:nvSpPr>
           <p:cNvPr id="4" name="Google Shape;4;n"/>
-          <p:cNvSpPr txBox="1"/>
+          <p:cNvSpPr txBox="1">
+            <a:spLocks noGrp="1"/>
+          </p:cNvSpPr>
           <p:nvPr>
-            <p:ph idx="1" type="body"/>
+            <p:ph type="body" idx="1"/>
           </p:nvPr>
         </p:nvSpPr>
         <p:spPr>
@@ -375,11 +391,11 @@
           </a:ln>
         </p:spPr>
         <p:txBody>
-          <a:bodyPr anchorCtr="0" anchor="t" bIns="91425" lIns="91425" spcFirstLastPara="1" rIns="91425" wrap="square" tIns="91425">
+          <a:bodyPr spcFirstLastPara="1" wrap="square" lIns="91425" tIns="91425" rIns="91425" bIns="91425" anchor="t" anchorCtr="0">
             <a:noAutofit/>
           </a:bodyPr>
           <a:lstStyle>
-            <a:lvl1pPr indent="-298450" lvl="0" marL="457200">
+            <a:lvl1pPr marL="457200" lvl="0" indent="-298450">
               <a:spcBef>
                 <a:spcPts val="0"/>
               </a:spcBef>
@@ -390,7 +406,7 @@
               <a:buChar char="●"/>
               <a:defRPr sz="1100"/>
             </a:lvl1pPr>
-            <a:lvl2pPr indent="-298450" lvl="1" marL="914400">
+            <a:lvl2pPr marL="914400" lvl="1" indent="-298450">
               <a:spcBef>
                 <a:spcPts val="0"/>
               </a:spcBef>
@@ -401,7 +417,7 @@
               <a:buChar char="○"/>
               <a:defRPr sz="1100"/>
             </a:lvl2pPr>
-            <a:lvl3pPr indent="-298450" lvl="2" marL="1371600">
+            <a:lvl3pPr marL="1371600" lvl="2" indent="-298450">
               <a:spcBef>
                 <a:spcPts val="0"/>
               </a:spcBef>
@@ -412,7 +428,7 @@
               <a:buChar char="■"/>
               <a:defRPr sz="1100"/>
             </a:lvl3pPr>
-            <a:lvl4pPr indent="-298450" lvl="3" marL="1828800">
+            <a:lvl4pPr marL="1828800" lvl="3" indent="-298450">
               <a:spcBef>
                 <a:spcPts val="0"/>
               </a:spcBef>
@@ -423,7 +439,7 @@
               <a:buChar char="●"/>
               <a:defRPr sz="1100"/>
             </a:lvl4pPr>
-            <a:lvl5pPr indent="-298450" lvl="4" marL="2286000">
+            <a:lvl5pPr marL="2286000" lvl="4" indent="-298450">
               <a:spcBef>
                 <a:spcPts val="0"/>
               </a:spcBef>
@@ -434,7 +450,7 @@
               <a:buChar char="○"/>
               <a:defRPr sz="1100"/>
             </a:lvl5pPr>
-            <a:lvl6pPr indent="-298450" lvl="5" marL="2743200">
+            <a:lvl6pPr marL="2743200" lvl="5" indent="-298450">
               <a:spcBef>
                 <a:spcPts val="0"/>
               </a:spcBef>
@@ -445,7 +461,7 @@
               <a:buChar char="■"/>
               <a:defRPr sz="1100"/>
             </a:lvl6pPr>
-            <a:lvl7pPr indent="-298450" lvl="6" marL="3200400">
+            <a:lvl7pPr marL="3200400" lvl="6" indent="-298450">
               <a:spcBef>
                 <a:spcPts val="0"/>
               </a:spcBef>
@@ -456,7 +472,7 @@
               <a:buChar char="●"/>
               <a:defRPr sz="1100"/>
             </a:lvl7pPr>
-            <a:lvl8pPr indent="-298450" lvl="7" marL="3657600">
+            <a:lvl8pPr marL="3657600" lvl="7" indent="-298450">
               <a:spcBef>
                 <a:spcPts val="0"/>
               </a:spcBef>
@@ -467,7 +483,7 @@
               <a:buChar char="○"/>
               <a:defRPr sz="1100"/>
             </a:lvl8pPr>
-            <a:lvl9pPr indent="-298450" lvl="8" marL="4114800">
+            <a:lvl9pPr marL="4114800" lvl="8" indent="-298450">
               <a:spcBef>
                 <a:spcPts val="0"/>
               </a:spcBef>
@@ -479,14 +495,16 @@
               <a:defRPr sz="1100"/>
             </a:lvl9pPr>
           </a:lstStyle>
-          <a:p/>
+          <a:p>
+            <a:endParaRPr/>
+          </a:p>
         </p:txBody>
       </p:sp>
     </p:spTree>
   </p:cSld>
-  <p:clrMap accent1="accent1" accent2="accent2" accent3="accent3" accent4="accent4" accent5="accent5" accent6="accent6" bg1="lt1" bg2="dk2" tx1="dk1" tx2="lt2" folHlink="folHlink" hlink="hlink"/>
+  <p:clrMap bg1="lt1" tx1="dk1" bg2="dk2" tx2="lt2" accent1="accent1" accent2="accent2" accent3="accent3" accent4="accent4" accent5="accent5" accent6="accent6" hlink="hlink" folHlink="folHlink"/>
   <p:notesStyle>
-    <a:defPPr lvl="0" marR="0" rtl="0" algn="l">
+    <a:defPPr marR="0" lvl="0" algn="l" rtl="0">
       <a:lnSpc>
         <a:spcPct val="100000"/>
       </a:lnSpc>
@@ -497,7 +515,7 @@
         <a:spcPts val="0"/>
       </a:spcAft>
     </a:defPPr>
-    <a:lvl1pPr lvl="0" marR="0" rtl="0" algn="l">
+    <a:lvl1pPr marR="0" lvl="0" algn="l" rtl="0">
       <a:lnSpc>
         <a:spcPct val="100000"/>
       </a:lnSpc>
@@ -511,7 +529,7 @@
         <a:srgbClr val="000000"/>
       </a:buClr>
       <a:buFont typeface="Arial"/>
-      <a:defRPr b="0" i="0" sz="1400" u="none" cap="none" strike="noStrike">
+      <a:defRPr sz="1400" b="0" i="0" u="none" strike="noStrike" cap="none">
         <a:solidFill>
           <a:srgbClr val="000000"/>
         </a:solidFill>
@@ -521,7 +539,7 @@
         <a:sym typeface="Arial"/>
       </a:defRPr>
     </a:lvl1pPr>
-    <a:lvl2pPr lvl="1" marR="0" rtl="0" algn="l">
+    <a:lvl2pPr marR="0" lvl="1" algn="l" rtl="0">
       <a:lnSpc>
         <a:spcPct val="100000"/>
       </a:lnSpc>
@@ -535,7 +553,7 @@
         <a:srgbClr val="000000"/>
       </a:buClr>
       <a:buFont typeface="Arial"/>
-      <a:defRPr b="0" i="0" sz="1400" u="none" cap="none" strike="noStrike">
+      <a:defRPr sz="1400" b="0" i="0" u="none" strike="noStrike" cap="none">
         <a:solidFill>
           <a:srgbClr val="000000"/>
         </a:solidFill>
@@ -545,7 +563,7 @@
         <a:sym typeface="Arial"/>
       </a:defRPr>
     </a:lvl2pPr>
-    <a:lvl3pPr lvl="2" marR="0" rtl="0" algn="l">
+    <a:lvl3pPr marR="0" lvl="2" algn="l" rtl="0">
       <a:lnSpc>
         <a:spcPct val="100000"/>
       </a:lnSpc>
@@ -559,7 +577,7 @@
         <a:srgbClr val="000000"/>
       </a:buClr>
       <a:buFont typeface="Arial"/>
-      <a:defRPr b="0" i="0" sz="1400" u="none" cap="none" strike="noStrike">
+      <a:defRPr sz="1400" b="0" i="0" u="none" strike="noStrike" cap="none">
         <a:solidFill>
           <a:srgbClr val="000000"/>
         </a:solidFill>
@@ -569,7 +587,7 @@
         <a:sym typeface="Arial"/>
       </a:defRPr>
     </a:lvl3pPr>
-    <a:lvl4pPr lvl="3" marR="0" rtl="0" algn="l">
+    <a:lvl4pPr marR="0" lvl="3" algn="l" rtl="0">
       <a:lnSpc>
         <a:spcPct val="100000"/>
       </a:lnSpc>
@@ -583,7 +601,7 @@
         <a:srgbClr val="000000"/>
       </a:buClr>
       <a:buFont typeface="Arial"/>
-      <a:defRPr b="0" i="0" sz="1400" u="none" cap="none" strike="noStrike">
+      <a:defRPr sz="1400" b="0" i="0" u="none" strike="noStrike" cap="none">
         <a:solidFill>
           <a:srgbClr val="000000"/>
         </a:solidFill>
@@ -593,7 +611,7 @@
         <a:sym typeface="Arial"/>
       </a:defRPr>
     </a:lvl4pPr>
-    <a:lvl5pPr lvl="4" marR="0" rtl="0" algn="l">
+    <a:lvl5pPr marR="0" lvl="4" algn="l" rtl="0">
       <a:lnSpc>
         <a:spcPct val="100000"/>
       </a:lnSpc>
@@ -607,7 +625,7 @@
         <a:srgbClr val="000000"/>
       </a:buClr>
       <a:buFont typeface="Arial"/>
-      <a:defRPr b="0" i="0" sz="1400" u="none" cap="none" strike="noStrike">
+      <a:defRPr sz="1400" b="0" i="0" u="none" strike="noStrike" cap="none">
         <a:solidFill>
           <a:srgbClr val="000000"/>
         </a:solidFill>
@@ -617,7 +635,7 @@
         <a:sym typeface="Arial"/>
       </a:defRPr>
     </a:lvl5pPr>
-    <a:lvl6pPr lvl="5" marR="0" rtl="0" algn="l">
+    <a:lvl6pPr marR="0" lvl="5" algn="l" rtl="0">
       <a:lnSpc>
         <a:spcPct val="100000"/>
       </a:lnSpc>
@@ -631,7 +649,7 @@
         <a:srgbClr val="000000"/>
       </a:buClr>
       <a:buFont typeface="Arial"/>
-      <a:defRPr b="0" i="0" sz="1400" u="none" cap="none" strike="noStrike">
+      <a:defRPr sz="1400" b="0" i="0" u="none" strike="noStrike" cap="none">
         <a:solidFill>
           <a:srgbClr val="000000"/>
         </a:solidFill>
@@ -641,7 +659,7 @@
         <a:sym typeface="Arial"/>
       </a:defRPr>
     </a:lvl6pPr>
-    <a:lvl7pPr lvl="6" marR="0" rtl="0" algn="l">
+    <a:lvl7pPr marR="0" lvl="6" algn="l" rtl="0">
       <a:lnSpc>
         <a:spcPct val="100000"/>
       </a:lnSpc>
@@ -655,7 +673,7 @@
         <a:srgbClr val="000000"/>
       </a:buClr>
       <a:buFont typeface="Arial"/>
-      <a:defRPr b="0" i="0" sz="1400" u="none" cap="none" strike="noStrike">
+      <a:defRPr sz="1400" b="0" i="0" u="none" strike="noStrike" cap="none">
         <a:solidFill>
           <a:srgbClr val="000000"/>
         </a:solidFill>
@@ -665,7 +683,7 @@
         <a:sym typeface="Arial"/>
       </a:defRPr>
     </a:lvl7pPr>
-    <a:lvl8pPr lvl="7" marR="0" rtl="0" algn="l">
+    <a:lvl8pPr marR="0" lvl="7" algn="l" rtl="0">
       <a:lnSpc>
         <a:spcPct val="100000"/>
       </a:lnSpc>
@@ -679,7 +697,7 @@
         <a:srgbClr val="000000"/>
       </a:buClr>
       <a:buFont typeface="Arial"/>
-      <a:defRPr b="0" i="0" sz="1400" u="none" cap="none" strike="noStrike">
+      <a:defRPr sz="1400" b="0" i="0" u="none" strike="noStrike" cap="none">
         <a:solidFill>
           <a:srgbClr val="000000"/>
         </a:solidFill>
@@ -689,7 +707,7 @@
         <a:sym typeface="Arial"/>
       </a:defRPr>
     </a:lvl8pPr>
-    <a:lvl9pPr lvl="8" marR="0" rtl="0" algn="l">
+    <a:lvl9pPr marR="0" lvl="8" algn="l" rtl="0">
       <a:lnSpc>
         <a:spcPct val="100000"/>
       </a:lnSpc>
@@ -703,7 +721,7 @@
         <a:srgbClr val="000000"/>
       </a:buClr>
       <a:buFont typeface="Arial"/>
-      <a:defRPr b="0" i="0" sz="1400" u="none" cap="none" strike="noStrike">
+      <a:defRPr sz="1400" b="0" i="0" u="none" strike="noStrike" cap="none">
         <a:solidFill>
           <a:srgbClr val="000000"/>
         </a:solidFill>
@@ -718,18 +736,19 @@
 </file>
 
 <file path=ppt/slideLayouts/slideLayout1.xml><?xml version="1.0" encoding="utf-8"?>
-<p:sldLayout xmlns:a="http://schemas.openxmlformats.org/drawingml/2006/main" xmlns:r="http://schemas.openxmlformats.org/officeDocument/2006/relationships" xmlns:mc="http://schemas.openxmlformats.org/markup-compatibility/2006" xmlns:mv="urn:schemas-microsoft-com:mac:vml" xmlns:p="http://schemas.openxmlformats.org/presentationml/2006/main" xmlns:c="http://schemas.openxmlformats.org/drawingml/2006/chart" xmlns:dgm="http://schemas.openxmlformats.org/drawingml/2006/diagram" xmlns:o="urn:schemas-microsoft-com:office:office" xmlns:v="urn:schemas-microsoft-com:vml" xmlns:pvml="urn:schemas-microsoft-com:office:powerpoint" xmlns:com="http://schemas.openxmlformats.org/drawingml/2006/compatibility" xmlns:p14="http://schemas.microsoft.com/office/powerpoint/2010/main" xmlns:p15="http://schemas.microsoft.com/office/powerpoint/2012/main" xmlns:ahyp="http://schemas.microsoft.com/office/drawing/2018/hyperlinkcolor" matchingName="Portada Azul" type="title">
+<p:sldLayout xmlns:a="http://schemas.openxmlformats.org/drawingml/2006/main" xmlns:r="http://schemas.openxmlformats.org/officeDocument/2006/relationships" xmlns:p="http://schemas.openxmlformats.org/presentationml/2006/main" matchingName="Portada Azul" type="title">
   <p:cSld name="TITLE">
     <p:bg>
       <p:bgPr>
         <a:solidFill>
           <a:srgbClr val="1D1D30"/>
         </a:solidFill>
+        <a:effectLst/>
       </p:bgPr>
     </p:bg>
     <p:spTree>
       <p:nvGrpSpPr>
-        <p:cNvPr id="9" name="Shape 9"/>
+        <p:cNvPr id="1" name="Shape 9"/>
         <p:cNvGrpSpPr/>
         <p:nvPr/>
       </p:nvGrpSpPr>
@@ -772,7 +791,9 @@
       <p:sp>
         <p:nvSpPr>
           <p:cNvPr id="11" name="Google Shape;11;p2"/>
-          <p:cNvSpPr txBox="1"/>
+          <p:cNvSpPr txBox="1">
+            <a:spLocks noGrp="1"/>
+          </p:cNvSpPr>
           <p:nvPr>
             <p:ph type="ctrTitle"/>
           </p:nvPr>
@@ -787,7 +808,7 @@
           </a:prstGeom>
         </p:spPr>
         <p:txBody>
-          <a:bodyPr anchorCtr="0" anchor="ctr" bIns="91425" lIns="91425" spcFirstLastPara="1" rIns="91425" wrap="square" tIns="91425">
+          <a:bodyPr spcFirstLastPara="1" wrap="square" lIns="91425" tIns="91425" rIns="91425" bIns="91425" anchor="ctr" anchorCtr="0">
             <a:normAutofit/>
           </a:bodyPr>
           <a:lstStyle>
@@ -803,7 +824,7 @@
               </a:buClr>
               <a:buSzPts val="5200"/>
               <a:buNone/>
-              <a:defRPr b="1" sz="5200">
+              <a:defRPr sz="5200" b="1">
                 <a:solidFill>
                   <a:schemeClr val="lt1"/>
                 </a:solidFill>
@@ -818,7 +839,7 @@
               </a:spcAft>
               <a:buSzPts val="5200"/>
               <a:buNone/>
-              <a:defRPr b="1" sz="5200"/>
+              <a:defRPr sz="5200" b="1"/>
             </a:lvl2pPr>
             <a:lvl3pPr lvl="2" algn="ctr">
               <a:spcBef>
@@ -829,7 +850,7 @@
               </a:spcAft>
               <a:buSzPts val="5200"/>
               <a:buNone/>
-              <a:defRPr b="1" sz="5200"/>
+              <a:defRPr sz="5200" b="1"/>
             </a:lvl3pPr>
             <a:lvl4pPr lvl="3" algn="ctr">
               <a:spcBef>
@@ -840,7 +861,7 @@
               </a:spcAft>
               <a:buSzPts val="5200"/>
               <a:buNone/>
-              <a:defRPr b="1" sz="5200"/>
+              <a:defRPr sz="5200" b="1"/>
             </a:lvl4pPr>
             <a:lvl5pPr lvl="4" algn="ctr">
               <a:spcBef>
@@ -851,7 +872,7 @@
               </a:spcAft>
               <a:buSzPts val="5200"/>
               <a:buNone/>
-              <a:defRPr b="1" sz="5200"/>
+              <a:defRPr sz="5200" b="1"/>
             </a:lvl5pPr>
             <a:lvl6pPr lvl="5" algn="ctr">
               <a:spcBef>
@@ -862,7 +883,7 @@
               </a:spcAft>
               <a:buSzPts val="5200"/>
               <a:buNone/>
-              <a:defRPr b="1" sz="5200"/>
+              <a:defRPr sz="5200" b="1"/>
             </a:lvl6pPr>
             <a:lvl7pPr lvl="6" algn="ctr">
               <a:spcBef>
@@ -873,7 +894,7 @@
               </a:spcAft>
               <a:buSzPts val="5200"/>
               <a:buNone/>
-              <a:defRPr b="1" sz="5200"/>
+              <a:defRPr sz="5200" b="1"/>
             </a:lvl7pPr>
             <a:lvl8pPr lvl="7" algn="ctr">
               <a:spcBef>
@@ -884,7 +905,7 @@
               </a:spcAft>
               <a:buSzPts val="5200"/>
               <a:buNone/>
-              <a:defRPr b="1" sz="5200"/>
+              <a:defRPr sz="5200" b="1"/>
             </a:lvl8pPr>
             <a:lvl9pPr lvl="8" algn="ctr">
               <a:spcBef>
@@ -895,18 +916,22 @@
               </a:spcAft>
               <a:buSzPts val="5200"/>
               <a:buNone/>
-              <a:defRPr b="1" sz="5200"/>
+              <a:defRPr sz="5200" b="1"/>
             </a:lvl9pPr>
           </a:lstStyle>
-          <a:p/>
+          <a:p>
+            <a:endParaRPr/>
+          </a:p>
         </p:txBody>
       </p:sp>
       <p:sp>
         <p:nvSpPr>
           <p:cNvPr id="12" name="Google Shape;12;p2"/>
-          <p:cNvSpPr txBox="1"/>
+          <p:cNvSpPr txBox="1">
+            <a:spLocks noGrp="1"/>
+          </p:cNvSpPr>
           <p:nvPr>
-            <p:ph idx="1" type="subTitle"/>
+            <p:ph type="subTitle" idx="1"/>
           </p:nvPr>
         </p:nvSpPr>
         <p:spPr>
@@ -923,7 +948,7 @@
           </a:ln>
         </p:spPr>
         <p:txBody>
-          <a:bodyPr anchorCtr="0" anchor="ctr" bIns="91425" lIns="91425" spcFirstLastPara="1" rIns="91425" wrap="square" tIns="91425">
+          <a:bodyPr spcFirstLastPara="1" wrap="square" lIns="91425" tIns="91425" rIns="91425" bIns="91425" anchor="ctr" anchorCtr="0">
             <a:noAutofit/>
           </a:bodyPr>
           <a:lstStyle>
@@ -942,7 +967,7 @@
               </a:buClr>
               <a:buSzPts val="2800"/>
               <a:buNone/>
-              <a:defRPr b="1" sz="2800">
+              <a:defRPr sz="2800" b="1">
                 <a:solidFill>
                   <a:srgbClr val="1D1D30"/>
                 </a:solidFill>
@@ -963,7 +988,7 @@
               </a:buClr>
               <a:buSzPts val="2800"/>
               <a:buNone/>
-              <a:defRPr b="1" sz="2800">
+              <a:defRPr sz="2800" b="1">
                 <a:solidFill>
                   <a:srgbClr val="1D1D30"/>
                 </a:solidFill>
@@ -984,7 +1009,7 @@
               </a:buClr>
               <a:buSzPts val="2800"/>
               <a:buNone/>
-              <a:defRPr b="1" sz="2800">
+              <a:defRPr sz="2800" b="1">
                 <a:solidFill>
                   <a:srgbClr val="1D1D30"/>
                 </a:solidFill>
@@ -1005,7 +1030,7 @@
               </a:buClr>
               <a:buSzPts val="2800"/>
               <a:buNone/>
-              <a:defRPr b="1" sz="2800">
+              <a:defRPr sz="2800" b="1">
                 <a:solidFill>
                   <a:srgbClr val="1D1D30"/>
                 </a:solidFill>
@@ -1026,7 +1051,7 @@
               </a:buClr>
               <a:buSzPts val="2800"/>
               <a:buNone/>
-              <a:defRPr b="1" sz="2800">
+              <a:defRPr sz="2800" b="1">
                 <a:solidFill>
                   <a:srgbClr val="1D1D30"/>
                 </a:solidFill>
@@ -1047,7 +1072,7 @@
               </a:buClr>
               <a:buSzPts val="2800"/>
               <a:buNone/>
-              <a:defRPr b="1" sz="2800">
+              <a:defRPr sz="2800" b="1">
                 <a:solidFill>
                   <a:srgbClr val="1D1D30"/>
                 </a:solidFill>
@@ -1068,7 +1093,7 @@
               </a:buClr>
               <a:buSzPts val="2800"/>
               <a:buNone/>
-              <a:defRPr b="1" sz="2800">
+              <a:defRPr sz="2800" b="1">
                 <a:solidFill>
                   <a:srgbClr val="1D1D30"/>
                 </a:solidFill>
@@ -1089,7 +1114,7 @@
               </a:buClr>
               <a:buSzPts val="2800"/>
               <a:buNone/>
-              <a:defRPr b="1" sz="2800">
+              <a:defRPr sz="2800" b="1">
                 <a:solidFill>
                   <a:srgbClr val="1D1D30"/>
                 </a:solidFill>
@@ -1110,14 +1135,16 @@
               </a:buClr>
               <a:buSzPts val="2800"/>
               <a:buNone/>
-              <a:defRPr b="1" sz="2800">
+              <a:defRPr sz="2800" b="1">
                 <a:solidFill>
                   <a:srgbClr val="1D1D30"/>
                 </a:solidFill>
               </a:defRPr>
             </a:lvl9pPr>
           </a:lstStyle>
-          <a:p/>
+          <a:p>
+            <a:endParaRPr/>
+          </a:p>
         </p:txBody>
       </p:sp>
       <p:pic>
@@ -1157,18 +1184,19 @@
 </file>
 
 <file path=ppt/slideLayouts/slideLayout10.xml><?xml version="1.0" encoding="utf-8"?>
-<p:sldLayout xmlns:a="http://schemas.openxmlformats.org/drawingml/2006/main" xmlns:r="http://schemas.openxmlformats.org/officeDocument/2006/relationships" xmlns:mc="http://schemas.openxmlformats.org/markup-compatibility/2006" xmlns:mv="urn:schemas-microsoft-com:mac:vml" xmlns:p="http://schemas.openxmlformats.org/presentationml/2006/main" xmlns:c="http://schemas.openxmlformats.org/drawingml/2006/chart" xmlns:dgm="http://schemas.openxmlformats.org/drawingml/2006/diagram" xmlns:o="urn:schemas-microsoft-com:office:office" xmlns:v="urn:schemas-microsoft-com:vml" xmlns:pvml="urn:schemas-microsoft-com:office:powerpoint" xmlns:com="http://schemas.openxmlformats.org/drawingml/2006/compatibility" xmlns:p14="http://schemas.microsoft.com/office/powerpoint/2010/main" xmlns:p15="http://schemas.microsoft.com/office/powerpoint/2012/main" xmlns:ahyp="http://schemas.microsoft.com/office/drawing/2018/hyperlinkcolor" matchingName="Vacía blanca">
+<p:sldLayout xmlns:a="http://schemas.openxmlformats.org/drawingml/2006/main" xmlns:r="http://schemas.openxmlformats.org/officeDocument/2006/relationships" xmlns:p="http://schemas.openxmlformats.org/presentationml/2006/main" matchingName="Vacía blanca">
   <p:cSld name="MAIN_POINT">
     <p:bg>
       <p:bgPr>
         <a:solidFill>
           <a:srgbClr val="1D1D30"/>
         </a:solidFill>
+        <a:effectLst/>
       </p:bgPr>
     </p:bg>
     <p:spTree>
       <p:nvGrpSpPr>
-        <p:cNvPr id="58" name="Shape 58"/>
+        <p:cNvPr id="1" name="Shape 58"/>
         <p:cNvGrpSpPr/>
         <p:nvPr/>
       </p:nvGrpSpPr>
@@ -1190,7 +1218,7 @@
           <a:blip r:embed="rId2">
             <a:alphaModFix/>
           </a:blip>
-          <a:srcRect b="70" l="0" r="0" t="70"/>
+          <a:srcRect t="70" b="70"/>
           <a:stretch/>
         </p:blipFill>
         <p:spPr>
@@ -1238,9 +1266,11 @@
       <p:sp>
         <p:nvSpPr>
           <p:cNvPr id="61" name="Google Shape;61;p11"/>
-          <p:cNvSpPr txBox="1"/>
+          <p:cNvSpPr txBox="1">
+            <a:spLocks noGrp="1"/>
+          </p:cNvSpPr>
           <p:nvPr>
-            <p:ph idx="12" type="sldNum"/>
+            <p:ph type="sldNum" idx="12"/>
           </p:nvPr>
         </p:nvSpPr>
         <p:spPr>
@@ -1253,7 +1283,7 @@
           </a:prstGeom>
         </p:spPr>
         <p:txBody>
-          <a:bodyPr anchorCtr="0" anchor="ctr" bIns="91425" lIns="91425" spcFirstLastPara="1" rIns="91425" wrap="square" tIns="91425">
+          <a:bodyPr spcFirstLastPara="1" wrap="square" lIns="91425" tIns="91425" rIns="91425" bIns="91425" anchor="ctr" anchorCtr="0">
             <a:normAutofit/>
           </a:bodyPr>
           <a:lstStyle>
@@ -1331,7 +1361,7 @@
             </a:lvl9pPr>
           </a:lstStyle>
           <a:p>
-            <a:pPr indent="0" lvl="0" marL="0" rtl="0" algn="r">
+            <a:pPr marL="0" lvl="0" indent="0" algn="r" rtl="0">
               <a:spcBef>
                 <a:spcPts val="0"/>
               </a:spcBef>
@@ -1342,7 +1372,7 @@
             </a:pPr>
             <a:fld id="{00000000-1234-1234-1234-123412341234}" type="slidenum">
               <a:rPr lang="es"/>
-              <a:t>‹#›</a:t>
+              <a:t>‹Nº›</a:t>
             </a:fld>
             <a:endParaRPr/>
           </a:p>
@@ -1363,14 +1393,14 @@
             <a:avLst/>
           </a:prstGeom>
           <a:noFill/>
-          <a:ln cap="flat" cmpd="sng" w="9525">
+          <a:ln w="9525" cap="flat" cmpd="sng">
             <a:solidFill>
               <a:srgbClr val="FF743B"/>
             </a:solidFill>
             <a:prstDash val="solid"/>
             <a:round/>
-            <a:headEnd len="med" w="med" type="none"/>
-            <a:tailEnd len="med" w="med" type="none"/>
+            <a:headEnd type="none" w="med" len="med"/>
+            <a:tailEnd type="none" w="med" len="med"/>
           </a:ln>
         </p:spPr>
       </p:cxnSp>
@@ -1383,18 +1413,19 @@
 </file>
 
 <file path=ppt/slideLayouts/slideLayout11.xml><?xml version="1.0" encoding="utf-8"?>
-<p:sldLayout xmlns:a="http://schemas.openxmlformats.org/drawingml/2006/main" xmlns:r="http://schemas.openxmlformats.org/officeDocument/2006/relationships" xmlns:mc="http://schemas.openxmlformats.org/markup-compatibility/2006" xmlns:mv="urn:schemas-microsoft-com:mac:vml" xmlns:p="http://schemas.openxmlformats.org/presentationml/2006/main" xmlns:c="http://schemas.openxmlformats.org/drawingml/2006/chart" xmlns:dgm="http://schemas.openxmlformats.org/drawingml/2006/diagram" xmlns:o="urn:schemas-microsoft-com:office:office" xmlns:v="urn:schemas-microsoft-com:vml" xmlns:pvml="urn:schemas-microsoft-com:office:powerpoint" xmlns:com="http://schemas.openxmlformats.org/drawingml/2006/compatibility" xmlns:p14="http://schemas.microsoft.com/office/powerpoint/2010/main" xmlns:p15="http://schemas.microsoft.com/office/powerpoint/2012/main" xmlns:ahyp="http://schemas.microsoft.com/office/drawing/2018/hyperlinkcolor" matchingName="Vacía amarilla">
+<p:sldLayout xmlns:a="http://schemas.openxmlformats.org/drawingml/2006/main" xmlns:r="http://schemas.openxmlformats.org/officeDocument/2006/relationships" xmlns:p="http://schemas.openxmlformats.org/presentationml/2006/main" matchingName="Vacía amarilla">
   <p:cSld name="MAIN_POINT_1">
     <p:bg>
       <p:bgPr>
         <a:solidFill>
           <a:srgbClr val="1D1D30"/>
         </a:solidFill>
+        <a:effectLst/>
       </p:bgPr>
     </p:bg>
     <p:spTree>
       <p:nvGrpSpPr>
-        <p:cNvPr id="63" name="Shape 63"/>
+        <p:cNvPr id="1" name="Shape 63"/>
         <p:cNvGrpSpPr/>
         <p:nvPr/>
       </p:nvGrpSpPr>
@@ -1416,7 +1447,7 @@
           <a:blip r:embed="rId2">
             <a:alphaModFix/>
           </a:blip>
-          <a:srcRect b="0" l="0" r="0" t="0"/>
+          <a:srcRect/>
           <a:stretch/>
         </p:blipFill>
         <p:spPr>
@@ -1464,9 +1495,11 @@
       <p:sp>
         <p:nvSpPr>
           <p:cNvPr id="66" name="Google Shape;66;p12"/>
-          <p:cNvSpPr txBox="1"/>
+          <p:cNvSpPr txBox="1">
+            <a:spLocks noGrp="1"/>
+          </p:cNvSpPr>
           <p:nvPr>
-            <p:ph idx="12" type="sldNum"/>
+            <p:ph type="sldNum" idx="12"/>
           </p:nvPr>
         </p:nvSpPr>
         <p:spPr>
@@ -1479,7 +1512,7 @@
           </a:prstGeom>
         </p:spPr>
         <p:txBody>
-          <a:bodyPr anchorCtr="0" anchor="ctr" bIns="91425" lIns="91425" spcFirstLastPara="1" rIns="91425" wrap="square" tIns="91425">
+          <a:bodyPr spcFirstLastPara="1" wrap="square" lIns="91425" tIns="91425" rIns="91425" bIns="91425" anchor="ctr" anchorCtr="0">
             <a:normAutofit/>
           </a:bodyPr>
           <a:lstStyle>
@@ -1557,7 +1590,7 @@
             </a:lvl9pPr>
           </a:lstStyle>
           <a:p>
-            <a:pPr indent="0" lvl="0" marL="0" rtl="0" algn="r">
+            <a:pPr marL="0" lvl="0" indent="0" algn="r" rtl="0">
               <a:spcBef>
                 <a:spcPts val="0"/>
               </a:spcBef>
@@ -1568,7 +1601,7 @@
             </a:pPr>
             <a:fld id="{00000000-1234-1234-1234-123412341234}" type="slidenum">
               <a:rPr lang="es"/>
-              <a:t>‹#›</a:t>
+              <a:t>‹Nº›</a:t>
             </a:fld>
             <a:endParaRPr/>
           </a:p>
@@ -1589,14 +1622,14 @@
             <a:avLst/>
           </a:prstGeom>
           <a:noFill/>
-          <a:ln cap="flat" cmpd="sng" w="9525">
+          <a:ln w="9525" cap="flat" cmpd="sng">
             <a:solidFill>
               <a:srgbClr val="FF743B"/>
             </a:solidFill>
             <a:prstDash val="solid"/>
             <a:round/>
-            <a:headEnd len="med" w="med" type="none"/>
-            <a:tailEnd len="med" w="med" type="none"/>
+            <a:headEnd type="none" w="med" len="med"/>
+            <a:tailEnd type="none" w="med" len="med"/>
           </a:ln>
         </p:spPr>
       </p:cxnSp>
@@ -1609,18 +1642,19 @@
 </file>
 
 <file path=ppt/slideLayouts/slideLayout12.xml><?xml version="1.0" encoding="utf-8"?>
-<p:sldLayout xmlns:a="http://schemas.openxmlformats.org/drawingml/2006/main" xmlns:r="http://schemas.openxmlformats.org/officeDocument/2006/relationships" xmlns:mc="http://schemas.openxmlformats.org/markup-compatibility/2006" xmlns:mv="urn:schemas-microsoft-com:mac:vml" xmlns:p="http://schemas.openxmlformats.org/presentationml/2006/main" xmlns:c="http://schemas.openxmlformats.org/drawingml/2006/chart" xmlns:dgm="http://schemas.openxmlformats.org/drawingml/2006/diagram" xmlns:o="urn:schemas-microsoft-com:office:office" xmlns:v="urn:schemas-microsoft-com:vml" xmlns:pvml="urn:schemas-microsoft-com:office:powerpoint" xmlns:com="http://schemas.openxmlformats.org/drawingml/2006/compatibility" xmlns:p14="http://schemas.microsoft.com/office/powerpoint/2010/main" xmlns:p15="http://schemas.microsoft.com/office/powerpoint/2012/main" xmlns:ahyp="http://schemas.microsoft.com/office/drawing/2018/hyperlinkcolor" matchingName="Final" type="blank">
+<p:sldLayout xmlns:a="http://schemas.openxmlformats.org/drawingml/2006/main" xmlns:r="http://schemas.openxmlformats.org/officeDocument/2006/relationships" xmlns:p="http://schemas.openxmlformats.org/presentationml/2006/main" matchingName="Final" type="blank">
   <p:cSld name="BLANK">
     <p:bg>
       <p:bgPr>
         <a:solidFill>
           <a:srgbClr val="1D1D30"/>
         </a:solidFill>
+        <a:effectLst/>
       </p:bgPr>
     </p:bg>
     <p:spTree>
       <p:nvGrpSpPr>
-        <p:cNvPr id="68" name="Shape 68"/>
+        <p:cNvPr id="1" name="Shape 68"/>
         <p:cNvGrpSpPr/>
         <p:nvPr/>
       </p:nvGrpSpPr>
@@ -1710,12 +1744,12 @@
           </a:ln>
         </p:spPr>
         <p:txBody>
-          <a:bodyPr anchorCtr="0" anchor="ctr" bIns="91425" lIns="91425" spcFirstLastPara="1" rIns="91425" wrap="square" tIns="91425">
+          <a:bodyPr spcFirstLastPara="1" wrap="square" lIns="91425" tIns="91425" rIns="91425" bIns="91425" anchor="ctr" anchorCtr="0">
             <a:noAutofit/>
           </a:bodyPr>
           <a:lstStyle/>
           <a:p>
-            <a:pPr indent="0" lvl="0" marL="0" rtl="0" algn="ctr">
+            <a:pPr marL="0" lvl="0" indent="0" algn="ctr" rtl="0">
               <a:spcBef>
                 <a:spcPts val="0"/>
               </a:spcBef>
@@ -1724,9 +1758,6 @@
               </a:spcAft>
               <a:buNone/>
             </a:pPr>
-            <a:r>
-              <a:t/>
-            </a:r>
             <a:endParaRPr/>
           </a:p>
         </p:txBody>
@@ -1779,12 +1810,12 @@
           </a:ln>
         </p:spPr>
         <p:txBody>
-          <a:bodyPr anchorCtr="0" anchor="ctr" bIns="91425" lIns="91425" spcFirstLastPara="1" rIns="91425" wrap="square" tIns="91425">
+          <a:bodyPr spcFirstLastPara="1" wrap="square" lIns="91425" tIns="91425" rIns="91425" bIns="91425" anchor="ctr" anchorCtr="0">
             <a:noAutofit/>
           </a:bodyPr>
           <a:lstStyle/>
           <a:p>
-            <a:pPr indent="0" lvl="0" marL="0" rtl="0" algn="l">
+            <a:pPr marL="0" lvl="0" indent="0" algn="l" rtl="0">
               <a:spcBef>
                 <a:spcPts val="0"/>
               </a:spcBef>
@@ -1829,12 +1860,12 @@
           </a:ln>
         </p:spPr>
         <p:txBody>
-          <a:bodyPr anchorCtr="0" anchor="ctr" bIns="91425" lIns="91425" spcFirstLastPara="1" rIns="91425" wrap="square" tIns="91425">
+          <a:bodyPr spcFirstLastPara="1" wrap="square" lIns="91425" tIns="91425" rIns="91425" bIns="91425" anchor="ctr" anchorCtr="0">
             <a:noAutofit/>
           </a:bodyPr>
           <a:lstStyle/>
           <a:p>
-            <a:pPr indent="0" lvl="0" marL="0" rtl="0" algn="l">
+            <a:pPr marL="0" lvl="0" indent="0" algn="l" rtl="0">
               <a:spcBef>
                 <a:spcPts val="0"/>
               </a:spcBef>
@@ -1907,12 +1938,12 @@
           </a:ln>
         </p:spPr>
         <p:txBody>
-          <a:bodyPr anchorCtr="0" anchor="ctr" bIns="91425" lIns="91425" spcFirstLastPara="1" rIns="91425" wrap="square" tIns="91425">
+          <a:bodyPr spcFirstLastPara="1" wrap="square" lIns="91425" tIns="91425" rIns="91425" bIns="91425" anchor="ctr" anchorCtr="0">
             <a:noAutofit/>
           </a:bodyPr>
           <a:lstStyle/>
           <a:p>
-            <a:pPr indent="0" lvl="0" marL="0" rtl="0" algn="l">
+            <a:pPr marL="0" lvl="0" indent="0" algn="l" rtl="0">
               <a:spcBef>
                 <a:spcPts val="0"/>
               </a:spcBef>
@@ -1977,18 +2008,19 @@
 </file>
 
 <file path=ppt/slideLayouts/slideLayout2.xml><?xml version="1.0" encoding="utf-8"?>
-<p:sldLayout xmlns:a="http://schemas.openxmlformats.org/drawingml/2006/main" xmlns:r="http://schemas.openxmlformats.org/officeDocument/2006/relationships" xmlns:mc="http://schemas.openxmlformats.org/markup-compatibility/2006" xmlns:mv="urn:schemas-microsoft-com:mac:vml" xmlns:p="http://schemas.openxmlformats.org/presentationml/2006/main" xmlns:c="http://schemas.openxmlformats.org/drawingml/2006/chart" xmlns:dgm="http://schemas.openxmlformats.org/drawingml/2006/diagram" xmlns:o="urn:schemas-microsoft-com:office:office" xmlns:v="urn:schemas-microsoft-com:vml" xmlns:pvml="urn:schemas-microsoft-com:office:powerpoint" xmlns:com="http://schemas.openxmlformats.org/drawingml/2006/compatibility" xmlns:p14="http://schemas.microsoft.com/office/powerpoint/2010/main" xmlns:p15="http://schemas.microsoft.com/office/powerpoint/2012/main" xmlns:ahyp="http://schemas.microsoft.com/office/drawing/2018/hyperlinkcolor" matchingName="Vacía Retícula Azul" type="secHead">
+<p:sldLayout xmlns:a="http://schemas.openxmlformats.org/drawingml/2006/main" xmlns:r="http://schemas.openxmlformats.org/officeDocument/2006/relationships" xmlns:p="http://schemas.openxmlformats.org/presentationml/2006/main" matchingName="Vacía Retícula Azul" type="secHead">
   <p:cSld name="SECTION_HEADER">
     <p:bg>
       <p:bgPr>
         <a:solidFill>
           <a:srgbClr val="1D1D30"/>
         </a:solidFill>
+        <a:effectLst/>
       </p:bgPr>
     </p:bg>
     <p:spTree>
       <p:nvGrpSpPr>
-        <p:cNvPr id="14" name="Shape 14"/>
+        <p:cNvPr id="1" name="Shape 14"/>
         <p:cNvGrpSpPr/>
         <p:nvPr/>
       </p:nvGrpSpPr>
@@ -2059,9 +2091,11 @@
       <p:sp>
         <p:nvSpPr>
           <p:cNvPr id="17" name="Google Shape;17;p3"/>
-          <p:cNvSpPr txBox="1"/>
+          <p:cNvSpPr txBox="1">
+            <a:spLocks noGrp="1"/>
+          </p:cNvSpPr>
           <p:nvPr>
-            <p:ph idx="12" type="sldNum"/>
+            <p:ph type="sldNum" idx="12"/>
           </p:nvPr>
         </p:nvSpPr>
         <p:spPr>
@@ -2074,7 +2108,7 @@
           </a:prstGeom>
         </p:spPr>
         <p:txBody>
-          <a:bodyPr anchorCtr="0" anchor="ctr" bIns="91425" lIns="91425" spcFirstLastPara="1" rIns="91425" wrap="square" tIns="91425">
+          <a:bodyPr spcFirstLastPara="1" wrap="square" lIns="91425" tIns="91425" rIns="91425" bIns="91425" anchor="ctr" anchorCtr="0">
             <a:normAutofit/>
           </a:bodyPr>
           <a:lstStyle>
@@ -2152,7 +2186,7 @@
             </a:lvl9pPr>
           </a:lstStyle>
           <a:p>
-            <a:pPr indent="0" lvl="0" marL="0" rtl="0" algn="r">
+            <a:pPr marL="0" lvl="0" indent="0" algn="r" rtl="0">
               <a:spcBef>
                 <a:spcPts val="0"/>
               </a:spcBef>
@@ -2163,7 +2197,7 @@
             </a:pPr>
             <a:fld id="{00000000-1234-1234-1234-123412341234}" type="slidenum">
               <a:rPr lang="es"/>
-              <a:t>‹#›</a:t>
+              <a:t>‹Nº›</a:t>
             </a:fld>
             <a:endParaRPr/>
           </a:p>
@@ -2178,18 +2212,19 @@
 </file>
 
 <file path=ppt/slideLayouts/slideLayout3.xml><?xml version="1.0" encoding="utf-8"?>
-<p:sldLayout xmlns:a="http://schemas.openxmlformats.org/drawingml/2006/main" xmlns:r="http://schemas.openxmlformats.org/officeDocument/2006/relationships" xmlns:mc="http://schemas.openxmlformats.org/markup-compatibility/2006" xmlns:mv="urn:schemas-microsoft-com:mac:vml" xmlns:p="http://schemas.openxmlformats.org/presentationml/2006/main" xmlns:c="http://schemas.openxmlformats.org/drawingml/2006/chart" xmlns:dgm="http://schemas.openxmlformats.org/drawingml/2006/diagram" xmlns:o="urn:schemas-microsoft-com:office:office" xmlns:v="urn:schemas-microsoft-com:vml" xmlns:pvml="urn:schemas-microsoft-com:office:powerpoint" xmlns:com="http://schemas.openxmlformats.org/drawingml/2006/compatibility" xmlns:p14="http://schemas.microsoft.com/office/powerpoint/2010/main" xmlns:p15="http://schemas.microsoft.com/office/powerpoint/2012/main" xmlns:ahyp="http://schemas.microsoft.com/office/drawing/2018/hyperlinkcolor" matchingName="Vacía Azul">
+<p:sldLayout xmlns:a="http://schemas.openxmlformats.org/drawingml/2006/main" xmlns:r="http://schemas.openxmlformats.org/officeDocument/2006/relationships" xmlns:p="http://schemas.openxmlformats.org/presentationml/2006/main" matchingName="Vacía Azul">
   <p:cSld name="SECTION_HEADER_1">
     <p:bg>
       <p:bgPr>
         <a:solidFill>
           <a:srgbClr val="1D1D30"/>
         </a:solidFill>
+        <a:effectLst/>
       </p:bgPr>
     </p:bg>
     <p:spTree>
       <p:nvGrpSpPr>
-        <p:cNvPr id="18" name="Shape 18"/>
+        <p:cNvPr id="1" name="Shape 18"/>
         <p:cNvGrpSpPr/>
         <p:nvPr/>
       </p:nvGrpSpPr>
@@ -2232,9 +2267,11 @@
       <p:sp>
         <p:nvSpPr>
           <p:cNvPr id="20" name="Google Shape;20;p4"/>
-          <p:cNvSpPr txBox="1"/>
+          <p:cNvSpPr txBox="1">
+            <a:spLocks noGrp="1"/>
+          </p:cNvSpPr>
           <p:nvPr>
-            <p:ph idx="12" type="sldNum"/>
+            <p:ph type="sldNum" idx="12"/>
           </p:nvPr>
         </p:nvSpPr>
         <p:spPr>
@@ -2247,7 +2284,7 @@
           </a:prstGeom>
         </p:spPr>
         <p:txBody>
-          <a:bodyPr anchorCtr="0" anchor="ctr" bIns="91425" lIns="91425" spcFirstLastPara="1" rIns="91425" wrap="square" tIns="91425">
+          <a:bodyPr spcFirstLastPara="1" wrap="square" lIns="91425" tIns="91425" rIns="91425" bIns="91425" anchor="ctr" anchorCtr="0">
             <a:normAutofit/>
           </a:bodyPr>
           <a:lstStyle>
@@ -2325,7 +2362,7 @@
             </a:lvl9pPr>
           </a:lstStyle>
           <a:p>
-            <a:pPr indent="0" lvl="0" marL="0" rtl="0" algn="r">
+            <a:pPr marL="0" lvl="0" indent="0" algn="r" rtl="0">
               <a:spcBef>
                 <a:spcPts val="0"/>
               </a:spcBef>
@@ -2336,7 +2373,7 @@
             </a:pPr>
             <a:fld id="{00000000-1234-1234-1234-123412341234}" type="slidenum">
               <a:rPr lang="es"/>
-              <a:t>‹#›</a:t>
+              <a:t>‹Nº›</a:t>
             </a:fld>
             <a:endParaRPr/>
           </a:p>
@@ -2351,7 +2388,7 @@
 </file>
 
 <file path=ppt/slideLayouts/slideLayout4.xml><?xml version="1.0" encoding="utf-8"?>
-<p:sldLayout xmlns:a="http://schemas.openxmlformats.org/drawingml/2006/main" xmlns:r="http://schemas.openxmlformats.org/officeDocument/2006/relationships" xmlns:mc="http://schemas.openxmlformats.org/markup-compatibility/2006" xmlns:mv="urn:schemas-microsoft-com:mac:vml" xmlns:p="http://schemas.openxmlformats.org/presentationml/2006/main" xmlns:c="http://schemas.openxmlformats.org/drawingml/2006/chart" xmlns:dgm="http://schemas.openxmlformats.org/drawingml/2006/diagram" xmlns:o="urn:schemas-microsoft-com:office:office" xmlns:v="urn:schemas-microsoft-com:vml" xmlns:pvml="urn:schemas-microsoft-com:office:powerpoint" xmlns:com="http://schemas.openxmlformats.org/drawingml/2006/compatibility" xmlns:p14="http://schemas.microsoft.com/office/powerpoint/2010/main" xmlns:p15="http://schemas.microsoft.com/office/powerpoint/2012/main" xmlns:ahyp="http://schemas.microsoft.com/office/drawing/2018/hyperlinkcolor" matchingName="Vacía blanca">
+<p:sldLayout xmlns:a="http://schemas.openxmlformats.org/drawingml/2006/main" xmlns:r="http://schemas.openxmlformats.org/officeDocument/2006/relationships" xmlns:p="http://schemas.openxmlformats.org/presentationml/2006/main" matchingName="Vacía blanca">
   <p:cSld name="SECTION_HEADER_1_1">
     <p:bg>
       <p:bgPr>
@@ -2363,11 +2400,12 @@
             <a:fillRect/>
           </a:stretch>
         </a:blipFill>
+        <a:effectLst/>
       </p:bgPr>
     </p:bg>
     <p:spTree>
       <p:nvGrpSpPr>
-        <p:cNvPr id="21" name="Shape 21"/>
+        <p:cNvPr id="1" name="Shape 21"/>
         <p:cNvGrpSpPr/>
         <p:nvPr/>
       </p:nvGrpSpPr>
@@ -2410,9 +2448,11 @@
       <p:sp>
         <p:nvSpPr>
           <p:cNvPr id="23" name="Google Shape;23;p5"/>
-          <p:cNvSpPr txBox="1"/>
+          <p:cNvSpPr txBox="1">
+            <a:spLocks noGrp="1"/>
+          </p:cNvSpPr>
           <p:nvPr>
-            <p:ph idx="12" type="sldNum"/>
+            <p:ph type="sldNum" idx="12"/>
           </p:nvPr>
         </p:nvSpPr>
         <p:spPr>
@@ -2425,7 +2465,7 @@
           </a:prstGeom>
         </p:spPr>
         <p:txBody>
-          <a:bodyPr anchorCtr="0" anchor="ctr" bIns="91425" lIns="91425" spcFirstLastPara="1" rIns="91425" wrap="square" tIns="91425">
+          <a:bodyPr spcFirstLastPara="1" wrap="square" lIns="91425" tIns="91425" rIns="91425" bIns="91425" anchor="ctr" anchorCtr="0">
             <a:normAutofit/>
           </a:bodyPr>
           <a:lstStyle>
@@ -2503,7 +2543,7 @@
             </a:lvl9pPr>
           </a:lstStyle>
           <a:p>
-            <a:pPr indent="0" lvl="0" marL="0" rtl="0" algn="r">
+            <a:pPr marL="0" lvl="0" indent="0" algn="r" rtl="0">
               <a:spcBef>
                 <a:spcPts val="0"/>
               </a:spcBef>
@@ -2514,7 +2554,7 @@
             </a:pPr>
             <a:fld id="{00000000-1234-1234-1234-123412341234}" type="slidenum">
               <a:rPr lang="es"/>
-              <a:t>‹#›</a:t>
+              <a:t>‹Nº›</a:t>
             </a:fld>
             <a:endParaRPr/>
           </a:p>
@@ -2535,14 +2575,14 @@
             <a:avLst/>
           </a:prstGeom>
           <a:noFill/>
-          <a:ln cap="flat" cmpd="sng" w="9525">
+          <a:ln w="9525" cap="flat" cmpd="sng">
             <a:solidFill>
               <a:srgbClr val="FF743B"/>
             </a:solidFill>
             <a:prstDash val="solid"/>
             <a:round/>
-            <a:headEnd len="med" w="med" type="none"/>
-            <a:tailEnd len="med" w="med" type="none"/>
+            <a:headEnd type="none" w="med" len="med"/>
+            <a:tailEnd type="none" w="med" len="med"/>
           </a:ln>
         </p:spPr>
       </p:cxnSp>
@@ -2555,7 +2595,7 @@
 </file>
 
 <file path=ppt/slideLayouts/slideLayout5.xml><?xml version="1.0" encoding="utf-8"?>
-<p:sldLayout xmlns:a="http://schemas.openxmlformats.org/drawingml/2006/main" xmlns:r="http://schemas.openxmlformats.org/officeDocument/2006/relationships" xmlns:mc="http://schemas.openxmlformats.org/markup-compatibility/2006" xmlns:mv="urn:schemas-microsoft-com:mac:vml" xmlns:p="http://schemas.openxmlformats.org/presentationml/2006/main" xmlns:c="http://schemas.openxmlformats.org/drawingml/2006/chart" xmlns:dgm="http://schemas.openxmlformats.org/drawingml/2006/diagram" xmlns:o="urn:schemas-microsoft-com:office:office" xmlns:v="urn:schemas-microsoft-com:vml" xmlns:pvml="urn:schemas-microsoft-com:office:powerpoint" xmlns:com="http://schemas.openxmlformats.org/drawingml/2006/compatibility" xmlns:p14="http://schemas.microsoft.com/office/powerpoint/2010/main" xmlns:p15="http://schemas.microsoft.com/office/powerpoint/2012/main" xmlns:ahyp="http://schemas.microsoft.com/office/drawing/2018/hyperlinkcolor" matchingName="Título y Cuerpo Blanca">
+<p:sldLayout xmlns:a="http://schemas.openxmlformats.org/drawingml/2006/main" xmlns:r="http://schemas.openxmlformats.org/officeDocument/2006/relationships" xmlns:p="http://schemas.openxmlformats.org/presentationml/2006/main" matchingName="Título y Cuerpo Blanca">
   <p:cSld name="SECTION_HEADER_1_1_1">
     <p:bg>
       <p:bgPr>
@@ -2567,11 +2607,12 @@
             <a:fillRect/>
           </a:stretch>
         </a:blipFill>
+        <a:effectLst/>
       </p:bgPr>
     </p:bg>
     <p:spTree>
       <p:nvGrpSpPr>
-        <p:cNvPr id="25" name="Shape 25"/>
+        <p:cNvPr id="1" name="Shape 25"/>
         <p:cNvGrpSpPr/>
         <p:nvPr/>
       </p:nvGrpSpPr>
@@ -2614,9 +2655,11 @@
       <p:sp>
         <p:nvSpPr>
           <p:cNvPr id="27" name="Google Shape;27;p6"/>
-          <p:cNvSpPr txBox="1"/>
+          <p:cNvSpPr txBox="1">
+            <a:spLocks noGrp="1"/>
+          </p:cNvSpPr>
           <p:nvPr>
-            <p:ph idx="12" type="sldNum"/>
+            <p:ph type="sldNum" idx="12"/>
           </p:nvPr>
         </p:nvSpPr>
         <p:spPr>
@@ -2629,7 +2672,7 @@
           </a:prstGeom>
         </p:spPr>
         <p:txBody>
-          <a:bodyPr anchorCtr="0" anchor="ctr" bIns="91425" lIns="91425" spcFirstLastPara="1" rIns="91425" wrap="square" tIns="91425">
+          <a:bodyPr spcFirstLastPara="1" wrap="square" lIns="91425" tIns="91425" rIns="91425" bIns="91425" anchor="ctr" anchorCtr="0">
             <a:normAutofit/>
           </a:bodyPr>
           <a:lstStyle>
@@ -2707,7 +2750,7 @@
             </a:lvl9pPr>
           </a:lstStyle>
           <a:p>
-            <a:pPr indent="0" lvl="0" marL="0" rtl="0" algn="r">
+            <a:pPr marL="0" lvl="0" indent="0" algn="r" rtl="0">
               <a:spcBef>
                 <a:spcPts val="0"/>
               </a:spcBef>
@@ -2718,7 +2761,7 @@
             </a:pPr>
             <a:fld id="{00000000-1234-1234-1234-123412341234}" type="slidenum">
               <a:rPr lang="es"/>
-              <a:t>‹#›</a:t>
+              <a:t>‹Nº›</a:t>
             </a:fld>
             <a:endParaRPr/>
           </a:p>
@@ -2727,7 +2770,9 @@
       <p:sp>
         <p:nvSpPr>
           <p:cNvPr id="28" name="Google Shape;28;p6"/>
-          <p:cNvSpPr txBox="1"/>
+          <p:cNvSpPr txBox="1">
+            <a:spLocks noGrp="1"/>
+          </p:cNvSpPr>
           <p:nvPr>
             <p:ph type="title"/>
           </p:nvPr>
@@ -2742,7 +2787,7 @@
           </a:prstGeom>
         </p:spPr>
         <p:txBody>
-          <a:bodyPr anchorCtr="0" anchor="t" bIns="91425" lIns="91425" spcFirstLastPara="1" rIns="91425" wrap="square" tIns="91425">
+          <a:bodyPr spcFirstLastPara="1" wrap="square" lIns="91425" tIns="91425" rIns="91425" bIns="91425" anchor="t" anchorCtr="0">
             <a:normAutofit/>
           </a:bodyPr>
           <a:lstStyle>
@@ -2758,7 +2803,7 @@
               </a:buClr>
               <a:buSzPts val="3200"/>
               <a:buNone/>
-              <a:defRPr b="1" sz="3200">
+              <a:defRPr sz="3200" b="1">
                 <a:solidFill>
                   <a:srgbClr val="1D1D30"/>
                 </a:solidFill>
@@ -2776,7 +2821,7 @@
               </a:buClr>
               <a:buSzPts val="3200"/>
               <a:buNone/>
-              <a:defRPr b="1" sz="3200">
+              <a:defRPr sz="3200" b="1">
                 <a:solidFill>
                   <a:srgbClr val="1D1D30"/>
                 </a:solidFill>
@@ -2794,7 +2839,7 @@
               </a:buClr>
               <a:buSzPts val="3200"/>
               <a:buNone/>
-              <a:defRPr b="1" sz="3200">
+              <a:defRPr sz="3200" b="1">
                 <a:solidFill>
                   <a:srgbClr val="1D1D30"/>
                 </a:solidFill>
@@ -2812,7 +2857,7 @@
               </a:buClr>
               <a:buSzPts val="3200"/>
               <a:buNone/>
-              <a:defRPr b="1" sz="3200">
+              <a:defRPr sz="3200" b="1">
                 <a:solidFill>
                   <a:srgbClr val="1D1D30"/>
                 </a:solidFill>
@@ -2830,7 +2875,7 @@
               </a:buClr>
               <a:buSzPts val="3200"/>
               <a:buNone/>
-              <a:defRPr b="1" sz="3200">
+              <a:defRPr sz="3200" b="1">
                 <a:solidFill>
                   <a:srgbClr val="1D1D30"/>
                 </a:solidFill>
@@ -2848,7 +2893,7 @@
               </a:buClr>
               <a:buSzPts val="3200"/>
               <a:buNone/>
-              <a:defRPr b="1" sz="3200">
+              <a:defRPr sz="3200" b="1">
                 <a:solidFill>
                   <a:srgbClr val="1D1D30"/>
                 </a:solidFill>
@@ -2866,7 +2911,7 @@
               </a:buClr>
               <a:buSzPts val="3200"/>
               <a:buNone/>
-              <a:defRPr b="1" sz="3200">
+              <a:defRPr sz="3200" b="1">
                 <a:solidFill>
                   <a:srgbClr val="1D1D30"/>
                 </a:solidFill>
@@ -2884,7 +2929,7 @@
               </a:buClr>
               <a:buSzPts val="3200"/>
               <a:buNone/>
-              <a:defRPr b="1" sz="3200">
+              <a:defRPr sz="3200" b="1">
                 <a:solidFill>
                   <a:srgbClr val="1D1D30"/>
                 </a:solidFill>
@@ -2902,22 +2947,26 @@
               </a:buClr>
               <a:buSzPts val="3200"/>
               <a:buNone/>
-              <a:defRPr b="1" sz="3200">
+              <a:defRPr sz="3200" b="1">
                 <a:solidFill>
                   <a:srgbClr val="1D1D30"/>
                 </a:solidFill>
               </a:defRPr>
             </a:lvl9pPr>
           </a:lstStyle>
-          <a:p/>
+          <a:p>
+            <a:endParaRPr/>
+          </a:p>
         </p:txBody>
       </p:sp>
       <p:sp>
         <p:nvSpPr>
           <p:cNvPr id="29" name="Google Shape;29;p6"/>
-          <p:cNvSpPr txBox="1"/>
+          <p:cNvSpPr txBox="1">
+            <a:spLocks noGrp="1"/>
+          </p:cNvSpPr>
           <p:nvPr>
-            <p:ph idx="1" type="body"/>
+            <p:ph type="body" idx="1"/>
           </p:nvPr>
         </p:nvSpPr>
         <p:spPr>
@@ -2930,11 +2979,11 @@
           </a:prstGeom>
         </p:spPr>
         <p:txBody>
-          <a:bodyPr anchorCtr="0" anchor="ctr" bIns="91425" lIns="91425" spcFirstLastPara="1" rIns="91425" wrap="square" tIns="91425">
+          <a:bodyPr spcFirstLastPara="1" wrap="square" lIns="91425" tIns="91425" rIns="91425" bIns="91425" anchor="ctr" anchorCtr="0">
             <a:noAutofit/>
           </a:bodyPr>
           <a:lstStyle>
-            <a:lvl1pPr indent="-330200" lvl="0" marL="457200">
+            <a:lvl1pPr marL="457200" lvl="0" indent="-330200">
               <a:spcBef>
                 <a:spcPts val="0"/>
               </a:spcBef>
@@ -2952,7 +3001,7 @@
                 </a:solidFill>
               </a:defRPr>
             </a:lvl1pPr>
-            <a:lvl2pPr indent="-317500" lvl="1" marL="914400">
+            <a:lvl2pPr marL="914400" lvl="1" indent="-317500">
               <a:spcBef>
                 <a:spcPts val="0"/>
               </a:spcBef>
@@ -2970,7 +3019,7 @@
                 </a:solidFill>
               </a:defRPr>
             </a:lvl2pPr>
-            <a:lvl3pPr indent="-304800" lvl="2" marL="1371600">
+            <a:lvl3pPr marL="1371600" lvl="2" indent="-304800">
               <a:spcBef>
                 <a:spcPts val="0"/>
               </a:spcBef>
@@ -2988,7 +3037,7 @@
                 </a:solidFill>
               </a:defRPr>
             </a:lvl3pPr>
-            <a:lvl4pPr indent="-298450" lvl="3" marL="1828800">
+            <a:lvl4pPr marL="1828800" lvl="3" indent="-298450">
               <a:spcBef>
                 <a:spcPts val="0"/>
               </a:spcBef>
@@ -3006,7 +3055,7 @@
                 </a:solidFill>
               </a:defRPr>
             </a:lvl4pPr>
-            <a:lvl5pPr indent="-285750" lvl="4" marL="2286000">
+            <a:lvl5pPr marL="2286000" lvl="4" indent="-285750">
               <a:spcBef>
                 <a:spcPts val="0"/>
               </a:spcBef>
@@ -3024,7 +3073,7 @@
                 </a:solidFill>
               </a:defRPr>
             </a:lvl5pPr>
-            <a:lvl6pPr indent="-279400" lvl="5" marL="2743200">
+            <a:lvl6pPr marL="2743200" lvl="5" indent="-279400">
               <a:spcBef>
                 <a:spcPts val="0"/>
               </a:spcBef>
@@ -3042,7 +3091,7 @@
                 </a:solidFill>
               </a:defRPr>
             </a:lvl6pPr>
-            <a:lvl7pPr indent="-273050" lvl="6" marL="3200400">
+            <a:lvl7pPr marL="3200400" lvl="6" indent="-273050">
               <a:spcBef>
                 <a:spcPts val="0"/>
               </a:spcBef>
@@ -3060,7 +3109,7 @@
                 </a:solidFill>
               </a:defRPr>
             </a:lvl7pPr>
-            <a:lvl8pPr indent="-266700" lvl="7" marL="3657600">
+            <a:lvl8pPr marL="3657600" lvl="7" indent="-266700">
               <a:spcBef>
                 <a:spcPts val="0"/>
               </a:spcBef>
@@ -3078,7 +3127,7 @@
                 </a:solidFill>
               </a:defRPr>
             </a:lvl8pPr>
-            <a:lvl9pPr indent="-260350" lvl="8" marL="4114800">
+            <a:lvl9pPr marL="4114800" lvl="8" indent="-260350">
               <a:spcBef>
                 <a:spcPts val="0"/>
               </a:spcBef>
@@ -3097,7 +3146,9 @@
               </a:defRPr>
             </a:lvl9pPr>
           </a:lstStyle>
-          <a:p/>
+          <a:p>
+            <a:endParaRPr/>
+          </a:p>
         </p:txBody>
       </p:sp>
       <p:cxnSp>
@@ -3115,14 +3166,14 @@
             <a:avLst/>
           </a:prstGeom>
           <a:noFill/>
-          <a:ln cap="flat" cmpd="sng" w="9525">
+          <a:ln w="9525" cap="flat" cmpd="sng">
             <a:solidFill>
               <a:srgbClr val="FF743B"/>
             </a:solidFill>
             <a:prstDash val="solid"/>
             <a:round/>
-            <a:headEnd len="med" w="med" type="none"/>
-            <a:tailEnd len="med" w="med" type="none"/>
+            <a:headEnd type="none" w="med" len="med"/>
+            <a:tailEnd type="none" w="med" len="med"/>
           </a:ln>
         </p:spPr>
       </p:cxnSp>
@@ -3135,18 +3186,19 @@
 </file>
 
 <file path=ppt/slideLayouts/slideLayout6.xml><?xml version="1.0" encoding="utf-8"?>
-<p:sldLayout xmlns:a="http://schemas.openxmlformats.org/drawingml/2006/main" xmlns:r="http://schemas.openxmlformats.org/officeDocument/2006/relationships" xmlns:mc="http://schemas.openxmlformats.org/markup-compatibility/2006" xmlns:mv="urn:schemas-microsoft-com:mac:vml" xmlns:p="http://schemas.openxmlformats.org/presentationml/2006/main" xmlns:c="http://schemas.openxmlformats.org/drawingml/2006/chart" xmlns:dgm="http://schemas.openxmlformats.org/drawingml/2006/diagram" xmlns:o="urn:schemas-microsoft-com:office:office" xmlns:v="urn:schemas-microsoft-com:vml" xmlns:pvml="urn:schemas-microsoft-com:office:powerpoint" xmlns:com="http://schemas.openxmlformats.org/drawingml/2006/compatibility" xmlns:p14="http://schemas.microsoft.com/office/powerpoint/2010/main" xmlns:p15="http://schemas.microsoft.com/office/powerpoint/2012/main" xmlns:ahyp="http://schemas.microsoft.com/office/drawing/2018/hyperlinkcolor" matchingName="Título y Cuerpo V1" type="tx">
+<p:sldLayout xmlns:a="http://schemas.openxmlformats.org/drawingml/2006/main" xmlns:r="http://schemas.openxmlformats.org/officeDocument/2006/relationships" xmlns:p="http://schemas.openxmlformats.org/presentationml/2006/main" matchingName="Título y Cuerpo V1" type="tx">
   <p:cSld name="TITLE_AND_BODY">
     <p:bg>
       <p:bgPr>
         <a:solidFill>
           <a:srgbClr val="1D1D30"/>
         </a:solidFill>
+        <a:effectLst/>
       </p:bgPr>
     </p:bg>
     <p:spTree>
       <p:nvGrpSpPr>
-        <p:cNvPr id="31" name="Shape 31"/>
+        <p:cNvPr id="1" name="Shape 31"/>
         <p:cNvGrpSpPr/>
         <p:nvPr/>
       </p:nvGrpSpPr>
@@ -3168,7 +3220,7 @@
           <a:blip r:embed="rId2">
             <a:alphaModFix/>
           </a:blip>
-          <a:srcRect b="70" l="0" r="0" t="70"/>
+          <a:srcRect t="70" b="70"/>
           <a:stretch/>
         </p:blipFill>
         <p:spPr>
@@ -3188,7 +3240,9 @@
       <p:sp>
         <p:nvSpPr>
           <p:cNvPr id="33" name="Google Shape;33;p7"/>
-          <p:cNvSpPr txBox="1"/>
+          <p:cNvSpPr txBox="1">
+            <a:spLocks noGrp="1"/>
+          </p:cNvSpPr>
           <p:nvPr>
             <p:ph type="title"/>
           </p:nvPr>
@@ -3203,7 +3257,7 @@
           </a:prstGeom>
         </p:spPr>
         <p:txBody>
-          <a:bodyPr anchorCtr="0" anchor="t" bIns="91425" lIns="91425" spcFirstLastPara="1" rIns="91425" wrap="square" tIns="91425">
+          <a:bodyPr spcFirstLastPara="1" wrap="square" lIns="91425" tIns="91425" rIns="91425" bIns="91425" anchor="t" anchorCtr="0">
             <a:normAutofit/>
           </a:bodyPr>
           <a:lstStyle>
@@ -3219,7 +3273,7 @@
               </a:buClr>
               <a:buSzPts val="3200"/>
               <a:buNone/>
-              <a:defRPr b="1" sz="3200">
+              <a:defRPr sz="3200" b="1">
                 <a:solidFill>
                   <a:srgbClr val="161625"/>
                 </a:solidFill>
@@ -3237,7 +3291,7 @@
               </a:buClr>
               <a:buSzPts val="3200"/>
               <a:buNone/>
-              <a:defRPr b="1" sz="3200">
+              <a:defRPr sz="3200" b="1">
                 <a:solidFill>
                   <a:srgbClr val="161625"/>
                 </a:solidFill>
@@ -3255,7 +3309,7 @@
               </a:buClr>
               <a:buSzPts val="3200"/>
               <a:buNone/>
-              <a:defRPr b="1" sz="3200">
+              <a:defRPr sz="3200" b="1">
                 <a:solidFill>
                   <a:srgbClr val="161625"/>
                 </a:solidFill>
@@ -3273,7 +3327,7 @@
               </a:buClr>
               <a:buSzPts val="3200"/>
               <a:buNone/>
-              <a:defRPr b="1" sz="3200">
+              <a:defRPr sz="3200" b="1">
                 <a:solidFill>
                   <a:srgbClr val="161625"/>
                 </a:solidFill>
@@ -3291,7 +3345,7 @@
               </a:buClr>
               <a:buSzPts val="3200"/>
               <a:buNone/>
-              <a:defRPr b="1" sz="3200">
+              <a:defRPr sz="3200" b="1">
                 <a:solidFill>
                   <a:srgbClr val="161625"/>
                 </a:solidFill>
@@ -3309,7 +3363,7 @@
               </a:buClr>
               <a:buSzPts val="3200"/>
               <a:buNone/>
-              <a:defRPr b="1" sz="3200">
+              <a:defRPr sz="3200" b="1">
                 <a:solidFill>
                   <a:srgbClr val="161625"/>
                 </a:solidFill>
@@ -3327,7 +3381,7 @@
               </a:buClr>
               <a:buSzPts val="3200"/>
               <a:buNone/>
-              <a:defRPr b="1" sz="3200">
+              <a:defRPr sz="3200" b="1">
                 <a:solidFill>
                   <a:srgbClr val="161625"/>
                 </a:solidFill>
@@ -3345,7 +3399,7 @@
               </a:buClr>
               <a:buSzPts val="3200"/>
               <a:buNone/>
-              <a:defRPr b="1" sz="3200">
+              <a:defRPr sz="3200" b="1">
                 <a:solidFill>
                   <a:srgbClr val="161625"/>
                 </a:solidFill>
@@ -3363,22 +3417,26 @@
               </a:buClr>
               <a:buSzPts val="3200"/>
               <a:buNone/>
-              <a:defRPr b="1" sz="3200">
+              <a:defRPr sz="3200" b="1">
                 <a:solidFill>
                   <a:srgbClr val="161625"/>
                 </a:solidFill>
               </a:defRPr>
             </a:lvl9pPr>
           </a:lstStyle>
-          <a:p/>
+          <a:p>
+            <a:endParaRPr/>
+          </a:p>
         </p:txBody>
       </p:sp>
       <p:sp>
         <p:nvSpPr>
           <p:cNvPr id="34" name="Google Shape;34;p7"/>
-          <p:cNvSpPr txBox="1"/>
+          <p:cNvSpPr txBox="1">
+            <a:spLocks noGrp="1"/>
+          </p:cNvSpPr>
           <p:nvPr>
-            <p:ph idx="12" type="sldNum"/>
+            <p:ph type="sldNum" idx="12"/>
           </p:nvPr>
         </p:nvSpPr>
         <p:spPr>
@@ -3391,7 +3449,7 @@
           </a:prstGeom>
         </p:spPr>
         <p:txBody>
-          <a:bodyPr anchorCtr="0" anchor="ctr" bIns="91425" lIns="91425" spcFirstLastPara="1" rIns="91425" wrap="square" tIns="91425">
+          <a:bodyPr spcFirstLastPara="1" wrap="square" lIns="91425" tIns="91425" rIns="91425" bIns="91425" anchor="ctr" anchorCtr="0">
             <a:normAutofit/>
           </a:bodyPr>
           <a:lstStyle>
@@ -3469,7 +3527,7 @@
             </a:lvl9pPr>
           </a:lstStyle>
           <a:p>
-            <a:pPr indent="0" lvl="0" marL="0" rtl="0" algn="r">
+            <a:pPr marL="0" lvl="0" indent="0" algn="r" rtl="0">
               <a:spcBef>
                 <a:spcPts val="0"/>
               </a:spcBef>
@@ -3480,7 +3538,7 @@
             </a:pPr>
             <a:fld id="{00000000-1234-1234-1234-123412341234}" type="slidenum">
               <a:rPr lang="es"/>
-              <a:t>‹#›</a:t>
+              <a:t>‹Nº›</a:t>
             </a:fld>
             <a:endParaRPr/>
           </a:p>
@@ -3529,23 +3587,25 @@
             <a:avLst/>
           </a:prstGeom>
           <a:noFill/>
-          <a:ln cap="flat" cmpd="sng" w="9525">
+          <a:ln w="9525" cap="flat" cmpd="sng">
             <a:solidFill>
               <a:srgbClr val="FF743B"/>
             </a:solidFill>
             <a:prstDash val="solid"/>
             <a:round/>
-            <a:headEnd len="med" w="med" type="none"/>
-            <a:tailEnd len="med" w="med" type="none"/>
+            <a:headEnd type="none" w="med" len="med"/>
+            <a:tailEnd type="none" w="med" len="med"/>
           </a:ln>
         </p:spPr>
       </p:cxnSp>
       <p:sp>
         <p:nvSpPr>
           <p:cNvPr id="37" name="Google Shape;37;p7"/>
-          <p:cNvSpPr txBox="1"/>
+          <p:cNvSpPr txBox="1">
+            <a:spLocks noGrp="1"/>
+          </p:cNvSpPr>
           <p:nvPr>
-            <p:ph idx="1" type="body"/>
+            <p:ph type="body" idx="1"/>
           </p:nvPr>
         </p:nvSpPr>
         <p:spPr>
@@ -3558,11 +3618,11 @@
           </a:prstGeom>
         </p:spPr>
         <p:txBody>
-          <a:bodyPr anchorCtr="0" anchor="ctr" bIns="91425" lIns="91425" spcFirstLastPara="1" rIns="91425" wrap="square" tIns="91425">
+          <a:bodyPr spcFirstLastPara="1" wrap="square" lIns="91425" tIns="91425" rIns="91425" bIns="91425" anchor="ctr" anchorCtr="0">
             <a:noAutofit/>
           </a:bodyPr>
           <a:lstStyle>
-            <a:lvl1pPr indent="-330200" lvl="0" marL="457200">
+            <a:lvl1pPr marL="457200" lvl="0" indent="-330200">
               <a:spcBef>
                 <a:spcPts val="0"/>
               </a:spcBef>
@@ -3580,7 +3640,7 @@
                 </a:solidFill>
               </a:defRPr>
             </a:lvl1pPr>
-            <a:lvl2pPr indent="-317500" lvl="1" marL="914400">
+            <a:lvl2pPr marL="914400" lvl="1" indent="-317500">
               <a:spcBef>
                 <a:spcPts val="0"/>
               </a:spcBef>
@@ -3598,7 +3658,7 @@
                 </a:solidFill>
               </a:defRPr>
             </a:lvl2pPr>
-            <a:lvl3pPr indent="-304800" lvl="2" marL="1371600">
+            <a:lvl3pPr marL="1371600" lvl="2" indent="-304800">
               <a:spcBef>
                 <a:spcPts val="0"/>
               </a:spcBef>
@@ -3616,7 +3676,7 @@
                 </a:solidFill>
               </a:defRPr>
             </a:lvl3pPr>
-            <a:lvl4pPr indent="-298450" lvl="3" marL="1828800">
+            <a:lvl4pPr marL="1828800" lvl="3" indent="-298450">
               <a:spcBef>
                 <a:spcPts val="0"/>
               </a:spcBef>
@@ -3634,7 +3694,7 @@
                 </a:solidFill>
               </a:defRPr>
             </a:lvl4pPr>
-            <a:lvl5pPr indent="-285750" lvl="4" marL="2286000">
+            <a:lvl5pPr marL="2286000" lvl="4" indent="-285750">
               <a:spcBef>
                 <a:spcPts val="0"/>
               </a:spcBef>
@@ -3652,7 +3712,7 @@
                 </a:solidFill>
               </a:defRPr>
             </a:lvl5pPr>
-            <a:lvl6pPr indent="-279400" lvl="5" marL="2743200">
+            <a:lvl6pPr marL="2743200" lvl="5" indent="-279400">
               <a:spcBef>
                 <a:spcPts val="0"/>
               </a:spcBef>
@@ -3670,7 +3730,7 @@
                 </a:solidFill>
               </a:defRPr>
             </a:lvl6pPr>
-            <a:lvl7pPr indent="-273050" lvl="6" marL="3200400">
+            <a:lvl7pPr marL="3200400" lvl="6" indent="-273050">
               <a:spcBef>
                 <a:spcPts val="0"/>
               </a:spcBef>
@@ -3688,7 +3748,7 @@
                 </a:solidFill>
               </a:defRPr>
             </a:lvl7pPr>
-            <a:lvl8pPr indent="-266700" lvl="7" marL="3657600">
+            <a:lvl8pPr marL="3657600" lvl="7" indent="-266700">
               <a:spcBef>
                 <a:spcPts val="0"/>
               </a:spcBef>
@@ -3706,7 +3766,7 @@
                 </a:solidFill>
               </a:defRPr>
             </a:lvl8pPr>
-            <a:lvl9pPr indent="-260350" lvl="8" marL="4114800">
+            <a:lvl9pPr marL="4114800" lvl="8" indent="-260350">
               <a:spcBef>
                 <a:spcPts val="0"/>
               </a:spcBef>
@@ -3725,7 +3785,9 @@
               </a:defRPr>
             </a:lvl9pPr>
           </a:lstStyle>
-          <a:p/>
+          <a:p>
+            <a:endParaRPr/>
+          </a:p>
         </p:txBody>
       </p:sp>
     </p:spTree>
@@ -3737,18 +3799,19 @@
 </file>
 
 <file path=ppt/slideLayouts/slideLayout7.xml><?xml version="1.0" encoding="utf-8"?>
-<p:sldLayout xmlns:a="http://schemas.openxmlformats.org/drawingml/2006/main" xmlns:r="http://schemas.openxmlformats.org/officeDocument/2006/relationships" xmlns:mc="http://schemas.openxmlformats.org/markup-compatibility/2006" xmlns:mv="urn:schemas-microsoft-com:mac:vml" xmlns:p="http://schemas.openxmlformats.org/presentationml/2006/main" xmlns:c="http://schemas.openxmlformats.org/drawingml/2006/chart" xmlns:dgm="http://schemas.openxmlformats.org/drawingml/2006/diagram" xmlns:o="urn:schemas-microsoft-com:office:office" xmlns:v="urn:schemas-microsoft-com:vml" xmlns:pvml="urn:schemas-microsoft-com:office:powerpoint" xmlns:com="http://schemas.openxmlformats.org/drawingml/2006/compatibility" xmlns:p14="http://schemas.microsoft.com/office/powerpoint/2010/main" xmlns:p15="http://schemas.microsoft.com/office/powerpoint/2012/main" xmlns:ahyp="http://schemas.microsoft.com/office/drawing/2018/hyperlinkcolor" matchingName="Título y Cuerpo V2">
+<p:sldLayout xmlns:a="http://schemas.openxmlformats.org/drawingml/2006/main" xmlns:r="http://schemas.openxmlformats.org/officeDocument/2006/relationships" xmlns:p="http://schemas.openxmlformats.org/presentationml/2006/main" matchingName="Título y Cuerpo V2">
   <p:cSld name="TITLE_AND_BODY_1">
     <p:bg>
       <p:bgPr>
         <a:solidFill>
           <a:srgbClr val="1D1D30"/>
         </a:solidFill>
+        <a:effectLst/>
       </p:bgPr>
     </p:bg>
     <p:spTree>
       <p:nvGrpSpPr>
-        <p:cNvPr id="38" name="Shape 38"/>
+        <p:cNvPr id="1" name="Shape 38"/>
         <p:cNvGrpSpPr/>
         <p:nvPr/>
       </p:nvGrpSpPr>
@@ -3770,7 +3833,7 @@
           <a:blip r:embed="rId2">
             <a:alphaModFix/>
           </a:blip>
-          <a:srcRect b="70" l="0" r="0" t="70"/>
+          <a:srcRect t="70" b="70"/>
           <a:stretch/>
         </p:blipFill>
         <p:spPr>
@@ -3790,7 +3853,9 @@
       <p:sp>
         <p:nvSpPr>
           <p:cNvPr id="40" name="Google Shape;40;p8"/>
-          <p:cNvSpPr txBox="1"/>
+          <p:cNvSpPr txBox="1">
+            <a:spLocks noGrp="1"/>
+          </p:cNvSpPr>
           <p:nvPr>
             <p:ph type="title"/>
           </p:nvPr>
@@ -3805,7 +3870,7 @@
           </a:prstGeom>
         </p:spPr>
         <p:txBody>
-          <a:bodyPr anchorCtr="0" anchor="t" bIns="91425" lIns="91425" spcFirstLastPara="1" rIns="91425" wrap="square" tIns="91425">
+          <a:bodyPr spcFirstLastPara="1" wrap="square" lIns="91425" tIns="91425" rIns="91425" bIns="91425" anchor="t" anchorCtr="0">
             <a:normAutofit/>
           </a:bodyPr>
           <a:lstStyle>
@@ -3821,7 +3886,7 @@
               </a:buClr>
               <a:buSzPts val="3200"/>
               <a:buNone/>
-              <a:defRPr b="1" sz="3200">
+              <a:defRPr sz="3200" b="1">
                 <a:solidFill>
                   <a:srgbClr val="161625"/>
                 </a:solidFill>
@@ -3839,7 +3904,7 @@
               </a:buClr>
               <a:buSzPts val="3200"/>
               <a:buNone/>
-              <a:defRPr b="1" sz="3200">
+              <a:defRPr sz="3200" b="1">
                 <a:solidFill>
                   <a:srgbClr val="161625"/>
                 </a:solidFill>
@@ -3857,7 +3922,7 @@
               </a:buClr>
               <a:buSzPts val="3200"/>
               <a:buNone/>
-              <a:defRPr b="1" sz="3200">
+              <a:defRPr sz="3200" b="1">
                 <a:solidFill>
                   <a:srgbClr val="161625"/>
                 </a:solidFill>
@@ -3875,7 +3940,7 @@
               </a:buClr>
               <a:buSzPts val="3200"/>
               <a:buNone/>
-              <a:defRPr b="1" sz="3200">
+              <a:defRPr sz="3200" b="1">
                 <a:solidFill>
                   <a:srgbClr val="161625"/>
                 </a:solidFill>
@@ -3893,7 +3958,7 @@
               </a:buClr>
               <a:buSzPts val="3200"/>
               <a:buNone/>
-              <a:defRPr b="1" sz="3200">
+              <a:defRPr sz="3200" b="1">
                 <a:solidFill>
                   <a:srgbClr val="161625"/>
                 </a:solidFill>
@@ -3911,7 +3976,7 @@
               </a:buClr>
               <a:buSzPts val="3200"/>
               <a:buNone/>
-              <a:defRPr b="1" sz="3200">
+              <a:defRPr sz="3200" b="1">
                 <a:solidFill>
                   <a:srgbClr val="161625"/>
                 </a:solidFill>
@@ -3929,7 +3994,7 @@
               </a:buClr>
               <a:buSzPts val="3200"/>
               <a:buNone/>
-              <a:defRPr b="1" sz="3200">
+              <a:defRPr sz="3200" b="1">
                 <a:solidFill>
                   <a:srgbClr val="161625"/>
                 </a:solidFill>
@@ -3947,7 +4012,7 @@
               </a:buClr>
               <a:buSzPts val="3200"/>
               <a:buNone/>
-              <a:defRPr b="1" sz="3200">
+              <a:defRPr sz="3200" b="1">
                 <a:solidFill>
                   <a:srgbClr val="161625"/>
                 </a:solidFill>
@@ -3965,14 +4030,16 @@
               </a:buClr>
               <a:buSzPts val="3200"/>
               <a:buNone/>
-              <a:defRPr b="1" sz="3200">
+              <a:defRPr sz="3200" b="1">
                 <a:solidFill>
                   <a:srgbClr val="161625"/>
                 </a:solidFill>
               </a:defRPr>
             </a:lvl9pPr>
           </a:lstStyle>
-          <a:p/>
+          <a:p>
+            <a:endParaRPr/>
+          </a:p>
         </p:txBody>
       </p:sp>
       <p:pic>
@@ -4006,9 +4073,11 @@
       <p:sp>
         <p:nvSpPr>
           <p:cNvPr id="42" name="Google Shape;42;p8"/>
-          <p:cNvSpPr txBox="1"/>
+          <p:cNvSpPr txBox="1">
+            <a:spLocks noGrp="1"/>
+          </p:cNvSpPr>
           <p:nvPr>
-            <p:ph idx="12" type="sldNum"/>
+            <p:ph type="sldNum" idx="12"/>
           </p:nvPr>
         </p:nvSpPr>
         <p:spPr>
@@ -4021,7 +4090,7 @@
           </a:prstGeom>
         </p:spPr>
         <p:txBody>
-          <a:bodyPr anchorCtr="0" anchor="ctr" bIns="91425" lIns="91425" spcFirstLastPara="1" rIns="91425" wrap="square" tIns="91425">
+          <a:bodyPr spcFirstLastPara="1" wrap="square" lIns="91425" tIns="91425" rIns="91425" bIns="91425" anchor="ctr" anchorCtr="0">
             <a:normAutofit/>
           </a:bodyPr>
           <a:lstStyle>
@@ -4099,7 +4168,7 @@
             </a:lvl9pPr>
           </a:lstStyle>
           <a:p>
-            <a:pPr indent="0" lvl="0" marL="0" rtl="0" algn="r">
+            <a:pPr marL="0" lvl="0" indent="0" algn="r" rtl="0">
               <a:spcBef>
                 <a:spcPts val="0"/>
               </a:spcBef>
@@ -4110,7 +4179,7 @@
             </a:pPr>
             <a:fld id="{00000000-1234-1234-1234-123412341234}" type="slidenum">
               <a:rPr lang="es"/>
-              <a:t>‹#›</a:t>
+              <a:t>‹Nº›</a:t>
             </a:fld>
             <a:endParaRPr/>
           </a:p>
@@ -4131,23 +4200,25 @@
             <a:avLst/>
           </a:prstGeom>
           <a:noFill/>
-          <a:ln cap="flat" cmpd="sng" w="9525">
+          <a:ln w="9525" cap="flat" cmpd="sng">
             <a:solidFill>
               <a:srgbClr val="FF743B"/>
             </a:solidFill>
             <a:prstDash val="solid"/>
             <a:round/>
-            <a:headEnd len="med" w="med" type="none"/>
-            <a:tailEnd len="med" w="med" type="none"/>
+            <a:headEnd type="none" w="med" len="med"/>
+            <a:tailEnd type="none" w="med" len="med"/>
           </a:ln>
         </p:spPr>
       </p:cxnSp>
       <p:sp>
         <p:nvSpPr>
           <p:cNvPr id="44" name="Google Shape;44;p8"/>
-          <p:cNvSpPr txBox="1"/>
+          <p:cNvSpPr txBox="1">
+            <a:spLocks noGrp="1"/>
+          </p:cNvSpPr>
           <p:nvPr>
-            <p:ph idx="1" type="body"/>
+            <p:ph type="body" idx="1"/>
           </p:nvPr>
         </p:nvSpPr>
         <p:spPr>
@@ -4160,11 +4231,11 @@
           </a:prstGeom>
         </p:spPr>
         <p:txBody>
-          <a:bodyPr anchorCtr="0" anchor="ctr" bIns="91425" lIns="91425" spcFirstLastPara="1" rIns="91425" wrap="square" tIns="91425">
+          <a:bodyPr spcFirstLastPara="1" wrap="square" lIns="91425" tIns="91425" rIns="91425" bIns="91425" anchor="ctr" anchorCtr="0">
             <a:noAutofit/>
           </a:bodyPr>
           <a:lstStyle>
-            <a:lvl1pPr indent="-330200" lvl="0" marL="457200">
+            <a:lvl1pPr marL="457200" lvl="0" indent="-330200">
               <a:spcBef>
                 <a:spcPts val="0"/>
               </a:spcBef>
@@ -4182,7 +4253,7 @@
                 </a:solidFill>
               </a:defRPr>
             </a:lvl1pPr>
-            <a:lvl2pPr indent="-317500" lvl="1" marL="914400">
+            <a:lvl2pPr marL="914400" lvl="1" indent="-317500">
               <a:spcBef>
                 <a:spcPts val="0"/>
               </a:spcBef>
@@ -4200,7 +4271,7 @@
                 </a:solidFill>
               </a:defRPr>
             </a:lvl2pPr>
-            <a:lvl3pPr indent="-304800" lvl="2" marL="1371600">
+            <a:lvl3pPr marL="1371600" lvl="2" indent="-304800">
               <a:spcBef>
                 <a:spcPts val="0"/>
               </a:spcBef>
@@ -4218,7 +4289,7 @@
                 </a:solidFill>
               </a:defRPr>
             </a:lvl3pPr>
-            <a:lvl4pPr indent="-298450" lvl="3" marL="1828800">
+            <a:lvl4pPr marL="1828800" lvl="3" indent="-298450">
               <a:spcBef>
                 <a:spcPts val="0"/>
               </a:spcBef>
@@ -4236,7 +4307,7 @@
                 </a:solidFill>
               </a:defRPr>
             </a:lvl4pPr>
-            <a:lvl5pPr indent="-285750" lvl="4" marL="2286000">
+            <a:lvl5pPr marL="2286000" lvl="4" indent="-285750">
               <a:spcBef>
                 <a:spcPts val="0"/>
               </a:spcBef>
@@ -4254,7 +4325,7 @@
                 </a:solidFill>
               </a:defRPr>
             </a:lvl5pPr>
-            <a:lvl6pPr indent="-279400" lvl="5" marL="2743200">
+            <a:lvl6pPr marL="2743200" lvl="5" indent="-279400">
               <a:spcBef>
                 <a:spcPts val="0"/>
               </a:spcBef>
@@ -4272,7 +4343,7 @@
                 </a:solidFill>
               </a:defRPr>
             </a:lvl6pPr>
-            <a:lvl7pPr indent="-273050" lvl="6" marL="3200400">
+            <a:lvl7pPr marL="3200400" lvl="6" indent="-273050">
               <a:spcBef>
                 <a:spcPts val="0"/>
               </a:spcBef>
@@ -4290,7 +4361,7 @@
                 </a:solidFill>
               </a:defRPr>
             </a:lvl7pPr>
-            <a:lvl8pPr indent="-266700" lvl="7" marL="3657600">
+            <a:lvl8pPr marL="3657600" lvl="7" indent="-266700">
               <a:spcBef>
                 <a:spcPts val="0"/>
               </a:spcBef>
@@ -4308,7 +4379,7 @@
                 </a:solidFill>
               </a:defRPr>
             </a:lvl8pPr>
-            <a:lvl9pPr indent="-260350" lvl="8" marL="4114800">
+            <a:lvl9pPr marL="4114800" lvl="8" indent="-260350">
               <a:spcBef>
                 <a:spcPts val="0"/>
               </a:spcBef>
@@ -4327,7 +4398,9 @@
               </a:defRPr>
             </a:lvl9pPr>
           </a:lstStyle>
-          <a:p/>
+          <a:p>
+            <a:endParaRPr/>
+          </a:p>
         </p:txBody>
       </p:sp>
     </p:spTree>
@@ -4339,18 +4412,19 @@
 </file>
 
 <file path=ppt/slideLayouts/slideLayout8.xml><?xml version="1.0" encoding="utf-8"?>
-<p:sldLayout xmlns:a="http://schemas.openxmlformats.org/drawingml/2006/main" xmlns:r="http://schemas.openxmlformats.org/officeDocument/2006/relationships" xmlns:mc="http://schemas.openxmlformats.org/markup-compatibility/2006" xmlns:mv="urn:schemas-microsoft-com:mac:vml" xmlns:p="http://schemas.openxmlformats.org/presentationml/2006/main" xmlns:c="http://schemas.openxmlformats.org/drawingml/2006/chart" xmlns:dgm="http://schemas.openxmlformats.org/drawingml/2006/diagram" xmlns:o="urn:schemas-microsoft-com:office:office" xmlns:v="urn:schemas-microsoft-com:vml" xmlns:pvml="urn:schemas-microsoft-com:office:powerpoint" xmlns:com="http://schemas.openxmlformats.org/drawingml/2006/compatibility" xmlns:p14="http://schemas.microsoft.com/office/powerpoint/2010/main" xmlns:p15="http://schemas.microsoft.com/office/powerpoint/2012/main" xmlns:ahyp="http://schemas.microsoft.com/office/drawing/2018/hyperlinkcolor" matchingName="Title only" type="titleOnly">
+<p:sldLayout xmlns:a="http://schemas.openxmlformats.org/drawingml/2006/main" xmlns:r="http://schemas.openxmlformats.org/officeDocument/2006/relationships" xmlns:p="http://schemas.openxmlformats.org/presentationml/2006/main" matchingName="Title only" type="titleOnly">
   <p:cSld name="TITLE_ONLY">
     <p:bg>
       <p:bgPr>
         <a:solidFill>
           <a:srgbClr val="1D1D30"/>
         </a:solidFill>
+        <a:effectLst/>
       </p:bgPr>
     </p:bg>
     <p:spTree>
       <p:nvGrpSpPr>
-        <p:cNvPr id="45" name="Shape 45"/>
+        <p:cNvPr id="1" name="Shape 45"/>
         <p:cNvGrpSpPr/>
         <p:nvPr/>
       </p:nvGrpSpPr>
@@ -4372,7 +4446,7 @@
           <a:blip r:embed="rId2">
             <a:alphaModFix/>
           </a:blip>
-          <a:srcRect b="70" l="0" r="0" t="70"/>
+          <a:srcRect t="70" b="70"/>
           <a:stretch/>
         </p:blipFill>
         <p:spPr>
@@ -4392,7 +4466,9 @@
       <p:sp>
         <p:nvSpPr>
           <p:cNvPr id="47" name="Google Shape;47;p9"/>
-          <p:cNvSpPr txBox="1"/>
+          <p:cNvSpPr txBox="1">
+            <a:spLocks noGrp="1"/>
+          </p:cNvSpPr>
           <p:nvPr>
             <p:ph type="title"/>
           </p:nvPr>
@@ -4407,7 +4483,7 @@
           </a:prstGeom>
         </p:spPr>
         <p:txBody>
-          <a:bodyPr anchorCtr="0" anchor="t" bIns="91425" lIns="91425" spcFirstLastPara="1" rIns="91425" wrap="square" tIns="91425">
+          <a:bodyPr spcFirstLastPara="1" wrap="square" lIns="91425" tIns="91425" rIns="91425" bIns="91425" anchor="t" anchorCtr="0">
             <a:normAutofit/>
           </a:bodyPr>
           <a:lstStyle>
@@ -4423,7 +4499,7 @@
               </a:buClr>
               <a:buSzPts val="3200"/>
               <a:buNone/>
-              <a:defRPr b="1" sz="3200">
+              <a:defRPr sz="3200" b="1">
                 <a:solidFill>
                   <a:srgbClr val="161625"/>
                 </a:solidFill>
@@ -4441,7 +4517,7 @@
               </a:buClr>
               <a:buSzPts val="3200"/>
               <a:buNone/>
-              <a:defRPr b="1" sz="3200">
+              <a:defRPr sz="3200" b="1">
                 <a:solidFill>
                   <a:srgbClr val="161625"/>
                 </a:solidFill>
@@ -4459,7 +4535,7 @@
               </a:buClr>
               <a:buSzPts val="3200"/>
               <a:buNone/>
-              <a:defRPr b="1" sz="3200">
+              <a:defRPr sz="3200" b="1">
                 <a:solidFill>
                   <a:srgbClr val="161625"/>
                 </a:solidFill>
@@ -4477,7 +4553,7 @@
               </a:buClr>
               <a:buSzPts val="3200"/>
               <a:buNone/>
-              <a:defRPr b="1" sz="3200">
+              <a:defRPr sz="3200" b="1">
                 <a:solidFill>
                   <a:srgbClr val="161625"/>
                 </a:solidFill>
@@ -4495,7 +4571,7 @@
               </a:buClr>
               <a:buSzPts val="3200"/>
               <a:buNone/>
-              <a:defRPr b="1" sz="3200">
+              <a:defRPr sz="3200" b="1">
                 <a:solidFill>
                   <a:srgbClr val="161625"/>
                 </a:solidFill>
@@ -4513,7 +4589,7 @@
               </a:buClr>
               <a:buSzPts val="3200"/>
               <a:buNone/>
-              <a:defRPr b="1" sz="3200">
+              <a:defRPr sz="3200" b="1">
                 <a:solidFill>
                   <a:srgbClr val="161625"/>
                 </a:solidFill>
@@ -4531,7 +4607,7 @@
               </a:buClr>
               <a:buSzPts val="3200"/>
               <a:buNone/>
-              <a:defRPr b="1" sz="3200">
+              <a:defRPr sz="3200" b="1">
                 <a:solidFill>
                   <a:srgbClr val="161625"/>
                 </a:solidFill>
@@ -4549,7 +4625,7 @@
               </a:buClr>
               <a:buSzPts val="3200"/>
               <a:buNone/>
-              <a:defRPr b="1" sz="3200">
+              <a:defRPr sz="3200" b="1">
                 <a:solidFill>
                   <a:srgbClr val="161625"/>
                 </a:solidFill>
@@ -4567,14 +4643,16 @@
               </a:buClr>
               <a:buSzPts val="3200"/>
               <a:buNone/>
-              <a:defRPr b="1" sz="3200">
+              <a:defRPr sz="3200" b="1">
                 <a:solidFill>
                   <a:srgbClr val="161625"/>
                 </a:solidFill>
               </a:defRPr>
             </a:lvl9pPr>
           </a:lstStyle>
-          <a:p/>
+          <a:p>
+            <a:endParaRPr/>
+          </a:p>
         </p:txBody>
       </p:sp>
       <p:pic>
@@ -4608,9 +4686,11 @@
       <p:sp>
         <p:nvSpPr>
           <p:cNvPr id="49" name="Google Shape;49;p9"/>
-          <p:cNvSpPr txBox="1"/>
+          <p:cNvSpPr txBox="1">
+            <a:spLocks noGrp="1"/>
+          </p:cNvSpPr>
           <p:nvPr>
-            <p:ph idx="12" type="sldNum"/>
+            <p:ph type="sldNum" idx="12"/>
           </p:nvPr>
         </p:nvSpPr>
         <p:spPr>
@@ -4623,7 +4703,7 @@
           </a:prstGeom>
         </p:spPr>
         <p:txBody>
-          <a:bodyPr anchorCtr="0" anchor="ctr" bIns="91425" lIns="91425" spcFirstLastPara="1" rIns="91425" wrap="square" tIns="91425">
+          <a:bodyPr spcFirstLastPara="1" wrap="square" lIns="91425" tIns="91425" rIns="91425" bIns="91425" anchor="ctr" anchorCtr="0">
             <a:normAutofit/>
           </a:bodyPr>
           <a:lstStyle>
@@ -4701,7 +4781,7 @@
             </a:lvl9pPr>
           </a:lstStyle>
           <a:p>
-            <a:pPr indent="0" lvl="0" marL="0" rtl="0" algn="r">
+            <a:pPr marL="0" lvl="0" indent="0" algn="r" rtl="0">
               <a:spcBef>
                 <a:spcPts val="0"/>
               </a:spcBef>
@@ -4712,7 +4792,7 @@
             </a:pPr>
             <a:fld id="{00000000-1234-1234-1234-123412341234}" type="slidenum">
               <a:rPr lang="es"/>
-              <a:t>‹#›</a:t>
+              <a:t>‹Nº›</a:t>
             </a:fld>
             <a:endParaRPr/>
           </a:p>
@@ -4733,14 +4813,14 @@
             <a:avLst/>
           </a:prstGeom>
           <a:noFill/>
-          <a:ln cap="flat" cmpd="sng" w="9525">
+          <a:ln w="9525" cap="flat" cmpd="sng">
             <a:solidFill>
               <a:srgbClr val="FF743B"/>
             </a:solidFill>
             <a:prstDash val="solid"/>
             <a:round/>
-            <a:headEnd len="med" w="med" type="none"/>
-            <a:tailEnd len="med" w="med" type="none"/>
+            <a:headEnd type="none" w="med" len="med"/>
+            <a:tailEnd type="none" w="med" len="med"/>
           </a:ln>
         </p:spPr>
       </p:cxnSp>
@@ -4753,18 +4833,19 @@
 </file>
 
 <file path=ppt/slideLayouts/slideLayout9.xml><?xml version="1.0" encoding="utf-8"?>
-<p:sldLayout xmlns:a="http://schemas.openxmlformats.org/drawingml/2006/main" xmlns:r="http://schemas.openxmlformats.org/officeDocument/2006/relationships" xmlns:mc="http://schemas.openxmlformats.org/markup-compatibility/2006" xmlns:mv="urn:schemas-microsoft-com:mac:vml" xmlns:p="http://schemas.openxmlformats.org/presentationml/2006/main" xmlns:c="http://schemas.openxmlformats.org/drawingml/2006/chart" xmlns:dgm="http://schemas.openxmlformats.org/drawingml/2006/diagram" xmlns:o="urn:schemas-microsoft-com:office:office" xmlns:v="urn:schemas-microsoft-com:vml" xmlns:pvml="urn:schemas-microsoft-com:office:powerpoint" xmlns:com="http://schemas.openxmlformats.org/drawingml/2006/compatibility" xmlns:p14="http://schemas.microsoft.com/office/powerpoint/2010/main" xmlns:p15="http://schemas.microsoft.com/office/powerpoint/2012/main" xmlns:ahyp="http://schemas.microsoft.com/office/drawing/2018/hyperlinkcolor" matchingName="One column text">
+<p:sldLayout xmlns:a="http://schemas.openxmlformats.org/drawingml/2006/main" xmlns:r="http://schemas.openxmlformats.org/officeDocument/2006/relationships" xmlns:p="http://schemas.openxmlformats.org/presentationml/2006/main" matchingName="One column text">
   <p:cSld name="ONE_COLUMN_TEXT">
     <p:bg>
       <p:bgPr>
         <a:solidFill>
           <a:srgbClr val="1D1D30"/>
         </a:solidFill>
+        <a:effectLst/>
       </p:bgPr>
     </p:bg>
     <p:spTree>
       <p:nvGrpSpPr>
-        <p:cNvPr id="51" name="Shape 51"/>
+        <p:cNvPr id="1" name="Shape 51"/>
         <p:cNvGrpSpPr/>
         <p:nvPr/>
       </p:nvGrpSpPr>
@@ -4786,7 +4867,7 @@
           <a:blip r:embed="rId2">
             <a:alphaModFix/>
           </a:blip>
-          <a:srcRect b="70" l="0" r="0" t="70"/>
+          <a:srcRect t="70" b="70"/>
           <a:stretch/>
         </p:blipFill>
         <p:spPr>
@@ -4806,7 +4887,9 @@
       <p:sp>
         <p:nvSpPr>
           <p:cNvPr id="53" name="Google Shape;53;p10"/>
-          <p:cNvSpPr txBox="1"/>
+          <p:cNvSpPr txBox="1">
+            <a:spLocks noGrp="1"/>
+          </p:cNvSpPr>
           <p:nvPr>
             <p:ph type="title"/>
           </p:nvPr>
@@ -4821,7 +4904,7 @@
           </a:prstGeom>
         </p:spPr>
         <p:txBody>
-          <a:bodyPr anchorCtr="0" anchor="b" bIns="91425" lIns="91425" spcFirstLastPara="1" rIns="91425" wrap="square" tIns="91425">
+          <a:bodyPr spcFirstLastPara="1" wrap="square" lIns="91425" tIns="91425" rIns="91425" bIns="91425" anchor="b" anchorCtr="0">
             <a:normAutofit/>
           </a:bodyPr>
           <a:lstStyle>
@@ -4988,15 +5071,19 @@
               </a:defRPr>
             </a:lvl9pPr>
           </a:lstStyle>
-          <a:p/>
+          <a:p>
+            <a:endParaRPr/>
+          </a:p>
         </p:txBody>
       </p:sp>
       <p:sp>
         <p:nvSpPr>
           <p:cNvPr id="54" name="Google Shape;54;p10"/>
-          <p:cNvSpPr txBox="1"/>
+          <p:cNvSpPr txBox="1">
+            <a:spLocks noGrp="1"/>
+          </p:cNvSpPr>
           <p:nvPr>
-            <p:ph idx="1" type="body"/>
+            <p:ph type="body" idx="1"/>
           </p:nvPr>
         </p:nvSpPr>
         <p:spPr>
@@ -5013,11 +5100,11 @@
           </a:ln>
         </p:spPr>
         <p:txBody>
-          <a:bodyPr anchorCtr="0" anchor="ctr" bIns="91425" lIns="91425" spcFirstLastPara="1" rIns="91425" wrap="square" tIns="91425">
+          <a:bodyPr spcFirstLastPara="1" wrap="square" lIns="91425" tIns="91425" rIns="91425" bIns="91425" anchor="ctr" anchorCtr="0">
             <a:noAutofit/>
           </a:bodyPr>
           <a:lstStyle>
-            <a:lvl1pPr indent="-368300" lvl="0" marL="457200">
+            <a:lvl1pPr marL="457200" lvl="0" indent="-368300">
               <a:spcBef>
                 <a:spcPts val="0"/>
               </a:spcBef>
@@ -5029,13 +5116,13 @@
               </a:buClr>
               <a:buSzPts val="2200"/>
               <a:buChar char="●"/>
-              <a:defRPr b="1" sz="2200">
+              <a:defRPr sz="2200" b="1">
                 <a:solidFill>
                   <a:srgbClr val="161625"/>
                 </a:solidFill>
               </a:defRPr>
             </a:lvl1pPr>
-            <a:lvl2pPr indent="-330200" lvl="1" marL="914400">
+            <a:lvl2pPr marL="914400" lvl="1" indent="-330200">
               <a:spcBef>
                 <a:spcPts val="0"/>
               </a:spcBef>
@@ -5053,7 +5140,7 @@
                 </a:solidFill>
               </a:defRPr>
             </a:lvl2pPr>
-            <a:lvl3pPr indent="-317500" lvl="2" marL="1371600">
+            <a:lvl3pPr marL="1371600" lvl="2" indent="-317500">
               <a:spcBef>
                 <a:spcPts val="0"/>
               </a:spcBef>
@@ -5071,7 +5158,7 @@
                 </a:solidFill>
               </a:defRPr>
             </a:lvl3pPr>
-            <a:lvl4pPr indent="-304800" lvl="3" marL="1828800">
+            <a:lvl4pPr marL="1828800" lvl="3" indent="-304800">
               <a:spcBef>
                 <a:spcPts val="0"/>
               </a:spcBef>
@@ -5089,7 +5176,7 @@
                 </a:solidFill>
               </a:defRPr>
             </a:lvl4pPr>
-            <a:lvl5pPr indent="-292100" lvl="4" marL="2286000">
+            <a:lvl5pPr marL="2286000" lvl="4" indent="-292100">
               <a:spcBef>
                 <a:spcPts val="0"/>
               </a:spcBef>
@@ -5107,7 +5194,7 @@
                 </a:solidFill>
               </a:defRPr>
             </a:lvl5pPr>
-            <a:lvl6pPr indent="-285750" lvl="5" marL="2743200">
+            <a:lvl6pPr marL="2743200" lvl="5" indent="-285750">
               <a:spcBef>
                 <a:spcPts val="0"/>
               </a:spcBef>
@@ -5125,7 +5212,7 @@
                 </a:solidFill>
               </a:defRPr>
             </a:lvl6pPr>
-            <a:lvl7pPr indent="-279400" lvl="6" marL="3200400">
+            <a:lvl7pPr marL="3200400" lvl="6" indent="-279400">
               <a:spcBef>
                 <a:spcPts val="0"/>
               </a:spcBef>
@@ -5143,7 +5230,7 @@
                 </a:solidFill>
               </a:defRPr>
             </a:lvl7pPr>
-            <a:lvl8pPr indent="-273050" lvl="7" marL="3657600">
+            <a:lvl8pPr marL="3657600" lvl="7" indent="-273050">
               <a:spcBef>
                 <a:spcPts val="0"/>
               </a:spcBef>
@@ -5161,7 +5248,7 @@
                 </a:solidFill>
               </a:defRPr>
             </a:lvl8pPr>
-            <a:lvl9pPr indent="-260350" lvl="8" marL="4114800">
+            <a:lvl9pPr marL="4114800" lvl="8" indent="-260350">
               <a:spcBef>
                 <a:spcPts val="0"/>
               </a:spcBef>
@@ -5180,7 +5267,9 @@
               </a:defRPr>
             </a:lvl9pPr>
           </a:lstStyle>
-          <a:p/>
+          <a:p>
+            <a:endParaRPr/>
+          </a:p>
         </p:txBody>
       </p:sp>
       <p:pic>
@@ -5214,9 +5303,11 @@
       <p:sp>
         <p:nvSpPr>
           <p:cNvPr id="56" name="Google Shape;56;p10"/>
-          <p:cNvSpPr txBox="1"/>
+          <p:cNvSpPr txBox="1">
+            <a:spLocks noGrp="1"/>
+          </p:cNvSpPr>
           <p:nvPr>
-            <p:ph idx="12" type="sldNum"/>
+            <p:ph type="sldNum" idx="12"/>
           </p:nvPr>
         </p:nvSpPr>
         <p:spPr>
@@ -5229,7 +5320,7 @@
           </a:prstGeom>
         </p:spPr>
         <p:txBody>
-          <a:bodyPr anchorCtr="0" anchor="ctr" bIns="91425" lIns="91425" spcFirstLastPara="1" rIns="91425" wrap="square" tIns="91425">
+          <a:bodyPr spcFirstLastPara="1" wrap="square" lIns="91425" tIns="91425" rIns="91425" bIns="91425" anchor="ctr" anchorCtr="0">
             <a:normAutofit/>
           </a:bodyPr>
           <a:lstStyle>
@@ -5307,7 +5398,7 @@
             </a:lvl9pPr>
           </a:lstStyle>
           <a:p>
-            <a:pPr indent="0" lvl="0" marL="0" rtl="0" algn="r">
+            <a:pPr marL="0" lvl="0" indent="0" algn="r" rtl="0">
               <a:spcBef>
                 <a:spcPts val="0"/>
               </a:spcBef>
@@ -5318,7 +5409,7 @@
             </a:pPr>
             <a:fld id="{00000000-1234-1234-1234-123412341234}" type="slidenum">
               <a:rPr lang="es"/>
-              <a:t>‹#›</a:t>
+              <a:t>‹Nº›</a:t>
             </a:fld>
             <a:endParaRPr/>
           </a:p>
@@ -5339,14 +5430,14 @@
             <a:avLst/>
           </a:prstGeom>
           <a:noFill/>
-          <a:ln cap="flat" cmpd="sng" w="9525">
+          <a:ln w="9525" cap="flat" cmpd="sng">
             <a:solidFill>
               <a:srgbClr val="FF743B"/>
             </a:solidFill>
             <a:prstDash val="solid"/>
             <a:round/>
-            <a:headEnd len="med" w="med" type="none"/>
-            <a:tailEnd len="med" w="med" type="none"/>
+            <a:headEnd type="none" w="med" len="med"/>
+            <a:tailEnd type="none" w="med" len="med"/>
           </a:ln>
         </p:spPr>
       </p:cxnSp>
@@ -5359,18 +5450,19 @@
 </file>
 
 <file path=ppt/slideMasters/slideMaster1.xml><?xml version="1.0" encoding="utf-8"?>
-<p:sldMaster xmlns:a="http://schemas.openxmlformats.org/drawingml/2006/main" xmlns:r="http://schemas.openxmlformats.org/officeDocument/2006/relationships" xmlns:mc="http://schemas.openxmlformats.org/markup-compatibility/2006" xmlns:mv="urn:schemas-microsoft-com:mac:vml" xmlns:p="http://schemas.openxmlformats.org/presentationml/2006/main" xmlns:c="http://schemas.openxmlformats.org/drawingml/2006/chart" xmlns:dgm="http://schemas.openxmlformats.org/drawingml/2006/diagram" xmlns:o="urn:schemas-microsoft-com:office:office" xmlns:v="urn:schemas-microsoft-com:vml" xmlns:pvml="urn:schemas-microsoft-com:office:powerpoint" xmlns:com="http://schemas.openxmlformats.org/drawingml/2006/compatibility" xmlns:p14="http://schemas.microsoft.com/office/powerpoint/2010/main" xmlns:p15="http://schemas.microsoft.com/office/powerpoint/2012/main" xmlns:ahyp="http://schemas.microsoft.com/office/drawing/2018/hyperlinkcolor">
+<p:sldMaster xmlns:a="http://schemas.openxmlformats.org/drawingml/2006/main" xmlns:r="http://schemas.openxmlformats.org/officeDocument/2006/relationships" xmlns:p="http://schemas.openxmlformats.org/presentationml/2006/main">
   <p:cSld name="simple-light-2">
     <p:bg>
       <p:bgPr>
         <a:solidFill>
           <a:srgbClr val="1D1D30"/>
         </a:solidFill>
+        <a:effectLst/>
       </p:bgPr>
     </p:bg>
     <p:spTree>
       <p:nvGrpSpPr>
-        <p:cNvPr id="5" name="Shape 5"/>
+        <p:cNvPr id="1" name="Shape 5"/>
         <p:cNvGrpSpPr/>
         <p:nvPr/>
       </p:nvGrpSpPr>
@@ -5385,7 +5477,9 @@
       <p:sp>
         <p:nvSpPr>
           <p:cNvPr id="6" name="Google Shape;6;p1"/>
-          <p:cNvSpPr txBox="1"/>
+          <p:cNvSpPr txBox="1">
+            <a:spLocks noGrp="1"/>
+          </p:cNvSpPr>
           <p:nvPr>
             <p:ph type="title"/>
           </p:nvPr>
@@ -5404,7 +5498,7 @@
           </a:ln>
         </p:spPr>
         <p:txBody>
-          <a:bodyPr anchorCtr="0" anchor="t" bIns="91425" lIns="91425" spcFirstLastPara="1" rIns="91425" wrap="square" tIns="91425">
+          <a:bodyPr spcFirstLastPara="1" wrap="square" lIns="91425" tIns="91425" rIns="91425" bIns="91425" anchor="t" anchorCtr="0">
             <a:normAutofit/>
           </a:bodyPr>
           <a:lstStyle>
@@ -5420,7 +5514,7 @@
               </a:buClr>
               <a:buSzPts val="2800"/>
               <a:buNone/>
-              <a:defRPr b="1" sz="2800">
+              <a:defRPr sz="2800" b="1">
                 <a:solidFill>
                   <a:schemeClr val="lt1"/>
                 </a:solidFill>
@@ -5438,7 +5532,7 @@
               </a:buClr>
               <a:buSzPts val="2800"/>
               <a:buNone/>
-              <a:defRPr b="1" sz="2800">
+              <a:defRPr sz="2800" b="1">
                 <a:solidFill>
                   <a:schemeClr val="lt1"/>
                 </a:solidFill>
@@ -5456,7 +5550,7 @@
               </a:buClr>
               <a:buSzPts val="2800"/>
               <a:buNone/>
-              <a:defRPr b="1" sz="2800">
+              <a:defRPr sz="2800" b="1">
                 <a:solidFill>
                   <a:schemeClr val="lt1"/>
                 </a:solidFill>
@@ -5474,7 +5568,7 @@
               </a:buClr>
               <a:buSzPts val="2800"/>
               <a:buNone/>
-              <a:defRPr b="1" sz="2800">
+              <a:defRPr sz="2800" b="1">
                 <a:solidFill>
                   <a:schemeClr val="lt1"/>
                 </a:solidFill>
@@ -5492,7 +5586,7 @@
               </a:buClr>
               <a:buSzPts val="2800"/>
               <a:buNone/>
-              <a:defRPr b="1" sz="2800">
+              <a:defRPr sz="2800" b="1">
                 <a:solidFill>
                   <a:schemeClr val="lt1"/>
                 </a:solidFill>
@@ -5510,7 +5604,7 @@
               </a:buClr>
               <a:buSzPts val="2800"/>
               <a:buNone/>
-              <a:defRPr b="1" sz="2800">
+              <a:defRPr sz="2800" b="1">
                 <a:solidFill>
                   <a:schemeClr val="lt1"/>
                 </a:solidFill>
@@ -5528,7 +5622,7 @@
               </a:buClr>
               <a:buSzPts val="2800"/>
               <a:buNone/>
-              <a:defRPr b="1" sz="2800">
+              <a:defRPr sz="2800" b="1">
                 <a:solidFill>
                   <a:schemeClr val="lt1"/>
                 </a:solidFill>
@@ -5546,7 +5640,7 @@
               </a:buClr>
               <a:buSzPts val="2800"/>
               <a:buNone/>
-              <a:defRPr b="1" sz="2800">
+              <a:defRPr sz="2800" b="1">
                 <a:solidFill>
                   <a:schemeClr val="lt1"/>
                 </a:solidFill>
@@ -5564,22 +5658,26 @@
               </a:buClr>
               <a:buSzPts val="2800"/>
               <a:buNone/>
-              <a:defRPr b="1" sz="2800">
+              <a:defRPr sz="2800" b="1">
                 <a:solidFill>
                   <a:schemeClr val="lt1"/>
                 </a:solidFill>
               </a:defRPr>
             </a:lvl9pPr>
           </a:lstStyle>
-          <a:p/>
+          <a:p>
+            <a:endParaRPr/>
+          </a:p>
         </p:txBody>
       </p:sp>
       <p:sp>
         <p:nvSpPr>
           <p:cNvPr id="7" name="Google Shape;7;p1"/>
-          <p:cNvSpPr txBox="1"/>
+          <p:cNvSpPr txBox="1">
+            <a:spLocks noGrp="1"/>
+          </p:cNvSpPr>
           <p:nvPr>
-            <p:ph idx="12" type="sldNum"/>
+            <p:ph type="sldNum" idx="12"/>
           </p:nvPr>
         </p:nvSpPr>
         <p:spPr>
@@ -5596,7 +5694,7 @@
           </a:ln>
         </p:spPr>
         <p:txBody>
-          <a:bodyPr anchorCtr="0" anchor="ctr" bIns="91425" lIns="91425" spcFirstLastPara="1" rIns="91425" wrap="square" tIns="91425">
+          <a:bodyPr spcFirstLastPara="1" wrap="square" lIns="91425" tIns="91425" rIns="91425" bIns="91425" anchor="ctr" anchorCtr="0">
             <a:normAutofit/>
           </a:bodyPr>
           <a:lstStyle>
@@ -5674,7 +5772,7 @@
             </a:lvl9pPr>
           </a:lstStyle>
           <a:p>
-            <a:pPr indent="0" lvl="0" marL="0" rtl="0" algn="r">
+            <a:pPr marL="0" lvl="0" indent="0" algn="r" rtl="0">
               <a:spcBef>
                 <a:spcPts val="0"/>
               </a:spcBef>
@@ -5685,7 +5783,7 @@
             </a:pPr>
             <a:fld id="{00000000-1234-1234-1234-123412341234}" type="slidenum">
               <a:rPr lang="es"/>
-              <a:t>‹#›</a:t>
+              <a:t>‹Nº›</a:t>
             </a:fld>
             <a:endParaRPr/>
           </a:p>
@@ -5694,9 +5792,11 @@
       <p:sp>
         <p:nvSpPr>
           <p:cNvPr id="8" name="Google Shape;8;p1"/>
-          <p:cNvSpPr txBox="1"/>
+          <p:cNvSpPr txBox="1">
+            <a:spLocks noGrp="1"/>
+          </p:cNvSpPr>
           <p:nvPr>
-            <p:ph idx="1" type="body"/>
+            <p:ph type="body" idx="1"/>
           </p:nvPr>
         </p:nvSpPr>
         <p:spPr>
@@ -5713,11 +5813,11 @@
           </a:ln>
         </p:spPr>
         <p:txBody>
-          <a:bodyPr anchorCtr="0" anchor="ctr" bIns="91425" lIns="91425" spcFirstLastPara="1" rIns="91425" wrap="square" tIns="91425">
+          <a:bodyPr spcFirstLastPara="1" wrap="square" lIns="91425" tIns="91425" rIns="91425" bIns="91425" anchor="ctr" anchorCtr="0">
             <a:noAutofit/>
           </a:bodyPr>
           <a:lstStyle>
-            <a:lvl1pPr indent="-330200" lvl="0" marL="457200">
+            <a:lvl1pPr marL="457200" lvl="0" indent="-330200">
               <a:spcBef>
                 <a:spcPts val="0"/>
               </a:spcBef>
@@ -5735,7 +5835,7 @@
                 </a:solidFill>
               </a:defRPr>
             </a:lvl1pPr>
-            <a:lvl2pPr indent="-317500" lvl="1" marL="914400">
+            <a:lvl2pPr marL="914400" lvl="1" indent="-317500">
               <a:spcBef>
                 <a:spcPts val="0"/>
               </a:spcBef>
@@ -5753,7 +5853,7 @@
                 </a:solidFill>
               </a:defRPr>
             </a:lvl2pPr>
-            <a:lvl3pPr indent="-304800" lvl="2" marL="1371600">
+            <a:lvl3pPr marL="1371600" lvl="2" indent="-304800">
               <a:spcBef>
                 <a:spcPts val="0"/>
               </a:spcBef>
@@ -5771,7 +5871,7 @@
                 </a:solidFill>
               </a:defRPr>
             </a:lvl3pPr>
-            <a:lvl4pPr indent="-298450" lvl="3" marL="1828800">
+            <a:lvl4pPr marL="1828800" lvl="3" indent="-298450">
               <a:spcBef>
                 <a:spcPts val="0"/>
               </a:spcBef>
@@ -5789,7 +5889,7 @@
                 </a:solidFill>
               </a:defRPr>
             </a:lvl4pPr>
-            <a:lvl5pPr indent="-285750" lvl="4" marL="2286000">
+            <a:lvl5pPr marL="2286000" lvl="4" indent="-285750">
               <a:spcBef>
                 <a:spcPts val="0"/>
               </a:spcBef>
@@ -5807,7 +5907,7 @@
                 </a:solidFill>
               </a:defRPr>
             </a:lvl5pPr>
-            <a:lvl6pPr indent="-279400" lvl="5" marL="2743200">
+            <a:lvl6pPr marL="2743200" lvl="5" indent="-279400">
               <a:spcBef>
                 <a:spcPts val="0"/>
               </a:spcBef>
@@ -5825,7 +5925,7 @@
                 </a:solidFill>
               </a:defRPr>
             </a:lvl6pPr>
-            <a:lvl7pPr indent="-273050" lvl="6" marL="3200400">
+            <a:lvl7pPr marL="3200400" lvl="6" indent="-273050">
               <a:spcBef>
                 <a:spcPts val="0"/>
               </a:spcBef>
@@ -5843,7 +5943,7 @@
                 </a:solidFill>
               </a:defRPr>
             </a:lvl7pPr>
-            <a:lvl8pPr indent="-266700" lvl="7" marL="3657600">
+            <a:lvl8pPr marL="3657600" lvl="7" indent="-266700">
               <a:spcBef>
                 <a:spcPts val="0"/>
               </a:spcBef>
@@ -5861,7 +5961,7 @@
                 </a:solidFill>
               </a:defRPr>
             </a:lvl8pPr>
-            <a:lvl9pPr indent="-260350" lvl="8" marL="4114800">
+            <a:lvl9pPr marL="4114800" lvl="8" indent="-260350">
               <a:spcBef>
                 <a:spcPts val="0"/>
               </a:spcBef>
@@ -5880,12 +5980,14 @@
               </a:defRPr>
             </a:lvl9pPr>
           </a:lstStyle>
-          <a:p/>
+          <a:p>
+            <a:endParaRPr/>
+          </a:p>
         </p:txBody>
       </p:sp>
     </p:spTree>
   </p:cSld>
-  <p:clrMap accent1="accent1" accent2="accent2" accent3="accent3" accent4="accent4" accent5="accent5" accent6="accent6" bg1="lt1" bg2="dk2" tx1="dk1" tx2="lt2" folHlink="folHlink" hlink="hlink"/>
+  <p:clrMap bg1="lt1" tx1="dk1" bg2="dk2" tx2="lt2" accent1="accent1" accent2="accent2" accent3="accent3" accent4="accent4" accent5="accent5" accent6="accent6" hlink="hlink" folHlink="folHlink"/>
   <p:sldLayoutIdLst>
     <p:sldLayoutId id="2147483648" r:id="rId1"/>
     <p:sldLayoutId id="2147483649" r:id="rId2"/>
@@ -5900,10 +6002,10 @@
     <p:sldLayoutId id="2147483658" r:id="rId11"/>
     <p:sldLayoutId id="2147483659" r:id="rId12"/>
   </p:sldLayoutIdLst>
-  <p:hf dt="0" ftr="0" hdr="0"/>
+  <p:hf hdr="0" ftr="0" dt="0"/>
   <p:txStyles>
     <p:titleStyle>
-      <a:defPPr lvl="0" marR="0" rtl="0" algn="l">
+      <a:defPPr marR="0" lvl="0" algn="l" rtl="0">
         <a:lnSpc>
           <a:spcPct val="100000"/>
         </a:lnSpc>
@@ -5914,7 +6016,7 @@
           <a:spcPts val="0"/>
         </a:spcAft>
       </a:defPPr>
-      <a:lvl1pPr lvl="0" marR="0" rtl="0" algn="l">
+      <a:lvl1pPr marR="0" lvl="0" algn="l" rtl="0">
         <a:lnSpc>
           <a:spcPct val="100000"/>
         </a:lnSpc>
@@ -5928,7 +6030,7 @@
           <a:srgbClr val="000000"/>
         </a:buClr>
         <a:buFont typeface="Arial"/>
-        <a:defRPr b="0" i="0" sz="1400" u="none" cap="none" strike="noStrike">
+        <a:defRPr sz="1400" b="0" i="0" u="none" strike="noStrike" cap="none">
           <a:solidFill>
             <a:srgbClr val="000000"/>
           </a:solidFill>
@@ -5938,7 +6040,7 @@
           <a:sym typeface="Arial"/>
         </a:defRPr>
       </a:lvl1pPr>
-      <a:lvl2pPr lvl="1" marR="0" rtl="0" algn="l">
+      <a:lvl2pPr marR="0" lvl="1" algn="l" rtl="0">
         <a:lnSpc>
           <a:spcPct val="100000"/>
         </a:lnSpc>
@@ -5952,7 +6054,7 @@
           <a:srgbClr val="000000"/>
         </a:buClr>
         <a:buFont typeface="Arial"/>
-        <a:defRPr b="0" i="0" sz="1400" u="none" cap="none" strike="noStrike">
+        <a:defRPr sz="1400" b="0" i="0" u="none" strike="noStrike" cap="none">
           <a:solidFill>
             <a:srgbClr val="000000"/>
           </a:solidFill>
@@ -5962,7 +6064,7 @@
           <a:sym typeface="Arial"/>
         </a:defRPr>
       </a:lvl2pPr>
-      <a:lvl3pPr lvl="2" marR="0" rtl="0" algn="l">
+      <a:lvl3pPr marR="0" lvl="2" algn="l" rtl="0">
         <a:lnSpc>
           <a:spcPct val="100000"/>
         </a:lnSpc>
@@ -5976,7 +6078,7 @@
           <a:srgbClr val="000000"/>
         </a:buClr>
         <a:buFont typeface="Arial"/>
-        <a:defRPr b="0" i="0" sz="1400" u="none" cap="none" strike="noStrike">
+        <a:defRPr sz="1400" b="0" i="0" u="none" strike="noStrike" cap="none">
           <a:solidFill>
             <a:srgbClr val="000000"/>
           </a:solidFill>
@@ -5986,7 +6088,7 @@
           <a:sym typeface="Arial"/>
         </a:defRPr>
       </a:lvl3pPr>
-      <a:lvl4pPr lvl="3" marR="0" rtl="0" algn="l">
+      <a:lvl4pPr marR="0" lvl="3" algn="l" rtl="0">
         <a:lnSpc>
           <a:spcPct val="100000"/>
         </a:lnSpc>
@@ -6000,7 +6102,7 @@
           <a:srgbClr val="000000"/>
         </a:buClr>
         <a:buFont typeface="Arial"/>
-        <a:defRPr b="0" i="0" sz="1400" u="none" cap="none" strike="noStrike">
+        <a:defRPr sz="1400" b="0" i="0" u="none" strike="noStrike" cap="none">
           <a:solidFill>
             <a:srgbClr val="000000"/>
           </a:solidFill>
@@ -6010,7 +6112,7 @@
           <a:sym typeface="Arial"/>
         </a:defRPr>
       </a:lvl4pPr>
-      <a:lvl5pPr lvl="4" marR="0" rtl="0" algn="l">
+      <a:lvl5pPr marR="0" lvl="4" algn="l" rtl="0">
         <a:lnSpc>
           <a:spcPct val="100000"/>
         </a:lnSpc>
@@ -6024,7 +6126,7 @@
           <a:srgbClr val="000000"/>
         </a:buClr>
         <a:buFont typeface="Arial"/>
-        <a:defRPr b="0" i="0" sz="1400" u="none" cap="none" strike="noStrike">
+        <a:defRPr sz="1400" b="0" i="0" u="none" strike="noStrike" cap="none">
           <a:solidFill>
             <a:srgbClr val="000000"/>
           </a:solidFill>
@@ -6034,7 +6136,7 @@
           <a:sym typeface="Arial"/>
         </a:defRPr>
       </a:lvl5pPr>
-      <a:lvl6pPr lvl="5" marR="0" rtl="0" algn="l">
+      <a:lvl6pPr marR="0" lvl="5" algn="l" rtl="0">
         <a:lnSpc>
           <a:spcPct val="100000"/>
         </a:lnSpc>
@@ -6048,7 +6150,7 @@
           <a:srgbClr val="000000"/>
         </a:buClr>
         <a:buFont typeface="Arial"/>
-        <a:defRPr b="0" i="0" sz="1400" u="none" cap="none" strike="noStrike">
+        <a:defRPr sz="1400" b="0" i="0" u="none" strike="noStrike" cap="none">
           <a:solidFill>
             <a:srgbClr val="000000"/>
           </a:solidFill>
@@ -6058,7 +6160,7 @@
           <a:sym typeface="Arial"/>
         </a:defRPr>
       </a:lvl6pPr>
-      <a:lvl7pPr lvl="6" marR="0" rtl="0" algn="l">
+      <a:lvl7pPr marR="0" lvl="6" algn="l" rtl="0">
         <a:lnSpc>
           <a:spcPct val="100000"/>
         </a:lnSpc>
@@ -6072,7 +6174,7 @@
           <a:srgbClr val="000000"/>
         </a:buClr>
         <a:buFont typeface="Arial"/>
-        <a:defRPr b="0" i="0" sz="1400" u="none" cap="none" strike="noStrike">
+        <a:defRPr sz="1400" b="0" i="0" u="none" strike="noStrike" cap="none">
           <a:solidFill>
             <a:srgbClr val="000000"/>
           </a:solidFill>
@@ -6082,7 +6184,7 @@
           <a:sym typeface="Arial"/>
         </a:defRPr>
       </a:lvl7pPr>
-      <a:lvl8pPr lvl="7" marR="0" rtl="0" algn="l">
+      <a:lvl8pPr marR="0" lvl="7" algn="l" rtl="0">
         <a:lnSpc>
           <a:spcPct val="100000"/>
         </a:lnSpc>
@@ -6096,7 +6198,7 @@
           <a:srgbClr val="000000"/>
         </a:buClr>
         <a:buFont typeface="Arial"/>
-        <a:defRPr b="0" i="0" sz="1400" u="none" cap="none" strike="noStrike">
+        <a:defRPr sz="1400" b="0" i="0" u="none" strike="noStrike" cap="none">
           <a:solidFill>
             <a:srgbClr val="000000"/>
           </a:solidFill>
@@ -6106,7 +6208,7 @@
           <a:sym typeface="Arial"/>
         </a:defRPr>
       </a:lvl8pPr>
-      <a:lvl9pPr lvl="8" marR="0" rtl="0" algn="l">
+      <a:lvl9pPr marR="0" lvl="8" algn="l" rtl="0">
         <a:lnSpc>
           <a:spcPct val="100000"/>
         </a:lnSpc>
@@ -6120,7 +6222,7 @@
           <a:srgbClr val="000000"/>
         </a:buClr>
         <a:buFont typeface="Arial"/>
-        <a:defRPr b="0" i="0" sz="1400" u="none" cap="none" strike="noStrike">
+        <a:defRPr sz="1400" b="0" i="0" u="none" strike="noStrike" cap="none">
           <a:solidFill>
             <a:srgbClr val="000000"/>
           </a:solidFill>
@@ -6132,7 +6234,7 @@
       </a:lvl9pPr>
     </p:titleStyle>
     <p:bodyStyle>
-      <a:defPPr lvl="0" marR="0" rtl="0" algn="l">
+      <a:defPPr marR="0" lvl="0" algn="l" rtl="0">
         <a:lnSpc>
           <a:spcPct val="100000"/>
         </a:lnSpc>
@@ -6143,7 +6245,7 @@
           <a:spcPts val="0"/>
         </a:spcAft>
       </a:defPPr>
-      <a:lvl1pPr lvl="0" marR="0" rtl="0" algn="l">
+      <a:lvl1pPr marR="0" lvl="0" algn="l" rtl="0">
         <a:lnSpc>
           <a:spcPct val="100000"/>
         </a:lnSpc>
@@ -6157,7 +6259,7 @@
           <a:srgbClr val="000000"/>
         </a:buClr>
         <a:buFont typeface="Arial"/>
-        <a:defRPr b="0" i="0" sz="1400" u="none" cap="none" strike="noStrike">
+        <a:defRPr sz="1400" b="0" i="0" u="none" strike="noStrike" cap="none">
           <a:solidFill>
             <a:srgbClr val="000000"/>
           </a:solidFill>
@@ -6167,7 +6269,7 @@
           <a:sym typeface="Arial"/>
         </a:defRPr>
       </a:lvl1pPr>
-      <a:lvl2pPr lvl="1" marR="0" rtl="0" algn="l">
+      <a:lvl2pPr marR="0" lvl="1" algn="l" rtl="0">
         <a:lnSpc>
           <a:spcPct val="100000"/>
         </a:lnSpc>
@@ -6181,7 +6283,7 @@
           <a:srgbClr val="000000"/>
         </a:buClr>
         <a:buFont typeface="Arial"/>
-        <a:defRPr b="0" i="0" sz="1400" u="none" cap="none" strike="noStrike">
+        <a:defRPr sz="1400" b="0" i="0" u="none" strike="noStrike" cap="none">
           <a:solidFill>
             <a:srgbClr val="000000"/>
           </a:solidFill>
@@ -6191,7 +6293,7 @@
           <a:sym typeface="Arial"/>
         </a:defRPr>
       </a:lvl2pPr>
-      <a:lvl3pPr lvl="2" marR="0" rtl="0" algn="l">
+      <a:lvl3pPr marR="0" lvl="2" algn="l" rtl="0">
         <a:lnSpc>
           <a:spcPct val="100000"/>
         </a:lnSpc>
@@ -6205,7 +6307,7 @@
           <a:srgbClr val="000000"/>
         </a:buClr>
         <a:buFont typeface="Arial"/>
-        <a:defRPr b="0" i="0" sz="1400" u="none" cap="none" strike="noStrike">
+        <a:defRPr sz="1400" b="0" i="0" u="none" strike="noStrike" cap="none">
           <a:solidFill>
             <a:srgbClr val="000000"/>
           </a:solidFill>
@@ -6215,7 +6317,7 @@
           <a:sym typeface="Arial"/>
         </a:defRPr>
       </a:lvl3pPr>
-      <a:lvl4pPr lvl="3" marR="0" rtl="0" algn="l">
+      <a:lvl4pPr marR="0" lvl="3" algn="l" rtl="0">
         <a:lnSpc>
           <a:spcPct val="100000"/>
         </a:lnSpc>
@@ -6229,7 +6331,7 @@
           <a:srgbClr val="000000"/>
         </a:buClr>
         <a:buFont typeface="Arial"/>
-        <a:defRPr b="0" i="0" sz="1400" u="none" cap="none" strike="noStrike">
+        <a:defRPr sz="1400" b="0" i="0" u="none" strike="noStrike" cap="none">
           <a:solidFill>
             <a:srgbClr val="000000"/>
           </a:solidFill>
@@ -6239,7 +6341,7 @@
           <a:sym typeface="Arial"/>
         </a:defRPr>
       </a:lvl4pPr>
-      <a:lvl5pPr lvl="4" marR="0" rtl="0" algn="l">
+      <a:lvl5pPr marR="0" lvl="4" algn="l" rtl="0">
         <a:lnSpc>
           <a:spcPct val="100000"/>
         </a:lnSpc>
@@ -6253,7 +6355,7 @@
           <a:srgbClr val="000000"/>
         </a:buClr>
         <a:buFont typeface="Arial"/>
-        <a:defRPr b="0" i="0" sz="1400" u="none" cap="none" strike="noStrike">
+        <a:defRPr sz="1400" b="0" i="0" u="none" strike="noStrike" cap="none">
           <a:solidFill>
             <a:srgbClr val="000000"/>
           </a:solidFill>
@@ -6263,7 +6365,7 @@
           <a:sym typeface="Arial"/>
         </a:defRPr>
       </a:lvl5pPr>
-      <a:lvl6pPr lvl="5" marR="0" rtl="0" algn="l">
+      <a:lvl6pPr marR="0" lvl="5" algn="l" rtl="0">
         <a:lnSpc>
           <a:spcPct val="100000"/>
         </a:lnSpc>
@@ -6277,7 +6379,7 @@
           <a:srgbClr val="000000"/>
         </a:buClr>
         <a:buFont typeface="Arial"/>
-        <a:defRPr b="0" i="0" sz="1400" u="none" cap="none" strike="noStrike">
+        <a:defRPr sz="1400" b="0" i="0" u="none" strike="noStrike" cap="none">
           <a:solidFill>
             <a:srgbClr val="000000"/>
           </a:solidFill>
@@ -6287,7 +6389,7 @@
           <a:sym typeface="Arial"/>
         </a:defRPr>
       </a:lvl6pPr>
-      <a:lvl7pPr lvl="6" marR="0" rtl="0" algn="l">
+      <a:lvl7pPr marR="0" lvl="6" algn="l" rtl="0">
         <a:lnSpc>
           <a:spcPct val="100000"/>
         </a:lnSpc>
@@ -6301,7 +6403,7 @@
           <a:srgbClr val="000000"/>
         </a:buClr>
         <a:buFont typeface="Arial"/>
-        <a:defRPr b="0" i="0" sz="1400" u="none" cap="none" strike="noStrike">
+        <a:defRPr sz="1400" b="0" i="0" u="none" strike="noStrike" cap="none">
           <a:solidFill>
             <a:srgbClr val="000000"/>
           </a:solidFill>
@@ -6311,7 +6413,7 @@
           <a:sym typeface="Arial"/>
         </a:defRPr>
       </a:lvl7pPr>
-      <a:lvl8pPr lvl="7" marR="0" rtl="0" algn="l">
+      <a:lvl8pPr marR="0" lvl="7" algn="l" rtl="0">
         <a:lnSpc>
           <a:spcPct val="100000"/>
         </a:lnSpc>
@@ -6325,7 +6427,7 @@
           <a:srgbClr val="000000"/>
         </a:buClr>
         <a:buFont typeface="Arial"/>
-        <a:defRPr b="0" i="0" sz="1400" u="none" cap="none" strike="noStrike">
+        <a:defRPr sz="1400" b="0" i="0" u="none" strike="noStrike" cap="none">
           <a:solidFill>
             <a:srgbClr val="000000"/>
           </a:solidFill>
@@ -6335,7 +6437,7 @@
           <a:sym typeface="Arial"/>
         </a:defRPr>
       </a:lvl8pPr>
-      <a:lvl9pPr lvl="8" marR="0" rtl="0" algn="l">
+      <a:lvl9pPr marR="0" lvl="8" algn="l" rtl="0">
         <a:lnSpc>
           <a:spcPct val="100000"/>
         </a:lnSpc>
@@ -6349,7 +6451,7 @@
           <a:srgbClr val="000000"/>
         </a:buClr>
         <a:buFont typeface="Arial"/>
-        <a:defRPr b="0" i="0" sz="1400" u="none" cap="none" strike="noStrike">
+        <a:defRPr sz="1400" b="0" i="0" u="none" strike="noStrike" cap="none">
           <a:solidFill>
             <a:srgbClr val="000000"/>
           </a:solidFill>
@@ -6361,7 +6463,7 @@
       </a:lvl9pPr>
     </p:bodyStyle>
     <p:otherStyle>
-      <a:defPPr lvl="0" marR="0" rtl="0" algn="l">
+      <a:defPPr marR="0" lvl="0" algn="l" rtl="0">
         <a:lnSpc>
           <a:spcPct val="100000"/>
         </a:lnSpc>
@@ -6372,7 +6474,7 @@
           <a:spcPts val="0"/>
         </a:spcAft>
       </a:defPPr>
-      <a:lvl1pPr lvl="0" marR="0" rtl="0" algn="l">
+      <a:lvl1pPr marR="0" lvl="0" algn="l" rtl="0">
         <a:lnSpc>
           <a:spcPct val="100000"/>
         </a:lnSpc>
@@ -6386,7 +6488,7 @@
           <a:srgbClr val="000000"/>
         </a:buClr>
         <a:buFont typeface="Arial"/>
-        <a:defRPr b="0" i="0" sz="1400" u="none" cap="none" strike="noStrike">
+        <a:defRPr sz="1400" b="0" i="0" u="none" strike="noStrike" cap="none">
           <a:solidFill>
             <a:srgbClr val="000000"/>
           </a:solidFill>
@@ -6396,7 +6498,7 @@
           <a:sym typeface="Arial"/>
         </a:defRPr>
       </a:lvl1pPr>
-      <a:lvl2pPr lvl="1" marR="0" rtl="0" algn="l">
+      <a:lvl2pPr marR="0" lvl="1" algn="l" rtl="0">
         <a:lnSpc>
           <a:spcPct val="100000"/>
         </a:lnSpc>
@@ -6410,7 +6512,7 @@
           <a:srgbClr val="000000"/>
         </a:buClr>
         <a:buFont typeface="Arial"/>
-        <a:defRPr b="0" i="0" sz="1400" u="none" cap="none" strike="noStrike">
+        <a:defRPr sz="1400" b="0" i="0" u="none" strike="noStrike" cap="none">
           <a:solidFill>
             <a:srgbClr val="000000"/>
           </a:solidFill>
@@ -6420,7 +6522,7 @@
           <a:sym typeface="Arial"/>
         </a:defRPr>
       </a:lvl2pPr>
-      <a:lvl3pPr lvl="2" marR="0" rtl="0" algn="l">
+      <a:lvl3pPr marR="0" lvl="2" algn="l" rtl="0">
         <a:lnSpc>
           <a:spcPct val="100000"/>
         </a:lnSpc>
@@ -6434,7 +6536,7 @@
           <a:srgbClr val="000000"/>
         </a:buClr>
         <a:buFont typeface="Arial"/>
-        <a:defRPr b="0" i="0" sz="1400" u="none" cap="none" strike="noStrike">
+        <a:defRPr sz="1400" b="0" i="0" u="none" strike="noStrike" cap="none">
           <a:solidFill>
             <a:srgbClr val="000000"/>
           </a:solidFill>
@@ -6444,7 +6546,7 @@
           <a:sym typeface="Arial"/>
         </a:defRPr>
       </a:lvl3pPr>
-      <a:lvl4pPr lvl="3" marR="0" rtl="0" algn="l">
+      <a:lvl4pPr marR="0" lvl="3" algn="l" rtl="0">
         <a:lnSpc>
           <a:spcPct val="100000"/>
         </a:lnSpc>
@@ -6458,7 +6560,7 @@
           <a:srgbClr val="000000"/>
         </a:buClr>
         <a:buFont typeface="Arial"/>
-        <a:defRPr b="0" i="0" sz="1400" u="none" cap="none" strike="noStrike">
+        <a:defRPr sz="1400" b="0" i="0" u="none" strike="noStrike" cap="none">
           <a:solidFill>
             <a:srgbClr val="000000"/>
           </a:solidFill>
@@ -6468,7 +6570,7 @@
           <a:sym typeface="Arial"/>
         </a:defRPr>
       </a:lvl4pPr>
-      <a:lvl5pPr lvl="4" marR="0" rtl="0" algn="l">
+      <a:lvl5pPr marR="0" lvl="4" algn="l" rtl="0">
         <a:lnSpc>
           <a:spcPct val="100000"/>
         </a:lnSpc>
@@ -6482,7 +6584,7 @@
           <a:srgbClr val="000000"/>
         </a:buClr>
         <a:buFont typeface="Arial"/>
-        <a:defRPr b="0" i="0" sz="1400" u="none" cap="none" strike="noStrike">
+        <a:defRPr sz="1400" b="0" i="0" u="none" strike="noStrike" cap="none">
           <a:solidFill>
             <a:srgbClr val="000000"/>
           </a:solidFill>
@@ -6492,7 +6594,7 @@
           <a:sym typeface="Arial"/>
         </a:defRPr>
       </a:lvl5pPr>
-      <a:lvl6pPr lvl="5" marR="0" rtl="0" algn="l">
+      <a:lvl6pPr marR="0" lvl="5" algn="l" rtl="0">
         <a:lnSpc>
           <a:spcPct val="100000"/>
         </a:lnSpc>
@@ -6506,7 +6608,7 @@
           <a:srgbClr val="000000"/>
         </a:buClr>
         <a:buFont typeface="Arial"/>
-        <a:defRPr b="0" i="0" sz="1400" u="none" cap="none" strike="noStrike">
+        <a:defRPr sz="1400" b="0" i="0" u="none" strike="noStrike" cap="none">
           <a:solidFill>
             <a:srgbClr val="000000"/>
           </a:solidFill>
@@ -6516,7 +6618,7 @@
           <a:sym typeface="Arial"/>
         </a:defRPr>
       </a:lvl6pPr>
-      <a:lvl7pPr lvl="6" marR="0" rtl="0" algn="l">
+      <a:lvl7pPr marR="0" lvl="6" algn="l" rtl="0">
         <a:lnSpc>
           <a:spcPct val="100000"/>
         </a:lnSpc>
@@ -6530,7 +6632,7 @@
           <a:srgbClr val="000000"/>
         </a:buClr>
         <a:buFont typeface="Arial"/>
-        <a:defRPr b="0" i="0" sz="1400" u="none" cap="none" strike="noStrike">
+        <a:defRPr sz="1400" b="0" i="0" u="none" strike="noStrike" cap="none">
           <a:solidFill>
             <a:srgbClr val="000000"/>
           </a:solidFill>
@@ -6540,7 +6642,7 @@
           <a:sym typeface="Arial"/>
         </a:defRPr>
       </a:lvl7pPr>
-      <a:lvl8pPr lvl="7" marR="0" rtl="0" algn="l">
+      <a:lvl8pPr marR="0" lvl="7" algn="l" rtl="0">
         <a:lnSpc>
           <a:spcPct val="100000"/>
         </a:lnSpc>
@@ -6554,7 +6656,7 @@
           <a:srgbClr val="000000"/>
         </a:buClr>
         <a:buFont typeface="Arial"/>
-        <a:defRPr b="0" i="0" sz="1400" u="none" cap="none" strike="noStrike">
+        <a:defRPr sz="1400" b="0" i="0" u="none" strike="noStrike" cap="none">
           <a:solidFill>
             <a:srgbClr val="000000"/>
           </a:solidFill>
@@ -6564,7 +6666,7 @@
           <a:sym typeface="Arial"/>
         </a:defRPr>
       </a:lvl8pPr>
-      <a:lvl9pPr lvl="8" marR="0" rtl="0" algn="l">
+      <a:lvl9pPr marR="0" lvl="8" algn="l" rtl="0">
         <a:lnSpc>
           <a:spcPct val="100000"/>
         </a:lnSpc>
@@ -6578,7 +6680,7 @@
           <a:srgbClr val="000000"/>
         </a:buClr>
         <a:buFont typeface="Arial"/>
-        <a:defRPr b="0" i="0" sz="1400" u="none" cap="none" strike="noStrike">
+        <a:defRPr sz="1400" b="0" i="0" u="none" strike="noStrike" cap="none">
           <a:solidFill>
             <a:srgbClr val="000000"/>
           </a:solidFill>
@@ -6594,7 +6696,7 @@
 </file>
 
 <file path=ppt/slides/slide1.xml><?xml version="1.0" encoding="utf-8"?>
-<p:sld xmlns:a="http://schemas.openxmlformats.org/drawingml/2006/main" xmlns:p="http://schemas.openxmlformats.org/presentationml/2006/main" xmlns:r="http://schemas.openxmlformats.org/officeDocument/2006/relationships">
+<p:sld xmlns:a="http://schemas.openxmlformats.org/drawingml/2006/main" xmlns:r="http://schemas.openxmlformats.org/officeDocument/2006/relationships" xmlns:p="http://schemas.openxmlformats.org/presentationml/2006/main">
   <p:cSld>
     <p:spTree>
       <p:nvGrpSpPr>
@@ -6602,7 +6704,14 @@
         <p:cNvGrpSpPr/>
         <p:nvPr/>
       </p:nvGrpSpPr>
-      <p:grpSpPr/>
+      <p:grpSpPr>
+        <a:xfrm>
+          <a:off x="0" y="0"/>
+          <a:ext cx="0" cy="0"/>
+          <a:chOff x="0" y="0"/>
+          <a:chExt cx="0" cy="0"/>
+        </a:xfrm>
+      </p:grpSpPr>
       <p:sp>
         <p:nvSpPr>
           <p:cNvPr id="2" name="Title 1"/>
@@ -6619,12 +6728,12 @@
           <a:lstStyle/>
           <a:p>
             <a:r>
-              <a:rPr sz="4000" b="1">
-                <a:solidFill>
-                  <a:srgbClr val="161625"/>
-                </a:solidFill>
-              </a:rPr>
-              <a:t>Clase 2 · NLP &amp; Searching</a:t>
+              <a:rPr sz="4000" b="1" dirty="0">
+                <a:solidFill>
+                  <a:schemeClr val="bg1"/>
+                </a:solidFill>
+              </a:rPr>
+              <a:t>Clase 1 · NLP &amp; Searching</a:t>
             </a:r>
           </a:p>
         </p:txBody>
@@ -6645,12 +6754,52 @@
           <a:lstStyle/>
           <a:p>
             <a:r>
-              <a:rPr sz="2000" b="1">
+              <a:rPr sz="2000" b="1" dirty="0" err="1">
                 <a:solidFill>
                   <a:srgbClr val="FF743B"/>
                 </a:solidFill>
               </a:rPr>
-              <a:t>Matching, visualización, NER y representación · 4h</a:t>
+              <a:t>Preprocesado</a:t>
+            </a:r>
+            <a:r>
+              <a:rPr sz="2000" b="1" dirty="0">
+                <a:solidFill>
+                  <a:srgbClr val="FF743B"/>
+                </a:solidFill>
+              </a:rPr>
+              <a:t> y </a:t>
+            </a:r>
+            <a:r>
+              <a:rPr sz="2000" b="1" dirty="0" err="1">
+                <a:solidFill>
+                  <a:srgbClr val="FF743B"/>
+                </a:solidFill>
+              </a:rPr>
+              <a:t>limpieza</a:t>
+            </a:r>
+            <a:r>
+              <a:rPr sz="2000" b="1" dirty="0">
+                <a:solidFill>
+                  <a:srgbClr val="FF743B"/>
+                </a:solidFill>
+              </a:rPr>
+              <a:t> de </a:t>
+            </a:r>
+            <a:r>
+              <a:rPr sz="2000" b="1" dirty="0" err="1">
+                <a:solidFill>
+                  <a:srgbClr val="FF743B"/>
+                </a:solidFill>
+              </a:rPr>
+              <a:t>texto</a:t>
+            </a:r>
+            <a:r>
+              <a:rPr sz="2000" b="1" dirty="0">
+                <a:solidFill>
+                  <a:srgbClr val="FF743B"/>
+                </a:solidFill>
+              </a:rPr>
+              <a:t> · 4h</a:t>
             </a:r>
           </a:p>
         </p:txBody>
@@ -6664,7 +6813,7 @@
 </file>
 
 <file path=ppt/slides/slide10.xml><?xml version="1.0" encoding="utf-8"?>
-<p:sld xmlns:a="http://schemas.openxmlformats.org/drawingml/2006/main" xmlns:p="http://schemas.openxmlformats.org/presentationml/2006/main" xmlns:r="http://schemas.openxmlformats.org/officeDocument/2006/relationships">
+<p:sld xmlns:a="http://schemas.openxmlformats.org/drawingml/2006/main" xmlns:r="http://schemas.openxmlformats.org/officeDocument/2006/relationships" xmlns:p="http://schemas.openxmlformats.org/presentationml/2006/main">
   <p:cSld>
     <p:spTree>
       <p:nvGrpSpPr>
@@ -6672,7 +6821,14 @@
         <p:cNvGrpSpPr/>
         <p:nvPr/>
       </p:nvGrpSpPr>
-      <p:grpSpPr/>
+      <p:grpSpPr>
+        <a:xfrm>
+          <a:off x="0" y="0"/>
+          <a:ext cx="0" cy="0"/>
+          <a:chOff x="0" y="0"/>
+          <a:chExt cx="0" cy="0"/>
+        </a:xfrm>
+      </p:grpSpPr>
       <p:sp>
         <p:nvSpPr>
           <p:cNvPr id="2" name="Title 1"/>
@@ -6689,12 +6845,12 @@
           <a:lstStyle/>
           <a:p>
             <a:r>
-              <a:rPr sz="2800" b="1">
+              <a:rPr sz="3600" b="1">
                 <a:solidFill>
                   <a:srgbClr val="FF743B"/>
                 </a:solidFill>
               </a:rPr>
-              <a:t>Matching fonético</a:t>
+              <a:t>Notebook 1 · Preprocesado</a:t>
             </a:r>
           </a:p>
         </p:txBody>
@@ -6711,46 +6867,222 @@
         </p:nvSpPr>
         <p:spPr/>
         <p:txBody>
-          <a:bodyPr wrap="square"/>
+          <a:bodyPr/>
           <a:lstStyle/>
           <a:p>
-            <a:pPr/>
-            <a:r>
-              <a:rPr sz="1800">
-                <a:solidFill>
-                  <a:srgbClr val="161625"/>
-                </a:solidFill>
-              </a:rPr>
-              <a:t>Soundex y Metaphone con jellyfish</a:t>
-            </a:r>
-          </a:p>
-          <a:p>
-            <a:pPr/>
-            <a:r>
-              <a:rPr sz="1800">
-                <a:solidFill>
-                  <a:srgbClr val="161625"/>
-                </a:solidFill>
-              </a:rPr>
-              <a:t>Limitación: solo funciona bien en inglés</a:t>
-            </a:r>
-          </a:p>
-          <a:p>
-            <a:pPr/>
-            <a:r>
-              <a:rPr sz="1800">
-                <a:solidFill>
-                  <a:srgbClr val="161625"/>
-                </a:solidFill>
-              </a:rPr>
-              <a:t>Caso real: motor de búsqueda de nombres en BBDD del censo</a:t>
-            </a:r>
-          </a:p>
-        </p:txBody>
-      </p:sp>
-      <p:sp>
-        <p:nvSpPr>
-          <p:cNvPr id="4" name="TextBox 3"/>
+            <a:r>
+              <a:rPr sz="2000">
+                <a:solidFill>
+                  <a:srgbClr val="161625"/>
+                </a:solidFill>
+              </a:rPr>
+              <a:t>55 min · base de todo lo que viene después</a:t>
+            </a:r>
+          </a:p>
+        </p:txBody>
+      </p:sp>
+    </p:spTree>
+  </p:cSld>
+  <p:clrMapOvr>
+    <a:masterClrMapping/>
+  </p:clrMapOvr>
+</p:sld>
+</file>
+
+<file path=ppt/slides/slide11.xml><?xml version="1.0" encoding="utf-8"?>
+<p:sld xmlns:a="http://schemas.openxmlformats.org/drawingml/2006/main" xmlns:r="http://schemas.openxmlformats.org/officeDocument/2006/relationships" xmlns:p="http://schemas.openxmlformats.org/presentationml/2006/main">
+  <p:cSld>
+    <p:spTree>
+      <p:nvGrpSpPr>
+        <p:cNvPr id="1" name=""/>
+        <p:cNvGrpSpPr/>
+        <p:nvPr/>
+      </p:nvGrpSpPr>
+      <p:grpSpPr>
+        <a:xfrm>
+          <a:off x="0" y="0"/>
+          <a:ext cx="0" cy="0"/>
+          <a:chOff x="0" y="0"/>
+          <a:chExt cx="0" cy="0"/>
+        </a:xfrm>
+      </p:grpSpPr>
+      <p:sp>
+        <p:nvSpPr>
+          <p:cNvPr id="2" name="TextBox 1"/>
+          <p:cNvSpPr txBox="1"/>
+          <p:nvPr/>
+        </p:nvSpPr>
+        <p:spPr>
+          <a:xfrm>
+            <a:off x="548640" y="365760"/>
+            <a:ext cx="8046720" cy="731520"/>
+          </a:xfrm>
+          <a:prstGeom prst="rect">
+            <a:avLst/>
+          </a:prstGeom>
+          <a:noFill/>
+        </p:spPr>
+        <p:txBody>
+          <a:bodyPr wrap="none">
+            <a:spAutoFit/>
+          </a:bodyPr>
+          <a:lstStyle/>
+          <a:p>
+            <a:r>
+              <a:rPr sz="1600" b="1">
+                <a:solidFill>
+                  <a:srgbClr val="FF743B"/>
+                </a:solidFill>
+                <a:latin typeface="Calibri"/>
+              </a:rPr>
+              <a:t>AHORA AL NOTEBOOK</a:t>
+            </a:r>
+          </a:p>
+        </p:txBody>
+      </p:sp>
+      <p:sp>
+        <p:nvSpPr>
+          <p:cNvPr id="3" name="TextBox 2"/>
+          <p:cNvSpPr txBox="1"/>
+          <p:nvPr/>
+        </p:nvSpPr>
+        <p:spPr>
+          <a:xfrm>
+            <a:off x="548640" y="914400"/>
+            <a:ext cx="8046720" cy="914400"/>
+          </a:xfrm>
+          <a:prstGeom prst="rect">
+            <a:avLst/>
+          </a:prstGeom>
+          <a:noFill/>
+        </p:spPr>
+        <p:txBody>
+          <a:bodyPr wrap="none">
+            <a:spAutoFit/>
+          </a:bodyPr>
+          <a:lstStyle/>
+          <a:p>
+            <a:r>
+              <a:rPr sz="3400" b="1">
+                <a:solidFill>
+                  <a:srgbClr val="FF743B"/>
+                </a:solidFill>
+              </a:rPr>
+              <a:t>Notebook 1 · Preprocesado</a:t>
+            </a:r>
+          </a:p>
+        </p:txBody>
+      </p:sp>
+      <p:sp>
+        <p:nvSpPr>
+          <p:cNvPr id="4" name="Rounded Rectangle 3"/>
+          <p:cNvSpPr/>
+          <p:nvPr/>
+        </p:nvSpPr>
+        <p:spPr>
+          <a:xfrm>
+            <a:off x="548640" y="1920240"/>
+            <a:ext cx="8046720" cy="640080"/>
+          </a:xfrm>
+          <a:prstGeom prst="roundRect">
+            <a:avLst/>
+          </a:prstGeom>
+          <a:solidFill>
+            <a:srgbClr val="FFECDE"/>
+          </a:solidFill>
+          <a:ln w="19050">
+            <a:solidFill>
+              <a:srgbClr val="FF743B"/>
+            </a:solidFill>
+          </a:ln>
+        </p:spPr>
+        <p:style>
+          <a:lnRef idx="1">
+            <a:schemeClr val="accent1"/>
+          </a:lnRef>
+          <a:fillRef idx="3">
+            <a:schemeClr val="accent1"/>
+          </a:fillRef>
+          <a:effectRef idx="2">
+            <a:schemeClr val="accent1"/>
+          </a:effectRef>
+          <a:fontRef idx="minor">
+            <a:schemeClr val="lt1"/>
+          </a:fontRef>
+        </p:style>
+        <p:txBody>
+          <a:bodyPr lIns="182880" rIns="182880" rtlCol="0" anchor="ctr"/>
+          <a:lstStyle/>
+          <a:p>
+            <a:pPr algn="l"/>
+            <a:r>
+              <a:rPr sz="1800" b="1">
+                <a:solidFill>
+                  <a:srgbClr val="FF743B"/>
+                </a:solidFill>
+                <a:latin typeface="Consolas"/>
+              </a:rPr>
+              <a:t>▶  notebooks/01 - Preprocesado.ipynb</a:t>
+            </a:r>
+          </a:p>
+        </p:txBody>
+      </p:sp>
+      <p:sp>
+        <p:nvSpPr>
+          <p:cNvPr id="5" name="TextBox 4"/>
+          <p:cNvSpPr txBox="1"/>
+          <p:nvPr/>
+        </p:nvSpPr>
+        <p:spPr>
+          <a:xfrm>
+            <a:off x="548640" y="2743200"/>
+            <a:ext cx="8046720" cy="1828800"/>
+          </a:xfrm>
+          <a:prstGeom prst="rect">
+            <a:avLst/>
+          </a:prstGeom>
+          <a:noFill/>
+        </p:spPr>
+        <p:txBody>
+          <a:bodyPr wrap="square">
+            <a:spAutoFit/>
+          </a:bodyPr>
+          <a:lstStyle/>
+          <a:p>
+            <a:r>
+              <a:rPr sz="1600">
+                <a:solidFill>
+                  <a:srgbClr val="161625"/>
+                </a:solidFill>
+              </a:rPr>
+              <a:t>•  Si te agobia tipear, abre la versión de notebooks_explicados/</a:t>
+            </a:r>
+          </a:p>
+          <a:p>
+            <a:r>
+              <a:rPr sz="1600">
+                <a:solidFill>
+                  <a:srgbClr val="161625"/>
+                </a:solidFill>
+              </a:rPr>
+              <a:t>•  Empezamos cargando reviews_dict y mirando una review sin limpiar</a:t>
+            </a:r>
+          </a:p>
+          <a:p>
+            <a:r>
+              <a:rPr sz="1600">
+                <a:solidFill>
+                  <a:srgbClr val="161625"/>
+                </a:solidFill>
+              </a:rPr>
+              <a:t>•  Pregunta al alumnado: ¿qué problemas veis para un modelo que cuente palabras?</a:t>
+            </a:r>
+          </a:p>
+        </p:txBody>
+      </p:sp>
+      <p:sp>
+        <p:nvSpPr>
+          <p:cNvPr id="6" name="TextBox 5"/>
           <p:cNvSpPr txBox="1"/>
           <p:nvPr/>
         </p:nvSpPr>
@@ -6765,6 +7097,159 @@
           <a:noFill/>
         </p:spPr>
         <p:txBody>
+          <a:bodyPr wrap="none">
+            <a:spAutoFit/>
+          </a:bodyPr>
+          <a:lstStyle/>
+          <a:p>
+            <a:pPr algn="ctr"/>
+            <a:r>
+              <a:rPr sz="1100" i="1">
+                <a:solidFill>
+                  <a:srgbClr val="595959"/>
+                </a:solidFill>
+              </a:rPr>
+              <a:t>0:30 – 0:35</a:t>
+            </a:r>
+          </a:p>
+        </p:txBody>
+      </p:sp>
+    </p:spTree>
+  </p:cSld>
+  <p:clrMapOvr>
+    <a:masterClrMapping/>
+  </p:clrMapOvr>
+</p:sld>
+</file>
+
+<file path=ppt/slides/slide12.xml><?xml version="1.0" encoding="utf-8"?>
+<p:sld xmlns:a="http://schemas.openxmlformats.org/drawingml/2006/main" xmlns:r="http://schemas.openxmlformats.org/officeDocument/2006/relationships" xmlns:p="http://schemas.openxmlformats.org/presentationml/2006/main">
+  <p:cSld>
+    <p:spTree>
+      <p:nvGrpSpPr>
+        <p:cNvPr id="1" name=""/>
+        <p:cNvGrpSpPr/>
+        <p:nvPr/>
+      </p:nvGrpSpPr>
+      <p:grpSpPr>
+        <a:xfrm>
+          <a:off x="0" y="0"/>
+          <a:ext cx="0" cy="0"/>
+          <a:chOff x="0" y="0"/>
+          <a:chExt cx="0" cy="0"/>
+        </a:xfrm>
+      </p:grpSpPr>
+      <p:sp>
+        <p:nvSpPr>
+          <p:cNvPr id="2" name="Title 1"/>
+          <p:cNvSpPr>
+            <a:spLocks noGrp="1"/>
+          </p:cNvSpPr>
+          <p:nvPr>
+            <p:ph type="title"/>
+          </p:nvPr>
+        </p:nvSpPr>
+        <p:spPr/>
+        <p:txBody>
+          <a:bodyPr/>
+          <a:lstStyle/>
+          <a:p>
+            <a:r>
+              <a:rPr sz="2800" b="1">
+                <a:solidFill>
+                  <a:srgbClr val="FF743B"/>
+                </a:solidFill>
+              </a:rPr>
+              <a:t>Tokenización</a:t>
+            </a:r>
+          </a:p>
+        </p:txBody>
+      </p:sp>
+      <p:sp>
+        <p:nvSpPr>
+          <p:cNvPr id="3" name="Text Placeholder 2"/>
+          <p:cNvSpPr>
+            <a:spLocks noGrp="1"/>
+          </p:cNvSpPr>
+          <p:nvPr>
+            <p:ph type="body" idx="1"/>
+          </p:nvPr>
+        </p:nvSpPr>
+        <p:spPr/>
+        <p:txBody>
+          <a:bodyPr wrap="square"/>
+          <a:lstStyle/>
+          <a:p>
+            <a:r>
+              <a:rPr sz="1800">
+                <a:solidFill>
+                  <a:srgbClr val="161625"/>
+                </a:solidFill>
+              </a:rPr>
+              <a:t>review.split('.')  → frases</a:t>
+            </a:r>
+          </a:p>
+          <a:p>
+            <a:r>
+              <a:rPr sz="1800">
+                <a:solidFill>
+                  <a:srgbClr val="161625"/>
+                </a:solidFill>
+              </a:rPr>
+              <a:t>sentence.split(' ')  → palabras</a:t>
+            </a:r>
+          </a:p>
+          <a:p>
+            <a:r>
+              <a:rPr sz="1800">
+                <a:solidFill>
+                  <a:srgbClr val="161625"/>
+                </a:solidFill>
+              </a:rPr>
+              <a:t>¿Qué problemas tiene .split(' ')?</a:t>
+            </a:r>
+          </a:p>
+          <a:p>
+            <a:pPr lvl="1"/>
+            <a:r>
+              <a:rPr sz="1500">
+                <a:solidFill>
+                  <a:srgbClr val="161625"/>
+                </a:solidFill>
+              </a:rPr>
+              <a:t>'principal,'  queda como un token con coma pegada</a:t>
+            </a:r>
+          </a:p>
+          <a:p>
+            <a:pPr lvl="1"/>
+            <a:r>
+              <a:rPr sz="1500">
+                <a:solidFill>
+                  <a:srgbClr val="161625"/>
+                </a:solidFill>
+              </a:rPr>
+              <a:t>'   '.split(' ')  → tokens vacíos</a:t>
+            </a:r>
+          </a:p>
+        </p:txBody>
+      </p:sp>
+      <p:sp>
+        <p:nvSpPr>
+          <p:cNvPr id="4" name="TextBox 3"/>
+          <p:cNvSpPr txBox="1"/>
+          <p:nvPr/>
+        </p:nvSpPr>
+        <p:spPr>
+          <a:xfrm>
+            <a:off x="7315200" y="164592"/>
+            <a:ext cx="1737360" cy="320040"/>
+          </a:xfrm>
+          <a:prstGeom prst="rect">
+            <a:avLst/>
+          </a:prstGeom>
+          <a:noFill/>
+        </p:spPr>
+        <p:txBody>
           <a:bodyPr wrap="none" lIns="0" rIns="0">
             <a:spAutoFit/>
           </a:bodyPr>
@@ -6777,7 +7262,7 @@
                   <a:srgbClr val="595959"/>
                 </a:solidFill>
               </a:rPr>
-              <a:t>0:50 – 1:00</a:t>
+              <a:t>0:35 – 0:45</a:t>
             </a:r>
           </a:p>
         </p:txBody>
@@ -6820,7 +7305,7 @@
           </a:fontRef>
         </p:style>
         <p:txBody>
-          <a:bodyPr rtlCol="0" anchor="ctr" lIns="137160" rIns="137160" tIns="36576" bIns="36576"/>
+          <a:bodyPr lIns="137160" tIns="36576" rIns="137160" bIns="36576" rtlCol="0" anchor="ctr"/>
           <a:lstStyle/>
           <a:p>
             <a:pPr algn="l"/>
@@ -6830,7 +7315,7 @@
                   <a:srgbClr val="FF743B"/>
                 </a:solidFill>
               </a:rPr>
-              <a:t>▶  NOTEBOOK: 05 - Matching.ipynb</a:t>
+              <a:t>▶  NOTEBOOK: 01 - Preprocesado.ipynb</a:t>
             </a:r>
           </a:p>
         </p:txBody>
@@ -6843,8 +7328,8 @@
 </p:sld>
 </file>
 
-<file path=ppt/slides/slide11.xml><?xml version="1.0" encoding="utf-8"?>
-<p:sld xmlns:a="http://schemas.openxmlformats.org/drawingml/2006/main" xmlns:p="http://schemas.openxmlformats.org/presentationml/2006/main" xmlns:r="http://schemas.openxmlformats.org/officeDocument/2006/relationships">
+<file path=ppt/slides/slide13.xml><?xml version="1.0" encoding="utf-8"?>
+<p:sld xmlns:a="http://schemas.openxmlformats.org/drawingml/2006/main" xmlns:r="http://schemas.openxmlformats.org/officeDocument/2006/relationships" xmlns:p="http://schemas.openxmlformats.org/presentationml/2006/main">
   <p:cSld>
     <p:spTree>
       <p:nvGrpSpPr>
@@ -6852,7 +7337,14 @@
         <p:cNvGrpSpPr/>
         <p:nvPr/>
       </p:nvGrpSpPr>
-      <p:grpSpPr/>
+      <p:grpSpPr>
+        <a:xfrm>
+          <a:off x="0" y="0"/>
+          <a:ext cx="0" cy="0"/>
+          <a:chOff x="0" y="0"/>
+          <a:chExt cx="0" cy="0"/>
+        </a:xfrm>
+      </p:grpSpPr>
       <p:sp>
         <p:nvSpPr>
           <p:cNvPr id="2" name="Title 1"/>
@@ -6874,7 +7366,7 @@
                   <a:srgbClr val="FF743B"/>
                 </a:solidFill>
               </a:rPr>
-              <a:t>Aplicación: autocompletado tolerante a typos</a:t>
+              <a:t>Normalización</a:t>
             </a:r>
           </a:p>
         </p:txBody>
@@ -6894,25 +7386,33 @@
           <a:bodyPr wrap="square"/>
           <a:lstStyle/>
           <a:p>
-            <a:pPr/>
             <a:r>
               <a:rPr sz="1800">
                 <a:solidFill>
                   <a:srgbClr val="161625"/>
                 </a:solidFill>
               </a:rPr>
-              <a:t>Construir el autocompletador de títulos de películas en directo</a:t>
-            </a:r>
-          </a:p>
-          <a:p>
-            <a:pPr/>
+              <a:t>lower, strip, regex, translate</a:t>
+            </a:r>
+          </a:p>
+          <a:p>
             <a:r>
               <a:rPr sz="1800">
                 <a:solidFill>
                   <a:srgbClr val="161625"/>
                 </a:solidFill>
               </a:rPr>
-              <a:t>Mezclar prefix exacto + Jaro-Winkler</a:t>
+              <a:t>Concepto clave: str.maketrans + .translate() es mucho más rápido que un bucle con replace</a:t>
+            </a:r>
+          </a:p>
+          <a:p>
+            <a:r>
+              <a:rPr sz="1800">
+                <a:solidFill>
+                  <a:srgbClr val="161625"/>
+                </a:solidFill>
+              </a:rPr>
+              <a:t>Con 100k reviews, la diferencia se nota</a:t>
             </a:r>
           </a:p>
           <a:p>
@@ -6923,7 +7423,7 @@
                   <a:srgbClr val="161625"/>
                 </a:solidFill>
               </a:rPr>
-              <a:t>💡 Demo: 'el padrno', 'harri potter', 'tarrent'</a:t>
+              <a:t>💡 Demo viva: %timeit translate vs replace en bucle</a:t>
             </a:r>
           </a:p>
         </p:txBody>
@@ -6957,7 +7457,7 @@
                   <a:srgbClr val="595959"/>
                 </a:solidFill>
               </a:rPr>
-              <a:t>1:00 – 1:20</a:t>
+              <a:t>0:45 – 1:00</a:t>
             </a:r>
           </a:p>
         </p:txBody>
@@ -7000,7 +7500,7 @@
           </a:fontRef>
         </p:style>
         <p:txBody>
-          <a:bodyPr rtlCol="0" anchor="ctr" lIns="137160" rIns="137160" tIns="36576" bIns="36576"/>
+          <a:bodyPr lIns="137160" tIns="36576" rIns="137160" bIns="36576" rtlCol="0" anchor="ctr"/>
           <a:lstStyle/>
           <a:p>
             <a:pPr algn="l"/>
@@ -7010,129 +7510,7 @@
                   <a:srgbClr val="FF743B"/>
                 </a:solidFill>
               </a:rPr>
-              <a:t>▶  NOTEBOOK: 05 - Matching.ipynb</a:t>
-            </a:r>
-          </a:p>
-        </p:txBody>
-      </p:sp>
-    </p:spTree>
-  </p:cSld>
-  <p:clrMapOvr>
-    <a:masterClrMapping/>
-  </p:clrMapOvr>
-</p:sld>
-</file>
-
-<file path=ppt/slides/slide12.xml><?xml version="1.0" encoding="utf-8"?>
-<p:sld xmlns:a="http://schemas.openxmlformats.org/drawingml/2006/main" xmlns:p="http://schemas.openxmlformats.org/presentationml/2006/main" xmlns:r="http://schemas.openxmlformats.org/officeDocument/2006/relationships">
-  <p:cSld>
-    <p:spTree>
-      <p:nvGrpSpPr>
-        <p:cNvPr id="1" name=""/>
-        <p:cNvGrpSpPr/>
-        <p:nvPr/>
-      </p:nvGrpSpPr>
-      <p:grpSpPr/>
-      <p:sp>
-        <p:nvSpPr>
-          <p:cNvPr id="2" name="TextBox 1"/>
-          <p:cNvSpPr txBox="1"/>
-          <p:nvPr/>
-        </p:nvSpPr>
-        <p:spPr>
-          <a:xfrm>
-            <a:off x="548640" y="1645920"/>
-            <a:ext cx="8046720" cy="1371600"/>
-          </a:xfrm>
-          <a:prstGeom prst="rect">
-            <a:avLst/>
-          </a:prstGeom>
-          <a:noFill/>
-        </p:spPr>
-        <p:txBody>
-          <a:bodyPr wrap="none">
-            <a:spAutoFit/>
-          </a:bodyPr>
-          <a:lstStyle/>
-          <a:p>
-            <a:pPr algn="l"/>
-            <a:r>
-              <a:rPr sz="4800" b="1">
-                <a:solidFill>
-                  <a:srgbClr val="FF743B"/>
-                </a:solidFill>
-              </a:rPr>
-              <a:t>☕  DESCANSO  ·  15 min</a:t>
-            </a:r>
-          </a:p>
-        </p:txBody>
-      </p:sp>
-    </p:spTree>
-  </p:cSld>
-  <p:clrMapOvr>
-    <a:masterClrMapping/>
-  </p:clrMapOvr>
-</p:sld>
-</file>
-
-<file path=ppt/slides/slide13.xml><?xml version="1.0" encoding="utf-8"?>
-<p:sld xmlns:a="http://schemas.openxmlformats.org/drawingml/2006/main" xmlns:p="http://schemas.openxmlformats.org/presentationml/2006/main" xmlns:r="http://schemas.openxmlformats.org/officeDocument/2006/relationships">
-  <p:cSld>
-    <p:spTree>
-      <p:nvGrpSpPr>
-        <p:cNvPr id="1" name=""/>
-        <p:cNvGrpSpPr/>
-        <p:nvPr/>
-      </p:nvGrpSpPr>
-      <p:grpSpPr/>
-      <p:sp>
-        <p:nvSpPr>
-          <p:cNvPr id="2" name="Title 1"/>
-          <p:cNvSpPr>
-            <a:spLocks noGrp="1"/>
-          </p:cNvSpPr>
-          <p:nvPr>
-            <p:ph type="title"/>
-          </p:nvPr>
-        </p:nvSpPr>
-        <p:spPr/>
-        <p:txBody>
-          <a:bodyPr/>
-          <a:lstStyle/>
-          <a:p>
-            <a:r>
-              <a:rPr sz="3600" b="1">
-                <a:solidFill>
-                  <a:srgbClr val="FF743B"/>
-                </a:solidFill>
-              </a:rPr>
-              <a:t>Notebook 6 · Visualización</a:t>
-            </a:r>
-          </a:p>
-        </p:txBody>
-      </p:sp>
-      <p:sp>
-        <p:nvSpPr>
-          <p:cNvPr id="3" name="Text Placeholder 2"/>
-          <p:cNvSpPr>
-            <a:spLocks noGrp="1"/>
-          </p:cNvSpPr>
-          <p:nvPr>
-            <p:ph type="body" idx="1"/>
-          </p:nvPr>
-        </p:nvSpPr>
-        <p:spPr/>
-        <p:txBody>
-          <a:bodyPr/>
-          <a:lstStyle/>
-          <a:p>
-            <a:r>
-              <a:rPr sz="2000">
-                <a:solidFill>
-                  <a:srgbClr val="161625"/>
-                </a:solidFill>
-              </a:rPr>
-              <a:t>45 min</a:t>
+              <a:t>▶  NOTEBOOK: 01 - Preprocesado.ipynb</a:t>
             </a:r>
           </a:p>
         </p:txBody>
@@ -7146,7 +7524,7 @@
 </file>
 
 <file path=ppt/slides/slide14.xml><?xml version="1.0" encoding="utf-8"?>
-<p:sld xmlns:a="http://schemas.openxmlformats.org/drawingml/2006/main" xmlns:p="http://schemas.openxmlformats.org/presentationml/2006/main" xmlns:r="http://schemas.openxmlformats.org/officeDocument/2006/relationships">
+<p:sld xmlns:a="http://schemas.openxmlformats.org/drawingml/2006/main" xmlns:r="http://schemas.openxmlformats.org/officeDocument/2006/relationships" xmlns:p="http://schemas.openxmlformats.org/presentationml/2006/main">
   <p:cSld>
     <p:spTree>
       <p:nvGrpSpPr>
@@ -7154,7 +7532,470 @@
         <p:cNvGrpSpPr/>
         <p:nvPr/>
       </p:nvGrpSpPr>
-      <p:grpSpPr/>
+      <p:grpSpPr>
+        <a:xfrm>
+          <a:off x="0" y="0"/>
+          <a:ext cx="0" cy="0"/>
+          <a:chOff x="0" y="0"/>
+          <a:chExt cx="0" cy="0"/>
+        </a:xfrm>
+      </p:grpSpPr>
+      <p:sp>
+        <p:nvSpPr>
+          <p:cNvPr id="2" name="Title 1"/>
+          <p:cNvSpPr>
+            <a:spLocks noGrp="1"/>
+          </p:cNvSpPr>
+          <p:nvPr>
+            <p:ph type="title"/>
+          </p:nvPr>
+        </p:nvSpPr>
+        <p:spPr/>
+        <p:txBody>
+          <a:bodyPr/>
+          <a:lstStyle/>
+          <a:p>
+            <a:r>
+              <a:rPr sz="2800" b="1">
+                <a:solidFill>
+                  <a:srgbClr val="FF743B"/>
+                </a:solidFill>
+              </a:rPr>
+              <a:t>Stopwords</a:t>
+            </a:r>
+          </a:p>
+        </p:txBody>
+      </p:sp>
+      <p:sp>
+        <p:nvSpPr>
+          <p:cNvPr id="3" name="Text Placeholder 2"/>
+          <p:cNvSpPr>
+            <a:spLocks noGrp="1"/>
+          </p:cNvSpPr>
+          <p:nvPr>
+            <p:ph type="body" idx="1"/>
+          </p:nvPr>
+        </p:nvSpPr>
+        <p:spPr/>
+        <p:txBody>
+          <a:bodyPr wrap="square"/>
+          <a:lstStyle/>
+          <a:p>
+            <a:r>
+              <a:rPr sz="1800">
+                <a:solidFill>
+                  <a:srgbClr val="161625"/>
+                </a:solidFill>
+              </a:rPr>
+              <a:t>stop_words.get_stop_words('es')</a:t>
+            </a:r>
+          </a:p>
+          <a:p>
+            <a:r>
+              <a:rPr sz="1800">
+                <a:solidFill>
+                  <a:srgbClr val="161625"/>
+                </a:solidFill>
+              </a:rPr>
+              <a:t>Aplicar a una frase y observar resultado</a:t>
+            </a:r>
+          </a:p>
+          <a:p>
+            <a:r>
+              <a:rPr sz="1800">
+                <a:solidFill>
+                  <a:srgbClr val="161625"/>
+                </a:solidFill>
+              </a:rPr>
+              <a:t>Momento estrella: 'no me gusta esta película' → 'gusta película'</a:t>
+            </a:r>
+          </a:p>
+          <a:p>
+            <a:pPr lvl="1"/>
+            <a:r>
+              <a:rPr sz="1500">
+                <a:solidFill>
+                  <a:srgbClr val="161625"/>
+                </a:solidFill>
+              </a:rPr>
+              <a:t>¿Qué le acabamos de hacer al sentimiento? El preprocesado deja de parecer trivial</a:t>
+            </a:r>
+          </a:p>
+        </p:txBody>
+      </p:sp>
+      <p:sp>
+        <p:nvSpPr>
+          <p:cNvPr id="4" name="TextBox 3"/>
+          <p:cNvSpPr txBox="1"/>
+          <p:nvPr/>
+        </p:nvSpPr>
+        <p:spPr>
+          <a:xfrm>
+            <a:off x="7315200" y="164592"/>
+            <a:ext cx="1737360" cy="320040"/>
+          </a:xfrm>
+          <a:prstGeom prst="rect">
+            <a:avLst/>
+          </a:prstGeom>
+          <a:noFill/>
+        </p:spPr>
+        <p:txBody>
+          <a:bodyPr wrap="none" lIns="0" rIns="0">
+            <a:spAutoFit/>
+          </a:bodyPr>
+          <a:lstStyle/>
+          <a:p>
+            <a:pPr algn="ctr"/>
+            <a:r>
+              <a:rPr sz="1100" i="1">
+                <a:solidFill>
+                  <a:srgbClr val="595959"/>
+                </a:solidFill>
+              </a:rPr>
+              <a:t>1:00 – 1:15</a:t>
+            </a:r>
+          </a:p>
+        </p:txBody>
+      </p:sp>
+      <p:sp>
+        <p:nvSpPr>
+          <p:cNvPr id="5" name="Rounded Rectangle 4"/>
+          <p:cNvSpPr/>
+          <p:nvPr/>
+        </p:nvSpPr>
+        <p:spPr>
+          <a:xfrm>
+            <a:off x="365760" y="4617720"/>
+            <a:ext cx="8412480" cy="411480"/>
+          </a:xfrm>
+          <a:prstGeom prst="roundRect">
+            <a:avLst/>
+          </a:prstGeom>
+          <a:solidFill>
+            <a:srgbClr val="FFECDE"/>
+          </a:solidFill>
+          <a:ln w="12700">
+            <a:solidFill>
+              <a:srgbClr val="FF743B"/>
+            </a:solidFill>
+          </a:ln>
+        </p:spPr>
+        <p:style>
+          <a:lnRef idx="1">
+            <a:schemeClr val="accent1"/>
+          </a:lnRef>
+          <a:fillRef idx="3">
+            <a:schemeClr val="accent1"/>
+          </a:fillRef>
+          <a:effectRef idx="2">
+            <a:schemeClr val="accent1"/>
+          </a:effectRef>
+          <a:fontRef idx="minor">
+            <a:schemeClr val="lt1"/>
+          </a:fontRef>
+        </p:style>
+        <p:txBody>
+          <a:bodyPr lIns="137160" tIns="36576" rIns="137160" bIns="36576" rtlCol="0" anchor="ctr"/>
+          <a:lstStyle/>
+          <a:p>
+            <a:pPr algn="l"/>
+            <a:r>
+              <a:rPr sz="1400" b="1">
+                <a:solidFill>
+                  <a:srgbClr val="FF743B"/>
+                </a:solidFill>
+              </a:rPr>
+              <a:t>▶  NOTEBOOK: 01 - Preprocesado.ipynb</a:t>
+            </a:r>
+          </a:p>
+        </p:txBody>
+      </p:sp>
+    </p:spTree>
+  </p:cSld>
+  <p:clrMapOvr>
+    <a:masterClrMapping/>
+  </p:clrMapOvr>
+</p:sld>
+</file>
+
+<file path=ppt/slides/slide15.xml><?xml version="1.0" encoding="utf-8"?>
+<p:sld xmlns:a="http://schemas.openxmlformats.org/drawingml/2006/main" xmlns:r="http://schemas.openxmlformats.org/officeDocument/2006/relationships" xmlns:p="http://schemas.openxmlformats.org/presentationml/2006/main">
+  <p:cSld>
+    <p:spTree>
+      <p:nvGrpSpPr>
+        <p:cNvPr id="1" name=""/>
+        <p:cNvGrpSpPr/>
+        <p:nvPr/>
+      </p:nvGrpSpPr>
+      <p:grpSpPr>
+        <a:xfrm>
+          <a:off x="0" y="0"/>
+          <a:ext cx="0" cy="0"/>
+          <a:chOff x="0" y="0"/>
+          <a:chExt cx="0" cy="0"/>
+        </a:xfrm>
+      </p:grpSpPr>
+      <p:sp>
+        <p:nvSpPr>
+          <p:cNvPr id="2" name="Title 1"/>
+          <p:cNvSpPr>
+            <a:spLocks noGrp="1"/>
+          </p:cNvSpPr>
+          <p:nvPr>
+            <p:ph type="title"/>
+          </p:nvPr>
+        </p:nvSpPr>
+        <p:spPr/>
+        <p:txBody>
+          <a:bodyPr/>
+          <a:lstStyle/>
+          <a:p>
+            <a:r>
+              <a:rPr sz="2800" b="1">
+                <a:solidFill>
+                  <a:srgbClr val="FF743B"/>
+                </a:solidFill>
+              </a:rPr>
+              <a:t>Lemmatization y pipeline final</a:t>
+            </a:r>
+          </a:p>
+        </p:txBody>
+      </p:sp>
+      <p:sp>
+        <p:nvSpPr>
+          <p:cNvPr id="3" name="Text Placeholder 2"/>
+          <p:cNvSpPr>
+            <a:spLocks noGrp="1"/>
+          </p:cNvSpPr>
+          <p:nvPr>
+            <p:ph type="body" idx="1"/>
+          </p:nvPr>
+        </p:nvSpPr>
+        <p:spPr/>
+        <p:txBody>
+          <a:bodyPr wrap="square"/>
+          <a:lstStyle/>
+          <a:p>
+            <a:r>
+              <a:rPr sz="1800">
+                <a:solidFill>
+                  <a:srgbClr val="161625"/>
+                </a:solidFill>
+              </a:rPr>
+              <a:t>Cargar lemmas_dict y lematizar la frase</a:t>
+            </a:r>
+          </a:p>
+          <a:p>
+            <a:r>
+              <a:rPr sz="1800">
+                <a:solidFill>
+                  <a:srgbClr val="161625"/>
+                </a:solidFill>
+              </a:rPr>
+              <a:t>El error de 'cinco' → 'cincar' (los diccionarios externos NO son perfectos)</a:t>
+            </a:r>
+          </a:p>
+          <a:p>
+            <a:r>
+              <a:rPr sz="1800">
+                <a:solidFill>
+                  <a:srgbClr val="161625"/>
+                </a:solidFill>
+              </a:rPr>
+              <a:t>Cerrar con la función text_normalizer completa</a:t>
+            </a:r>
+          </a:p>
+        </p:txBody>
+      </p:sp>
+      <p:sp>
+        <p:nvSpPr>
+          <p:cNvPr id="4" name="TextBox 3"/>
+          <p:cNvSpPr txBox="1"/>
+          <p:nvPr/>
+        </p:nvSpPr>
+        <p:spPr>
+          <a:xfrm>
+            <a:off x="7315200" y="164592"/>
+            <a:ext cx="1737360" cy="320040"/>
+          </a:xfrm>
+          <a:prstGeom prst="rect">
+            <a:avLst/>
+          </a:prstGeom>
+          <a:noFill/>
+        </p:spPr>
+        <p:txBody>
+          <a:bodyPr wrap="none" lIns="0" rIns="0">
+            <a:spAutoFit/>
+          </a:bodyPr>
+          <a:lstStyle/>
+          <a:p>
+            <a:pPr algn="ctr"/>
+            <a:r>
+              <a:rPr sz="1100" i="1">
+                <a:solidFill>
+                  <a:srgbClr val="595959"/>
+                </a:solidFill>
+              </a:rPr>
+              <a:t>1:15 – 1:25</a:t>
+            </a:r>
+          </a:p>
+        </p:txBody>
+      </p:sp>
+      <p:sp>
+        <p:nvSpPr>
+          <p:cNvPr id="5" name="Rounded Rectangle 4"/>
+          <p:cNvSpPr/>
+          <p:nvPr/>
+        </p:nvSpPr>
+        <p:spPr>
+          <a:xfrm>
+            <a:off x="365760" y="4617720"/>
+            <a:ext cx="8412480" cy="411480"/>
+          </a:xfrm>
+          <a:prstGeom prst="roundRect">
+            <a:avLst/>
+          </a:prstGeom>
+          <a:solidFill>
+            <a:srgbClr val="FFECDE"/>
+          </a:solidFill>
+          <a:ln w="12700">
+            <a:solidFill>
+              <a:srgbClr val="FF743B"/>
+            </a:solidFill>
+          </a:ln>
+        </p:spPr>
+        <p:style>
+          <a:lnRef idx="1">
+            <a:schemeClr val="accent1"/>
+          </a:lnRef>
+          <a:fillRef idx="3">
+            <a:schemeClr val="accent1"/>
+          </a:fillRef>
+          <a:effectRef idx="2">
+            <a:schemeClr val="accent1"/>
+          </a:effectRef>
+          <a:fontRef idx="minor">
+            <a:schemeClr val="lt1"/>
+          </a:fontRef>
+        </p:style>
+        <p:txBody>
+          <a:bodyPr lIns="137160" tIns="36576" rIns="137160" bIns="36576" rtlCol="0" anchor="ctr"/>
+          <a:lstStyle/>
+          <a:p>
+            <a:pPr algn="l"/>
+            <a:r>
+              <a:rPr sz="1400" b="1">
+                <a:solidFill>
+                  <a:srgbClr val="FF743B"/>
+                </a:solidFill>
+              </a:rPr>
+              <a:t>▶  NOTEBOOK: 01 - Preprocesado.ipynb</a:t>
+            </a:r>
+          </a:p>
+        </p:txBody>
+      </p:sp>
+    </p:spTree>
+  </p:cSld>
+  <p:clrMapOvr>
+    <a:masterClrMapping/>
+  </p:clrMapOvr>
+</p:sld>
+</file>
+
+<file path=ppt/slides/slide16.xml><?xml version="1.0" encoding="utf-8"?>
+<p:sld xmlns:a="http://schemas.openxmlformats.org/drawingml/2006/main" xmlns:r="http://schemas.openxmlformats.org/officeDocument/2006/relationships" xmlns:p="http://schemas.openxmlformats.org/presentationml/2006/main">
+  <p:cSld>
+    <p:spTree>
+      <p:nvGrpSpPr>
+        <p:cNvPr id="1" name=""/>
+        <p:cNvGrpSpPr/>
+        <p:nvPr/>
+      </p:nvGrpSpPr>
+      <p:grpSpPr>
+        <a:xfrm>
+          <a:off x="0" y="0"/>
+          <a:ext cx="0" cy="0"/>
+          <a:chOff x="0" y="0"/>
+          <a:chExt cx="0" cy="0"/>
+        </a:xfrm>
+      </p:grpSpPr>
+      <p:sp>
+        <p:nvSpPr>
+          <p:cNvPr id="2" name="Title 1"/>
+          <p:cNvSpPr>
+            <a:spLocks noGrp="1"/>
+          </p:cNvSpPr>
+          <p:nvPr>
+            <p:ph type="title"/>
+          </p:nvPr>
+        </p:nvSpPr>
+        <p:spPr/>
+        <p:txBody>
+          <a:bodyPr/>
+          <a:lstStyle/>
+          <a:p>
+            <a:r>
+              <a:rPr sz="3600" b="1">
+                <a:solidFill>
+                  <a:srgbClr val="FF743B"/>
+                </a:solidFill>
+              </a:rPr>
+              <a:t>Notebook 2 · spaCy</a:t>
+            </a:r>
+          </a:p>
+        </p:txBody>
+      </p:sp>
+      <p:sp>
+        <p:nvSpPr>
+          <p:cNvPr id="3" name="Text Placeholder 2"/>
+          <p:cNvSpPr>
+            <a:spLocks noGrp="1"/>
+          </p:cNvSpPr>
+          <p:nvPr>
+            <p:ph type="body" idx="1"/>
+          </p:nvPr>
+        </p:nvSpPr>
+        <p:spPr/>
+        <p:txBody>
+          <a:bodyPr/>
+          <a:lstStyle/>
+          <a:p>
+            <a:r>
+              <a:rPr sz="2000">
+                <a:solidFill>
+                  <a:srgbClr val="161625"/>
+                </a:solidFill>
+              </a:rPr>
+              <a:t>45 min · la herramienta industrial</a:t>
+            </a:r>
+          </a:p>
+        </p:txBody>
+      </p:sp>
+    </p:spTree>
+  </p:cSld>
+  <p:clrMapOvr>
+    <a:masterClrMapping/>
+  </p:clrMapOvr>
+</p:sld>
+</file>
+
+<file path=ppt/slides/slide17.xml><?xml version="1.0" encoding="utf-8"?>
+<p:sld xmlns:a="http://schemas.openxmlformats.org/drawingml/2006/main" xmlns:r="http://schemas.openxmlformats.org/officeDocument/2006/relationships" xmlns:p="http://schemas.openxmlformats.org/presentationml/2006/main">
+  <p:cSld>
+    <p:spTree>
+      <p:nvGrpSpPr>
+        <p:cNvPr id="1" name=""/>
+        <p:cNvGrpSpPr/>
+        <p:nvPr/>
+      </p:nvGrpSpPr>
+      <p:grpSpPr>
+        <a:xfrm>
+          <a:off x="0" y="0"/>
+          <a:ext cx="0" cy="0"/>
+          <a:chOff x="0" y="0"/>
+          <a:chExt cx="0" cy="0"/>
+        </a:xfrm>
+      </p:grpSpPr>
       <p:sp>
         <p:nvSpPr>
           <p:cNvPr id="2" name="TextBox 1"/>
@@ -7217,7 +8058,7 @@
                   <a:srgbClr val="FF743B"/>
                 </a:solidFill>
               </a:rPr>
-              <a:t>Notebook 6 · Visualization</a:t>
+              <a:t>Notebook 2 · spaCy</a:t>
             </a:r>
           </a:p>
         </p:txBody>
@@ -7260,7 +8101,7 @@
           </a:fontRef>
         </p:style>
         <p:txBody>
-          <a:bodyPr rtlCol="0" anchor="ctr" lIns="182880" rIns="182880"/>
+          <a:bodyPr lIns="182880" rIns="182880" rtlCol="0" anchor="ctr"/>
           <a:lstStyle/>
           <a:p>
             <a:pPr algn="l"/>
@@ -7271,7 +8112,7 @@
                 </a:solidFill>
                 <a:latin typeface="Consolas"/>
               </a:rPr>
-              <a:t>▶  notebooks/06 - Visualization.ipynb</a:t>
+              <a:t>▶  notebooks/02 - Spacy.ipynb</a:t>
             </a:r>
           </a:p>
         </p:txBody>
@@ -7304,7 +8145,7 @@
                   <a:srgbClr val="161625"/>
                 </a:solidFill>
               </a:rPr>
-              <a:t>•  Frecuencias y n-grams · Wordclouds · Dispersión léxica · Ley de Zipf</a:t>
+              <a:t>•  Filosofía NLTK vs spaCy: NLTK te da 5 tokenizers para que elijas; spaCy te da uno bueno y se acabó</a:t>
             </a:r>
           </a:p>
           <a:p>
@@ -7314,7 +8155,7 @@
                   <a:srgbClr val="161625"/>
                 </a:solidFill>
               </a:rPr>
-              <a:t>•  Mientras: precarga el dataset de spam y descomprime inaugural.zip</a:t>
+              <a:t>•  Herramienta que vais a usar el resto de vuestra vida en NLP profesional</a:t>
             </a:r>
           </a:p>
         </p:txBody>
@@ -7348,7 +8189,7 @@
                   <a:srgbClr val="595959"/>
                 </a:solidFill>
               </a:rPr>
-              <a:t>1:35 – 1:40</a:t>
+              <a:t>1:40 – 1:45</a:t>
             </a:r>
           </a:p>
         </p:txBody>
@@ -7361,8 +8202,8 @@
 </p:sld>
 </file>
 
-<file path=ppt/slides/slide15.xml><?xml version="1.0" encoding="utf-8"?>
-<p:sld xmlns:a="http://schemas.openxmlformats.org/drawingml/2006/main" xmlns:p="http://schemas.openxmlformats.org/presentationml/2006/main" xmlns:r="http://schemas.openxmlformats.org/officeDocument/2006/relationships">
+<file path=ppt/slides/slide18.xml><?xml version="1.0" encoding="utf-8"?>
+<p:sld xmlns:a="http://schemas.openxmlformats.org/drawingml/2006/main" xmlns:r="http://schemas.openxmlformats.org/officeDocument/2006/relationships" xmlns:p="http://schemas.openxmlformats.org/presentationml/2006/main">
   <p:cSld>
     <p:spTree>
       <p:nvGrpSpPr>
@@ -7370,7 +8211,14 @@
         <p:cNvGrpSpPr/>
         <p:nvPr/>
       </p:nvGrpSpPr>
-      <p:grpSpPr/>
+      <p:grpSpPr>
+        <a:xfrm>
+          <a:off x="0" y="0"/>
+          <a:ext cx="0" cy="0"/>
+          <a:chOff x="0" y="0"/>
+          <a:chExt cx="0" cy="0"/>
+        </a:xfrm>
+      </p:grpSpPr>
       <p:sp>
         <p:nvSpPr>
           <p:cNvPr id="2" name="Title 1"/>
@@ -7392,7 +8240,7 @@
                   <a:srgbClr val="FF743B"/>
                 </a:solidFill>
               </a:rPr>
-              <a:t>Frecuencias y n-grams</a:t>
+              <a:t>El pipeline de spaCy</a:t>
             </a:r>
           </a:p>
         </p:txBody>
@@ -7412,36 +8260,33 @@
           <a:bodyPr wrap="square"/>
           <a:lstStyle/>
           <a:p>
-            <a:pPr/>
             <a:r>
               <a:rPr sz="1800">
                 <a:solidFill>
                   <a:srgbClr val="161625"/>
                 </a:solidFill>
               </a:rPr>
-              <a:t>Counter + bar chart</a:t>
-            </a:r>
-          </a:p>
-          <a:p>
-            <a:pPr/>
+              <a:t>doc = nlp_es('Mi nombre es Cristina y vivo en Barcelona.')</a:t>
+            </a:r>
+          </a:p>
+          <a:p>
             <a:r>
               <a:rPr sz="1800">
                 <a:solidFill>
                   <a:srgbClr val="161625"/>
                 </a:solidFill>
               </a:rPr>
-              <a:t>Lo importante: filtrar stopwords ANTES del gráfico</a:t>
-            </a:r>
-          </a:p>
-          <a:p>
-            <a:pPr/>
+              <a:t>Iterar tokens y mostrar: .text, .lemma_, .pos_, .dep_, .is_stop</a:t>
+            </a:r>
+          </a:p>
+          <a:p>
             <a:r>
               <a:rPr sz="1800">
                 <a:solidFill>
                   <a:srgbClr val="161625"/>
                 </a:solidFill>
               </a:rPr>
-              <a:t>Bigrams sin stopwords → mucho más informativos</a:t>
+              <a:t>En UNA sola pasada tienes TODO  ← esto es lo industrial</a:t>
             </a:r>
           </a:p>
         </p:txBody>
@@ -7475,7 +8320,7 @@
                   <a:srgbClr val="595959"/>
                 </a:solidFill>
               </a:rPr>
-              <a:t>1:35 – 1:45</a:t>
+              <a:t>1:45 – 1:55</a:t>
             </a:r>
           </a:p>
         </p:txBody>
@@ -7518,7 +8363,7 @@
           </a:fontRef>
         </p:style>
         <p:txBody>
-          <a:bodyPr rtlCol="0" anchor="ctr" lIns="137160" rIns="137160" tIns="36576" bIns="36576"/>
+          <a:bodyPr lIns="137160" tIns="36576" rIns="137160" bIns="36576" rtlCol="0" anchor="ctr"/>
           <a:lstStyle/>
           <a:p>
             <a:pPr algn="l"/>
@@ -7528,7 +8373,7 @@
                   <a:srgbClr val="FF743B"/>
                 </a:solidFill>
               </a:rPr>
-              <a:t>▶  NOTEBOOK: 06 - Visualization.ipynb</a:t>
+              <a:t>▶  NOTEBOOK: 02 - Spacy.ipynb</a:t>
             </a:r>
           </a:p>
         </p:txBody>
@@ -7541,8 +8386,8 @@
 </p:sld>
 </file>
 
-<file path=ppt/slides/slide16.xml><?xml version="1.0" encoding="utf-8"?>
-<p:sld xmlns:a="http://schemas.openxmlformats.org/drawingml/2006/main" xmlns:p="http://schemas.openxmlformats.org/presentationml/2006/main" xmlns:r="http://schemas.openxmlformats.org/officeDocument/2006/relationships">
+<file path=ppt/slides/slide19.xml><?xml version="1.0" encoding="utf-8"?>
+<p:sld xmlns:a="http://schemas.openxmlformats.org/drawingml/2006/main" xmlns:r="http://schemas.openxmlformats.org/officeDocument/2006/relationships" xmlns:p="http://schemas.openxmlformats.org/presentationml/2006/main">
   <p:cSld>
     <p:spTree>
       <p:nvGrpSpPr>
@@ -7550,7 +8395,14 @@
         <p:cNvGrpSpPr/>
         <p:nvPr/>
       </p:nvGrpSpPr>
-      <p:grpSpPr/>
+      <p:grpSpPr>
+        <a:xfrm>
+          <a:off x="0" y="0"/>
+          <a:ext cx="0" cy="0"/>
+          <a:chOff x="0" y="0"/>
+          <a:chExt cx="0" cy="0"/>
+        </a:xfrm>
+      </p:grpSpPr>
       <p:sp>
         <p:nvSpPr>
           <p:cNvPr id="2" name="Title 1"/>
@@ -7572,7 +8424,7 @@
                   <a:srgbClr val="FF743B"/>
                 </a:solidFill>
               </a:rPr>
-              <a:t>Wordclouds</a:t>
+              <a:t>POS tags y dependencias</a:t>
             </a:r>
           </a:p>
         </p:txBody>
@@ -7592,14 +8444,23 @@
           <a:bodyPr wrap="square"/>
           <a:lstStyle/>
           <a:p>
-            <a:pPr/>
             <a:r>
               <a:rPr sz="1800">
                 <a:solidFill>
                   <a:srgbClr val="161625"/>
                 </a:solidFill>
               </a:rPr>
-              <a:t>Librería wordcloud</a:t>
+              <a:t>Tabla de POS tags universales</a:t>
+            </a:r>
+          </a:p>
+          <a:p>
+            <a:r>
+              <a:rPr sz="1800">
+                <a:solidFill>
+                  <a:srgbClr val="161625"/>
+                </a:solidFill>
+              </a:rPr>
+              <a:t>displacy.render(doc, style='dep', jupyter=True)  ← muy visual</a:t>
             </a:r>
           </a:p>
           <a:p>
@@ -7610,7 +8471,7 @@
                   <a:srgbClr val="161625"/>
                 </a:solidFill>
               </a:rPr>
-              <a:t>💡 Cuidado: las wordclouds son bonitas pero NO cuantitativas</a:t>
+              <a:t>💡 En producción: extracción de relaciones para grafos de conocimiento</a:t>
             </a:r>
           </a:p>
         </p:txBody>
@@ -7644,7 +8505,7 @@
                   <a:srgbClr val="595959"/>
                 </a:solidFill>
               </a:rPr>
-              <a:t>1:45 – 1:55</a:t>
+              <a:t>1:55 – 2:05</a:t>
             </a:r>
           </a:p>
         </p:txBody>
@@ -7687,7 +8548,7 @@
           </a:fontRef>
         </p:style>
         <p:txBody>
-          <a:bodyPr rtlCol="0" anchor="ctr" lIns="137160" rIns="137160" tIns="36576" bIns="36576"/>
+          <a:bodyPr lIns="137160" tIns="36576" rIns="137160" bIns="36576" rtlCol="0" anchor="ctr"/>
           <a:lstStyle/>
           <a:p>
             <a:pPr algn="l"/>
@@ -7697,7 +8558,7 @@
                   <a:srgbClr val="FF743B"/>
                 </a:solidFill>
               </a:rPr>
-              <a:t>▶  NOTEBOOK: 06 - Visualization.ipynb</a:t>
+              <a:t>▶  NOTEBOOK: 02 - Spacy.ipynb</a:t>
             </a:r>
           </a:p>
         </p:txBody>
@@ -7710,8 +8571,8 @@
 </p:sld>
 </file>
 
-<file path=ppt/slides/slide17.xml><?xml version="1.0" encoding="utf-8"?>
-<p:sld xmlns:a="http://schemas.openxmlformats.org/drawingml/2006/main" xmlns:p="http://schemas.openxmlformats.org/presentationml/2006/main" xmlns:r="http://schemas.openxmlformats.org/officeDocument/2006/relationships">
+<file path=ppt/slides/slide2.xml><?xml version="1.0" encoding="utf-8"?>
+<p:sld xmlns:a="http://schemas.openxmlformats.org/drawingml/2006/main" xmlns:r="http://schemas.openxmlformats.org/officeDocument/2006/relationships" xmlns:p="http://schemas.openxmlformats.org/presentationml/2006/main">
   <p:cSld>
     <p:spTree>
       <p:nvGrpSpPr>
@@ -7719,7 +8580,14 @@
         <p:cNvGrpSpPr/>
         <p:nvPr/>
       </p:nvGrpSpPr>
-      <p:grpSpPr/>
+      <p:grpSpPr>
+        <a:xfrm>
+          <a:off x="0" y="0"/>
+          <a:ext cx="0" cy="0"/>
+          <a:chOff x="0" y="0"/>
+          <a:chExt cx="0" cy="0"/>
+        </a:xfrm>
+      </p:grpSpPr>
       <p:sp>
         <p:nvSpPr>
           <p:cNvPr id="2" name="Title 1"/>
@@ -7736,13 +8604,26 @@
           <a:lstStyle/>
           <a:p>
             <a:r>
-              <a:rPr sz="2800" b="1">
+              <a:rPr sz="3600" b="1" dirty="0">
                 <a:solidFill>
                   <a:srgbClr val="FF743B"/>
                 </a:solidFill>
               </a:rPr>
-              <a:t>Dispersión léxica</a:t>
-            </a:r>
+              <a:t>Agenda de la </a:t>
+            </a:r>
+            <a:r>
+              <a:rPr sz="3600" b="1" dirty="0" err="1">
+                <a:solidFill>
+                  <a:srgbClr val="FF743B"/>
+                </a:solidFill>
+              </a:rPr>
+              <a:t>clase</a:t>
+            </a:r>
+            <a:endParaRPr sz="3600" b="1" dirty="0">
+              <a:solidFill>
+                <a:srgbClr val="FF743B"/>
+              </a:solidFill>
+            </a:endParaRPr>
           </a:p>
         </p:txBody>
       </p:sp>
@@ -7758,28 +8639,142 @@
         </p:nvSpPr>
         <p:spPr/>
         <p:txBody>
+          <a:bodyPr/>
+          <a:lstStyle/>
+          <a:p>
+            <a:r>
+              <a:rPr sz="2000" dirty="0">
+                <a:solidFill>
+                  <a:srgbClr val="161625"/>
+                </a:solidFill>
+              </a:rPr>
+              <a:t>Notebooks 1 a 4 + intro al 5 · </a:t>
+            </a:r>
+            <a:r>
+              <a:rPr lang="es-ES" sz="2000" dirty="0">
+                <a:solidFill>
+                  <a:srgbClr val="161625"/>
+                </a:solidFill>
+              </a:rPr>
+              <a:t>1</a:t>
+            </a:r>
+            <a:r>
+              <a:rPr sz="2000" dirty="0">
+                <a:solidFill>
+                  <a:srgbClr val="161625"/>
+                </a:solidFill>
+              </a:rPr>
+              <a:t> </a:t>
+            </a:r>
+            <a:r>
+              <a:rPr sz="2000" dirty="0" err="1">
+                <a:solidFill>
+                  <a:srgbClr val="161625"/>
+                </a:solidFill>
+              </a:rPr>
+              <a:t>descansos</a:t>
+            </a:r>
+            <a:endParaRPr sz="2000" dirty="0">
+              <a:solidFill>
+                <a:srgbClr val="161625"/>
+              </a:solidFill>
+            </a:endParaRPr>
+          </a:p>
+        </p:txBody>
+      </p:sp>
+    </p:spTree>
+  </p:cSld>
+  <p:clrMapOvr>
+    <a:masterClrMapping/>
+  </p:clrMapOvr>
+</p:sld>
+</file>
+
+<file path=ppt/slides/slide20.xml><?xml version="1.0" encoding="utf-8"?>
+<p:sld xmlns:a="http://schemas.openxmlformats.org/drawingml/2006/main" xmlns:r="http://schemas.openxmlformats.org/officeDocument/2006/relationships" xmlns:p="http://schemas.openxmlformats.org/presentationml/2006/main">
+  <p:cSld>
+    <p:spTree>
+      <p:nvGrpSpPr>
+        <p:cNvPr id="1" name=""/>
+        <p:cNvGrpSpPr/>
+        <p:nvPr/>
+      </p:nvGrpSpPr>
+      <p:grpSpPr>
+        <a:xfrm>
+          <a:off x="0" y="0"/>
+          <a:ext cx="0" cy="0"/>
+          <a:chOff x="0" y="0"/>
+          <a:chExt cx="0" cy="0"/>
+        </a:xfrm>
+      </p:grpSpPr>
+      <p:sp>
+        <p:nvSpPr>
+          <p:cNvPr id="2" name="Title 1"/>
+          <p:cNvSpPr>
+            <a:spLocks noGrp="1"/>
+          </p:cNvSpPr>
+          <p:nvPr>
+            <p:ph type="title"/>
+          </p:nvPr>
+        </p:nvSpPr>
+        <p:spPr/>
+        <p:txBody>
+          <a:bodyPr/>
+          <a:lstStyle/>
+          <a:p>
+            <a:r>
+              <a:rPr sz="2800" b="1">
+                <a:solidFill>
+                  <a:srgbClr val="FF743B"/>
+                </a:solidFill>
+              </a:rPr>
+              <a:t>NER (Named Entity Recognition)</a:t>
+            </a:r>
+          </a:p>
+        </p:txBody>
+      </p:sp>
+      <p:sp>
+        <p:nvSpPr>
+          <p:cNvPr id="3" name="Text Placeholder 2"/>
+          <p:cNvSpPr>
+            <a:spLocks noGrp="1"/>
+          </p:cNvSpPr>
+          <p:nvPr>
+            <p:ph type="body" idx="1"/>
+          </p:nvPr>
+        </p:nvSpPr>
+        <p:spPr/>
+        <p:txBody>
           <a:bodyPr wrap="square"/>
           <a:lstStyle/>
           <a:p>
-            <a:pPr/>
             <a:r>
               <a:rPr sz="1800">
                 <a:solidFill>
                   <a:srgbClr val="161625"/>
                 </a:solidFill>
               </a:rPr>
-              <a:t>Corpus de discursos inaugurales de presidentes USA</a:t>
-            </a:r>
-          </a:p>
-          <a:p>
-            <a:pPr/>
+              <a:t>Ejemplo ES: 'Jim compró 300 acciones de Acme Corp. en 2006'</a:t>
+            </a:r>
+          </a:p>
+          <a:p>
             <a:r>
               <a:rPr sz="1800">
                 <a:solidFill>
                   <a:srgbClr val="161625"/>
                 </a:solidFill>
               </a:rPr>
-              <a:t>dispersion_plot de NLTK con: democracy, freedom, america, citizens</a:t>
+              <a:t>displacy.render(style='ent')</a:t>
+            </a:r>
+          </a:p>
+          <a:p>
+            <a:r>
+              <a:rPr sz="1800">
+                <a:solidFill>
+                  <a:srgbClr val="161625"/>
+                </a:solidFill>
+              </a:rPr>
+              <a:t>Ejemplo trampa EN: 'Paris Hilton stayed at the Hilton in Paris'</a:t>
             </a:r>
           </a:p>
           <a:p>
@@ -7790,7 +8785,7 @@
                   <a:srgbClr val="161625"/>
                 </a:solidFill>
               </a:rPr>
-              <a:t>Observación: 'democracy' aparece tardíamente en la historia</a:t>
+              <a:t>Caso real: extraer entidades de CVs, contratos, facturas</a:t>
             </a:r>
           </a:p>
         </p:txBody>
@@ -7824,7 +8819,7 @@
                   <a:srgbClr val="595959"/>
                 </a:solidFill>
               </a:rPr>
-              <a:t>1:55 – 2:10</a:t>
+              <a:t>2:05 – 2:15</a:t>
             </a:r>
           </a:p>
         </p:txBody>
@@ -7867,7 +8862,7 @@
           </a:fontRef>
         </p:style>
         <p:txBody>
-          <a:bodyPr rtlCol="0" anchor="ctr" lIns="137160" rIns="137160" tIns="36576" bIns="36576"/>
+          <a:bodyPr lIns="137160" tIns="36576" rIns="137160" bIns="36576" rtlCol="0" anchor="ctr"/>
           <a:lstStyle/>
           <a:p>
             <a:pPr algn="l"/>
@@ -7877,7 +8872,7 @@
                   <a:srgbClr val="FF743B"/>
                 </a:solidFill>
               </a:rPr>
-              <a:t>▶  NOTEBOOK: 06 - Visualization.ipynb</a:t>
+              <a:t>▶  NOTEBOOK: 02 - Spacy.ipynb</a:t>
             </a:r>
           </a:p>
         </p:txBody>
@@ -7890,8 +8885,8 @@
 </p:sld>
 </file>
 
-<file path=ppt/slides/slide18.xml><?xml version="1.0" encoding="utf-8"?>
-<p:sld xmlns:a="http://schemas.openxmlformats.org/drawingml/2006/main" xmlns:p="http://schemas.openxmlformats.org/presentationml/2006/main" xmlns:r="http://schemas.openxmlformats.org/officeDocument/2006/relationships">
+<file path=ppt/slides/slide21.xml><?xml version="1.0" encoding="utf-8"?>
+<p:sld xmlns:a="http://schemas.openxmlformats.org/drawingml/2006/main" xmlns:r="http://schemas.openxmlformats.org/officeDocument/2006/relationships" xmlns:p="http://schemas.openxmlformats.org/presentationml/2006/main">
   <p:cSld>
     <p:spTree>
       <p:nvGrpSpPr>
@@ -7899,7 +8894,14 @@
         <p:cNvGrpSpPr/>
         <p:nvPr/>
       </p:nvGrpSpPr>
-      <p:grpSpPr/>
+      <p:grpSpPr>
+        <a:xfrm>
+          <a:off x="0" y="0"/>
+          <a:ext cx="0" cy="0"/>
+          <a:chOff x="0" y="0"/>
+          <a:chExt cx="0" cy="0"/>
+        </a:xfrm>
+      </p:grpSpPr>
       <p:sp>
         <p:nvSpPr>
           <p:cNvPr id="2" name="Title 1"/>
@@ -7916,12 +8918,12 @@
           <a:lstStyle/>
           <a:p>
             <a:r>
-              <a:rPr sz="2800" b="1">
-                <a:solidFill>
-                  <a:srgbClr val="FF743B"/>
-                </a:solidFill>
-              </a:rPr>
-              <a:t>Ley de Zipf</a:t>
+              <a:rPr sz="2600" b="1">
+                <a:solidFill>
+                  <a:srgbClr val="161625"/>
+                </a:solidFill>
+              </a:rPr>
+              <a:t>NER · ejemplo en vivo</a:t>
             </a:r>
           </a:p>
         </p:txBody>
@@ -7938,46 +8940,74 @@
         </p:nvSpPr>
         <p:spPr/>
         <p:txBody>
-          <a:bodyPr wrap="square"/>
+          <a:bodyPr/>
           <a:lstStyle/>
           <a:p>
-            <a:pPr/>
-            <a:r>
-              <a:rPr sz="1800">
-                <a:solidFill>
-                  <a:srgbClr val="161625"/>
-                </a:solidFill>
-              </a:rPr>
-              <a:t>Pizarra: explicación + fórmula</a:t>
-            </a:r>
-          </a:p>
-          <a:p>
-            <a:pPr/>
-            <a:r>
-              <a:rPr sz="1800">
-                <a:solidFill>
-                  <a:srgbClr val="161625"/>
-                </a:solidFill>
-              </a:rPr>
-              <a:t>Gráfico log-log con el corpus</a:t>
-            </a:r>
-          </a:p>
-          <a:p>
-            <a:pPr lvl="1"/>
-            <a:r>
-              <a:rPr sz="1500">
-                <a:solidFill>
-                  <a:srgbClr val="161625"/>
-                </a:solidFill>
-              </a:rPr>
-              <a:t>💡 Mind-blow: funciona en cualquier idioma y dominio</a:t>
-            </a:r>
-          </a:p>
-        </p:txBody>
-      </p:sp>
-      <p:sp>
-        <p:nvSpPr>
-          <p:cNvPr id="4" name="TextBox 3"/>
+            <a:endParaRPr/>
+          </a:p>
+        </p:txBody>
+      </p:sp>
+      <p:pic>
+        <p:nvPicPr>
+          <p:cNvPr id="4" name="Picture 3" descr="02_ner_example.png"/>
+          <p:cNvPicPr>
+            <a:picLocks noChangeAspect="1"/>
+          </p:cNvPicPr>
+          <p:nvPr/>
+        </p:nvPicPr>
+        <p:blipFill>
+          <a:blip r:embed="rId2"/>
+          <a:stretch>
+            <a:fillRect/>
+          </a:stretch>
+        </p:blipFill>
+        <p:spPr>
+          <a:xfrm>
+            <a:off x="640080" y="1280160"/>
+            <a:ext cx="7863840" cy="2123738"/>
+          </a:xfrm>
+          <a:prstGeom prst="rect">
+            <a:avLst/>
+          </a:prstGeom>
+        </p:spPr>
+      </p:pic>
+      <p:sp>
+        <p:nvSpPr>
+          <p:cNvPr id="5" name="TextBox 4"/>
+          <p:cNvSpPr txBox="1"/>
+          <p:nvPr/>
+        </p:nvSpPr>
+        <p:spPr>
+          <a:xfrm>
+            <a:off x="640080" y="3495338"/>
+            <a:ext cx="7863840" cy="365760"/>
+          </a:xfrm>
+          <a:prstGeom prst="rect">
+            <a:avLst/>
+          </a:prstGeom>
+          <a:noFill/>
+        </p:spPr>
+        <p:txBody>
+          <a:bodyPr wrap="none">
+            <a:spAutoFit/>
+          </a:bodyPr>
+          <a:lstStyle/>
+          <a:p>
+            <a:pPr algn="l"/>
+            <a:r>
+              <a:rPr sz="1300" i="1">
+                <a:solidFill>
+                  <a:srgbClr val="595959"/>
+                </a:solidFill>
+              </a:rPr>
+              <a:t>Tres tipos de entidad: PER (persona), ORG (organización), DATE</a:t>
+            </a:r>
+          </a:p>
+        </p:txBody>
+      </p:sp>
+      <p:sp>
+        <p:nvSpPr>
+          <p:cNvPr id="6" name="TextBox 5"/>
           <p:cNvSpPr txBox="1"/>
           <p:nvPr/>
         </p:nvSpPr>
@@ -7992,7 +9022,7 @@
           <a:noFill/>
         </p:spPr>
         <p:txBody>
-          <a:bodyPr wrap="none" lIns="0" rIns="0">
+          <a:bodyPr wrap="none">
             <a:spAutoFit/>
           </a:bodyPr>
           <a:lstStyle/>
@@ -8004,14 +9034,14 @@
                   <a:srgbClr val="595959"/>
                 </a:solidFill>
               </a:rPr>
-              <a:t>2:10 – 2:20</a:t>
-            </a:r>
-          </a:p>
-        </p:txBody>
-      </p:sp>
-      <p:sp>
-        <p:nvSpPr>
-          <p:cNvPr id="5" name="Rounded Rectangle 4"/>
+              <a:t>2:05 – 2:15</a:t>
+            </a:r>
+          </a:p>
+        </p:txBody>
+      </p:sp>
+      <p:sp>
+        <p:nvSpPr>
+          <p:cNvPr id="7" name="Rounded Rectangle 6"/>
           <p:cNvSpPr/>
           <p:nvPr/>
         </p:nvSpPr>
@@ -8047,7 +9077,7 @@
           </a:fontRef>
         </p:style>
         <p:txBody>
-          <a:bodyPr rtlCol="0" anchor="ctr" lIns="137160" rIns="137160" tIns="36576" bIns="36576"/>
+          <a:bodyPr lIns="137160" tIns="36576" rIns="137160" bIns="36576" rtlCol="0" anchor="ctr"/>
           <a:lstStyle/>
           <a:p>
             <a:pPr algn="l"/>
@@ -8057,7 +9087,7 @@
                   <a:srgbClr val="FF743B"/>
                 </a:solidFill>
               </a:rPr>
-              <a:t>▶  NOTEBOOK: 06 - Visualization.ipynb</a:t>
+              <a:t>▶  NOTEBOOK: 02 - Spacy.ipynb</a:t>
             </a:r>
           </a:p>
         </p:txBody>
@@ -8070,8 +9100,8 @@
 </p:sld>
 </file>
 
-<file path=ppt/slides/slide19.xml><?xml version="1.0" encoding="utf-8"?>
-<p:sld xmlns:a="http://schemas.openxmlformats.org/drawingml/2006/main" xmlns:p="http://schemas.openxmlformats.org/presentationml/2006/main" xmlns:r="http://schemas.openxmlformats.org/officeDocument/2006/relationships">
+<file path=ppt/slides/slide22.xml><?xml version="1.0" encoding="utf-8"?>
+<p:sld xmlns:a="http://schemas.openxmlformats.org/drawingml/2006/main" xmlns:r="http://schemas.openxmlformats.org/officeDocument/2006/relationships" xmlns:p="http://schemas.openxmlformats.org/presentationml/2006/main">
   <p:cSld>
     <p:spTree>
       <p:nvGrpSpPr>
@@ -8079,7 +9109,14 @@
         <p:cNvGrpSpPr/>
         <p:nvPr/>
       </p:nvGrpSpPr>
-      <p:grpSpPr/>
+      <p:grpSpPr>
+        <a:xfrm>
+          <a:off x="0" y="0"/>
+          <a:ext cx="0" cy="0"/>
+          <a:chOff x="0" y="0"/>
+          <a:chExt cx="0" cy="0"/>
+        </a:xfrm>
+      </p:grpSpPr>
       <p:sp>
         <p:nvSpPr>
           <p:cNvPr id="2" name="Title 1"/>
@@ -8096,12 +9133,12 @@
           <a:lstStyle/>
           <a:p>
             <a:r>
-              <a:rPr sz="3600" b="1">
+              <a:rPr sz="2800" b="1">
                 <a:solidFill>
                   <a:srgbClr val="FF743B"/>
                 </a:solidFill>
               </a:rPr>
-              <a:t>Notebook 7 · NER con CRFs</a:t>
+              <a:t>Similitud con vectores de spaCy</a:t>
             </a:r>
           </a:p>
         </p:txBody>
@@ -8118,16 +9155,134 @@
         </p:nvSpPr>
         <p:spPr/>
         <p:txBody>
-          <a:bodyPr/>
+          <a:bodyPr wrap="square"/>
           <a:lstStyle/>
           <a:p>
             <a:r>
-              <a:rPr sz="2000">
-                <a:solidFill>
-                  <a:srgbClr val="161625"/>
-                </a:solidFill>
-              </a:rPr>
-              <a:t>45 min</a:t>
+              <a:rPr sz="1800">
+                <a:solidFill>
+                  <a:srgbClr val="161625"/>
+                </a:solidFill>
+              </a:rPr>
+              <a:t>Cargar nlp_es_md (necesita estar descargado)</a:t>
+            </a:r>
+          </a:p>
+          <a:p>
+            <a:r>
+              <a:rPr sz="1800">
+                <a:solidFill>
+                  <a:srgbClr val="161625"/>
+                </a:solidFill>
+              </a:rPr>
+              <a:t>Comparar verde / azul / mariposa</a:t>
+            </a:r>
+          </a:p>
+          <a:p>
+            <a:r>
+              <a:rPr sz="1800">
+                <a:solidFill>
+                  <a:srgbClr val="161625"/>
+                </a:solidFill>
+              </a:rPr>
+              <a:t>Mensaje clave: la similitud es DISTRIBUCIONAL, no semántica fina</a:t>
+            </a:r>
+          </a:p>
+          <a:p>
+            <a:pPr lvl="1"/>
+            <a:r>
+              <a:rPr sz="1500">
+                <a:solidFill>
+                  <a:srgbClr val="161625"/>
+                </a:solidFill>
+              </a:rPr>
+              <a:t>'bueno' y 'malo' salen cercanos. En clase 5 lo solucionamos con BERT</a:t>
+            </a:r>
+          </a:p>
+        </p:txBody>
+      </p:sp>
+      <p:sp>
+        <p:nvSpPr>
+          <p:cNvPr id="4" name="TextBox 3"/>
+          <p:cNvSpPr txBox="1"/>
+          <p:nvPr/>
+        </p:nvSpPr>
+        <p:spPr>
+          <a:xfrm>
+            <a:off x="7315200" y="164592"/>
+            <a:ext cx="1737360" cy="320040"/>
+          </a:xfrm>
+          <a:prstGeom prst="rect">
+            <a:avLst/>
+          </a:prstGeom>
+          <a:noFill/>
+        </p:spPr>
+        <p:txBody>
+          <a:bodyPr wrap="none" lIns="0" rIns="0">
+            <a:spAutoFit/>
+          </a:bodyPr>
+          <a:lstStyle/>
+          <a:p>
+            <a:pPr algn="ctr"/>
+            <a:r>
+              <a:rPr sz="1100" i="1">
+                <a:solidFill>
+                  <a:srgbClr val="595959"/>
+                </a:solidFill>
+              </a:rPr>
+              <a:t>2:15 – 2:25</a:t>
+            </a:r>
+          </a:p>
+        </p:txBody>
+      </p:sp>
+      <p:sp>
+        <p:nvSpPr>
+          <p:cNvPr id="5" name="Rounded Rectangle 4"/>
+          <p:cNvSpPr/>
+          <p:nvPr/>
+        </p:nvSpPr>
+        <p:spPr>
+          <a:xfrm>
+            <a:off x="365760" y="4617720"/>
+            <a:ext cx="8412480" cy="411480"/>
+          </a:xfrm>
+          <a:prstGeom prst="roundRect">
+            <a:avLst/>
+          </a:prstGeom>
+          <a:solidFill>
+            <a:srgbClr val="FFECDE"/>
+          </a:solidFill>
+          <a:ln w="12700">
+            <a:solidFill>
+              <a:srgbClr val="FF743B"/>
+            </a:solidFill>
+          </a:ln>
+        </p:spPr>
+        <p:style>
+          <a:lnRef idx="1">
+            <a:schemeClr val="accent1"/>
+          </a:lnRef>
+          <a:fillRef idx="3">
+            <a:schemeClr val="accent1"/>
+          </a:fillRef>
+          <a:effectRef idx="2">
+            <a:schemeClr val="accent1"/>
+          </a:effectRef>
+          <a:fontRef idx="minor">
+            <a:schemeClr val="lt1"/>
+          </a:fontRef>
+        </p:style>
+        <p:txBody>
+          <a:bodyPr lIns="137160" tIns="36576" rIns="137160" bIns="36576" rtlCol="0" anchor="ctr"/>
+          <a:lstStyle/>
+          <a:p>
+            <a:pPr algn="l"/>
+            <a:r>
+              <a:rPr sz="1400" b="1">
+                <a:solidFill>
+                  <a:srgbClr val="FF743B"/>
+                </a:solidFill>
+              </a:rPr>
+              <a:t>▶  NOTEBOOK: 02 - Spacy.ipynb</a:t>
             </a:r>
           </a:p>
         </p:txBody>
@@ -8140,8 +9295,8 @@
 </p:sld>
 </file>
 
-<file path=ppt/slides/slide2.xml><?xml version="1.0" encoding="utf-8"?>
-<p:sld xmlns:a="http://schemas.openxmlformats.org/drawingml/2006/main" xmlns:p="http://schemas.openxmlformats.org/presentationml/2006/main" xmlns:r="http://schemas.openxmlformats.org/officeDocument/2006/relationships">
+<file path=ppt/slides/slide23.xml><?xml version="1.0" encoding="utf-8"?>
+<p:sld xmlns:a="http://schemas.openxmlformats.org/drawingml/2006/main" xmlns:r="http://schemas.openxmlformats.org/officeDocument/2006/relationships" xmlns:p="http://schemas.openxmlformats.org/presentationml/2006/main">
   <p:cSld>
     <p:spTree>
       <p:nvGrpSpPr>
@@ -8149,7 +9304,14 @@
         <p:cNvGrpSpPr/>
         <p:nvPr/>
       </p:nvGrpSpPr>
-      <p:grpSpPr/>
+      <p:grpSpPr>
+        <a:xfrm>
+          <a:off x="0" y="0"/>
+          <a:ext cx="0" cy="0"/>
+          <a:chOff x="0" y="0"/>
+          <a:chExt cx="0" cy="0"/>
+        </a:xfrm>
+      </p:grpSpPr>
       <p:sp>
         <p:nvSpPr>
           <p:cNvPr id="2" name="Title 1"/>
@@ -8171,7 +9333,7 @@
                   <a:srgbClr val="FF743B"/>
                 </a:solidFill>
               </a:rPr>
-              <a:t>Agenda</a:t>
+              <a:t>Notebook 3 · NLTK</a:t>
             </a:r>
           </a:p>
         </p:txBody>
@@ -8197,7 +9359,7 @@
                   <a:srgbClr val="161625"/>
                 </a:solidFill>
               </a:rPr>
-              <a:t>Notebooks 5 (completo), 6, 7 y 8</a:t>
+              <a:t>30 min · el clásico que todavía conviene conocer</a:t>
             </a:r>
           </a:p>
         </p:txBody>
@@ -8210,8 +9372,8 @@
 </p:sld>
 </file>
 
-<file path=ppt/slides/slide20.xml><?xml version="1.0" encoding="utf-8"?>
-<p:sld xmlns:a="http://schemas.openxmlformats.org/drawingml/2006/main" xmlns:p="http://schemas.openxmlformats.org/presentationml/2006/main" xmlns:r="http://schemas.openxmlformats.org/officeDocument/2006/relationships">
+<file path=ppt/slides/slide24.xml><?xml version="1.0" encoding="utf-8"?>
+<p:sld xmlns:a="http://schemas.openxmlformats.org/drawingml/2006/main" xmlns:r="http://schemas.openxmlformats.org/officeDocument/2006/relationships" xmlns:p="http://schemas.openxmlformats.org/presentationml/2006/main">
   <p:cSld>
     <p:spTree>
       <p:nvGrpSpPr>
@@ -8219,7 +9381,14 @@
         <p:cNvGrpSpPr/>
         <p:nvPr/>
       </p:nvGrpSpPr>
-      <p:grpSpPr/>
+      <p:grpSpPr>
+        <a:xfrm>
+          <a:off x="0" y="0"/>
+          <a:ext cx="0" cy="0"/>
+          <a:chOff x="0" y="0"/>
+          <a:chExt cx="0" cy="0"/>
+        </a:xfrm>
+      </p:grpSpPr>
       <p:sp>
         <p:nvSpPr>
           <p:cNvPr id="2" name="TextBox 1"/>
@@ -8282,7 +9451,7 @@
                   <a:srgbClr val="FF743B"/>
                 </a:solidFill>
               </a:rPr>
-              <a:t>Notebook 7 · NER</a:t>
+              <a:t>Notebook 3 · NLTK</a:t>
             </a:r>
           </a:p>
         </p:txBody>
@@ -8325,7 +9494,7 @@
           </a:fontRef>
         </p:style>
         <p:txBody>
-          <a:bodyPr rtlCol="0" anchor="ctr" lIns="182880" rIns="182880"/>
+          <a:bodyPr lIns="182880" rIns="182880" rtlCol="0" anchor="ctr"/>
           <a:lstStyle/>
           <a:p>
             <a:pPr algn="l"/>
@@ -8336,7 +9505,7 @@
                 </a:solidFill>
                 <a:latin typeface="Consolas"/>
               </a:rPr>
-              <a:t>▶  notebooks/07 - NER.ipynb</a:t>
+              <a:t>▶  notebooks/03 - NLTK.ipynb</a:t>
             </a:r>
           </a:p>
         </p:txBody>
@@ -8369,7 +9538,7 @@
                   <a:srgbClr val="161625"/>
                 </a:solidFill>
               </a:rPr>
-              <a:t>•  Etiquetado secuencial vs clasificación de documentos</a:t>
+              <a:t>•  Si spaCy es Tesla, NLTK es el Volkswagen Golf</a:t>
             </a:r>
           </a:p>
           <a:p>
@@ -8379,7 +9548,7 @@
                   <a:srgbClr val="161625"/>
                 </a:solidFill>
               </a:rPr>
-              <a:t>•  IOB encoding y por qué CRF captura dependencias entre etiquetas vecinas</a:t>
+              <a:t>•  Para sent_tokenize y Snowball stemmer sigue siendo lo mejor</a:t>
             </a:r>
           </a:p>
         </p:txBody>
@@ -8413,7 +9582,7 @@
                   <a:srgbClr val="595959"/>
                 </a:solidFill>
               </a:rPr>
-              <a:t>2:20 – 2:30</a:t>
+              <a:t>2:25 – 2:30</a:t>
             </a:r>
           </a:p>
         </p:txBody>
@@ -8426,8 +9595,8 @@
 </p:sld>
 </file>
 
-<file path=ppt/slides/slide21.xml><?xml version="1.0" encoding="utf-8"?>
-<p:sld xmlns:a="http://schemas.openxmlformats.org/drawingml/2006/main" xmlns:p="http://schemas.openxmlformats.org/presentationml/2006/main" xmlns:r="http://schemas.openxmlformats.org/officeDocument/2006/relationships">
+<file path=ppt/slides/slide25.xml><?xml version="1.0" encoding="utf-8"?>
+<p:sld xmlns:a="http://schemas.openxmlformats.org/drawingml/2006/main" xmlns:r="http://schemas.openxmlformats.org/officeDocument/2006/relationships" xmlns:p="http://schemas.openxmlformats.org/presentationml/2006/main">
   <p:cSld>
     <p:spTree>
       <p:nvGrpSpPr>
@@ -8435,7 +9604,14 @@
         <p:cNvGrpSpPr/>
         <p:nvPr/>
       </p:nvGrpSpPr>
-      <p:grpSpPr/>
+      <p:grpSpPr>
+        <a:xfrm>
+          <a:off x="0" y="0"/>
+          <a:ext cx="0" cy="0"/>
+          <a:chOff x="0" y="0"/>
+          <a:chExt cx="0" cy="0"/>
+        </a:xfrm>
+      </p:grpSpPr>
       <p:sp>
         <p:nvSpPr>
           <p:cNvPr id="2" name="Title 1"/>
@@ -8457,7 +9633,7 @@
                   <a:srgbClr val="FF743B"/>
                 </a:solidFill>
               </a:rPr>
-              <a:t>¿Qué es NER y por qué CRF?</a:t>
+              <a:t>Tokenizers de NLTK</a:t>
             </a:r>
           </a:p>
         </p:txBody>
@@ -8477,36 +9653,33 @@
           <a:bodyPr wrap="square"/>
           <a:lstStyle/>
           <a:p>
-            <a:pPr/>
             <a:r>
               <a:rPr sz="1800">
                 <a:solidFill>
                   <a:srgbClr val="161625"/>
                 </a:solidFill>
               </a:rPr>
-              <a:t>Etiquetado secuencial vs clasificación de documentos</a:t>
-            </a:r>
-          </a:p>
-          <a:p>
-            <a:pPr/>
+              <a:t>nltk.download('punkt_tab')  y  sent_tokenize</a:t>
+            </a:r>
+          </a:p>
+          <a:p>
             <a:r>
               <a:rPr sz="1800">
                 <a:solidFill>
                   <a:srgbClr val="161625"/>
                 </a:solidFill>
               </a:rPr>
-              <a:t>IOB encoding (pizarra: ejemplo Nueva York vs Nueva York Chicago)</a:t>
-            </a:r>
-          </a:p>
-          <a:p>
-            <a:pPr/>
+              <a:t>Compara sent_tokenize vs text.split('.') en una review compleja</a:t>
+            </a:r>
+          </a:p>
+          <a:p>
             <a:r>
               <a:rPr sz="1800">
                 <a:solidFill>
                   <a:srgbClr val="161625"/>
                 </a:solidFill>
               </a:rPr>
-              <a:t>Por qué CRF: captura dependencias entre etiquetas vecinas</a:t>
+              <a:t>RegexpTokenizer(r'\w+')  → opción más limpia para español</a:t>
             </a:r>
           </a:p>
         </p:txBody>
@@ -8540,7 +9713,7 @@
                   <a:srgbClr val="595959"/>
                 </a:solidFill>
               </a:rPr>
-              <a:t>2:20 – 2:30</a:t>
+              <a:t>2:30 – 2:40</a:t>
             </a:r>
           </a:p>
         </p:txBody>
@@ -8583,7 +9756,7 @@
           </a:fontRef>
         </p:style>
         <p:txBody>
-          <a:bodyPr rtlCol="0" anchor="ctr" lIns="137160" rIns="137160" tIns="36576" bIns="36576"/>
+          <a:bodyPr lIns="137160" tIns="36576" rIns="137160" bIns="36576" rtlCol="0" anchor="ctr"/>
           <a:lstStyle/>
           <a:p>
             <a:pPr algn="l"/>
@@ -8593,7 +9766,7 @@
                   <a:srgbClr val="FF743B"/>
                 </a:solidFill>
               </a:rPr>
-              <a:t>▶  NOTEBOOK: 07 - NER.ipynb</a:t>
+              <a:t>▶  NOTEBOOK: 03 - NLTK.ipynb</a:t>
             </a:r>
           </a:p>
         </p:txBody>
@@ -8606,8 +9779,8 @@
 </p:sld>
 </file>
 
-<file path=ppt/slides/slide22.xml><?xml version="1.0" encoding="utf-8"?>
-<p:sld xmlns:a="http://schemas.openxmlformats.org/drawingml/2006/main" xmlns:p="http://schemas.openxmlformats.org/presentationml/2006/main" xmlns:r="http://schemas.openxmlformats.org/officeDocument/2006/relationships">
+<file path=ppt/slides/slide26.xml><?xml version="1.0" encoding="utf-8"?>
+<p:sld xmlns:a="http://schemas.openxmlformats.org/drawingml/2006/main" xmlns:r="http://schemas.openxmlformats.org/officeDocument/2006/relationships" xmlns:p="http://schemas.openxmlformats.org/presentationml/2006/main">
   <p:cSld>
     <p:spTree>
       <p:nvGrpSpPr>
@@ -8615,7 +9788,14 @@
         <p:cNvGrpSpPr/>
         <p:nvPr/>
       </p:nvGrpSpPr>
-      <p:grpSpPr/>
+      <p:grpSpPr>
+        <a:xfrm>
+          <a:off x="0" y="0"/>
+          <a:ext cx="0" cy="0"/>
+          <a:chOff x="0" y="0"/>
+          <a:chExt cx="0" cy="0"/>
+        </a:xfrm>
+      </p:grpSpPr>
       <p:sp>
         <p:nvSpPr>
           <p:cNvPr id="2" name="Title 1"/>
@@ -8637,7 +9817,7 @@
                   <a:srgbClr val="FF743B"/>
                 </a:solidFill>
               </a:rPr>
-              <a:t>Setup y feature engineering</a:t>
+              <a:t>Stemming con Snowball</a:t>
             </a:r>
           </a:p>
         </p:txBody>
@@ -8657,36 +9837,33 @@
           <a:bodyPr wrap="square"/>
           <a:lstStyle/>
           <a:p>
-            <a:pPr/>
             <a:r>
               <a:rPr sz="1800">
                 <a:solidFill>
                   <a:srgbClr val="161625"/>
                 </a:solidFill>
               </a:rPr>
-              <a:t>Cargar CoNLL 2002</a:t>
-            </a:r>
-          </a:p>
-          <a:p>
-            <a:pPr/>
+              <a:t>SpanishStemmer de Snowball</a:t>
+            </a:r>
+          </a:p>
+          <a:p>
             <a:r>
               <a:rPr sz="1800">
                 <a:solidFill>
                   <a:srgbClr val="161625"/>
                 </a:solidFill>
               </a:rPr>
-              <a:t>Función word2features celda a celda — EXPLICA cada feature</a:t>
-            </a:r>
-          </a:p>
-          <a:p>
-            <a:pPr/>
+              <a:t>Probar: corriendo, corrió, corredor, correré, casas, cantábamos, cantar</a:t>
+            </a:r>
+          </a:p>
+          <a:p>
             <a:r>
               <a:rPr sz="1800">
                 <a:solidFill>
                   <a:srgbClr val="161625"/>
                 </a:solidFill>
               </a:rPr>
-              <a:t>Mensaje clave: el feature engineering ES el modelo</a:t>
+              <a:t>Comparar con lematización del NB1: lo mismo o casi, pero mucho más rápido</a:t>
             </a:r>
           </a:p>
         </p:txBody>
@@ -8720,7 +9897,7 @@
                   <a:srgbClr val="595959"/>
                 </a:solidFill>
               </a:rPr>
-              <a:t>2:30 – 2:45</a:t>
+              <a:t>2:40 – 2:50</a:t>
             </a:r>
           </a:p>
         </p:txBody>
@@ -8763,7 +9940,7 @@
           </a:fontRef>
         </p:style>
         <p:txBody>
-          <a:bodyPr rtlCol="0" anchor="ctr" lIns="137160" rIns="137160" tIns="36576" bIns="36576"/>
+          <a:bodyPr lIns="137160" tIns="36576" rIns="137160" bIns="36576" rtlCol="0" anchor="ctr"/>
           <a:lstStyle/>
           <a:p>
             <a:pPr algn="l"/>
@@ -8773,7 +9950,7 @@
                   <a:srgbClr val="FF743B"/>
                 </a:solidFill>
               </a:rPr>
-              <a:t>▶  NOTEBOOK: 07 - NER.ipynb</a:t>
+              <a:t>▶  NOTEBOOK: 03 - NLTK.ipynb</a:t>
             </a:r>
           </a:p>
         </p:txBody>
@@ -8786,8 +9963,8 @@
 </p:sld>
 </file>
 
-<file path=ppt/slides/slide23.xml><?xml version="1.0" encoding="utf-8"?>
-<p:sld xmlns:a="http://schemas.openxmlformats.org/drawingml/2006/main" xmlns:p="http://schemas.openxmlformats.org/presentationml/2006/main" xmlns:r="http://schemas.openxmlformats.org/officeDocument/2006/relationships">
+<file path=ppt/slides/slide27.xml><?xml version="1.0" encoding="utf-8"?>
+<p:sld xmlns:a="http://schemas.openxmlformats.org/drawingml/2006/main" xmlns:r="http://schemas.openxmlformats.org/officeDocument/2006/relationships" xmlns:p="http://schemas.openxmlformats.org/presentationml/2006/main">
   <p:cSld>
     <p:spTree>
       <p:nvGrpSpPr>
@@ -8795,7 +9972,14 @@
         <p:cNvGrpSpPr/>
         <p:nvPr/>
       </p:nvGrpSpPr>
-      <p:grpSpPr/>
+      <p:grpSpPr>
+        <a:xfrm>
+          <a:off x="0" y="0"/>
+          <a:ext cx="0" cy="0"/>
+          <a:chOff x="0" y="0"/>
+          <a:chExt cx="0" cy="0"/>
+        </a:xfrm>
+      </p:grpSpPr>
       <p:sp>
         <p:nvSpPr>
           <p:cNvPr id="2" name="Title 1"/>
@@ -8817,7 +10001,7 @@
                   <a:srgbClr val="FF743B"/>
                 </a:solidFill>
               </a:rPr>
-              <a:t>Entrenamiento y evaluación</a:t>
+              <a:t>WordNet</a:t>
             </a:r>
           </a:p>
         </p:txBody>
@@ -8837,36 +10021,33 @@
           <a:bodyPr wrap="square"/>
           <a:lstStyle/>
           <a:p>
-            <a:pPr/>
             <a:r>
               <a:rPr sz="1800">
                 <a:solidFill>
                   <a:srgbClr val="161625"/>
                 </a:solidFill>
               </a:rPr>
-              <a:t>sklearn-crfsuite</a:t>
-            </a:r>
-          </a:p>
-          <a:p>
-            <a:pPr/>
+              <a:t>En español NO funciona bien</a:t>
+            </a:r>
+          </a:p>
+          <a:p>
             <a:r>
               <a:rPr sz="1800">
                 <a:solidFill>
                   <a:srgbClr val="161625"/>
                 </a:solidFill>
               </a:rPr>
-              <a:t>F1 ponderado SIN la clase 'O'</a:t>
-            </a:r>
-          </a:p>
-          <a:p>
-            <a:pPr/>
+              <a:t>En inglés sí</a:t>
+            </a:r>
+          </a:p>
+          <a:p>
             <a:r>
               <a:rPr sz="1800">
                 <a:solidFill>
                   <a:srgbClr val="161625"/>
                 </a:solidFill>
               </a:rPr>
-              <a:t>Resultado típico: ~0.76 en test</a:t>
+              <a:t>Para español, spaCy gana</a:t>
             </a:r>
           </a:p>
         </p:txBody>
@@ -8900,7 +10081,7 @@
                   <a:srgbClr val="595959"/>
                 </a:solidFill>
               </a:rPr>
-              <a:t>2:45 – 3:00</a:t>
+              <a:t>2:50 – 2:55</a:t>
             </a:r>
           </a:p>
         </p:txBody>
@@ -8943,7 +10124,7 @@
           </a:fontRef>
         </p:style>
         <p:txBody>
-          <a:bodyPr rtlCol="0" anchor="ctr" lIns="137160" rIns="137160" tIns="36576" bIns="36576"/>
+          <a:bodyPr lIns="137160" tIns="36576" rIns="137160" bIns="36576" rtlCol="0" anchor="ctr"/>
           <a:lstStyle/>
           <a:p>
             <a:pPr algn="l"/>
@@ -8953,7 +10134,7 @@
                   <a:srgbClr val="FF743B"/>
                 </a:solidFill>
               </a:rPr>
-              <a:t>▶  NOTEBOOK: 07 - NER.ipynb</a:t>
+              <a:t>▶  NOTEBOOK: 03 - NLTK.ipynb</a:t>
             </a:r>
           </a:p>
         </p:txBody>
@@ -8966,8 +10147,8 @@
 </p:sld>
 </file>
 
-<file path=ppt/slides/slide24.xml><?xml version="1.0" encoding="utf-8"?>
-<p:sld xmlns:a="http://schemas.openxmlformats.org/drawingml/2006/main" xmlns:p="http://schemas.openxmlformats.org/presentationml/2006/main" xmlns:r="http://schemas.openxmlformats.org/officeDocument/2006/relationships">
+<file path=ppt/slides/slide28.xml><?xml version="1.0" encoding="utf-8"?>
+<p:sld xmlns:a="http://schemas.openxmlformats.org/drawingml/2006/main" xmlns:r="http://schemas.openxmlformats.org/officeDocument/2006/relationships" xmlns:p="http://schemas.openxmlformats.org/presentationml/2006/main">
   <p:cSld>
     <p:spTree>
       <p:nvGrpSpPr>
@@ -8975,7 +10156,14 @@
         <p:cNvGrpSpPr/>
         <p:nvPr/>
       </p:nvGrpSpPr>
-      <p:grpSpPr/>
+      <p:grpSpPr>
+        <a:xfrm>
+          <a:off x="0" y="0"/>
+          <a:ext cx="0" cy="0"/>
+          <a:chOff x="0" y="0"/>
+          <a:chExt cx="0" cy="0"/>
+        </a:xfrm>
+      </p:grpSpPr>
       <p:sp>
         <p:nvSpPr>
           <p:cNvPr id="2" name="Title 1"/>
@@ -8992,12 +10180,12 @@
           <a:lstStyle/>
           <a:p>
             <a:r>
-              <a:rPr sz="2800" b="1">
+              <a:rPr sz="3600" b="1">
                 <a:solidFill>
                   <a:srgbClr val="FF743B"/>
                 </a:solidFill>
               </a:rPr>
-              <a:t>Interpretación del modelo</a:t>
+              <a:t>Notebook 4 · Spelling Corrector</a:t>
             </a:r>
           </a:p>
         </p:txBody>
@@ -9014,46 +10202,222 @@
         </p:nvSpPr>
         <p:spPr/>
         <p:txBody>
-          <a:bodyPr wrap="square"/>
+          <a:bodyPr/>
           <a:lstStyle/>
           <a:p>
-            <a:pPr/>
-            <a:r>
-              <a:rPr sz="1800">
-                <a:solidFill>
-                  <a:srgbClr val="161625"/>
-                </a:solidFill>
-              </a:rPr>
-              <a:t>Top 10 transiciones y features más informativas</a:t>
-            </a:r>
-          </a:p>
-          <a:p>
-            <a:pPr lvl="1"/>
-            <a:r>
-              <a:rPr sz="1500">
-                <a:solidFill>
-                  <a:srgbClr val="161625"/>
-                </a:solidFill>
-              </a:rPr>
-              <a:t>💡 Highlight: O ← word.istitle() tiene peso súper negativo</a:t>
-            </a:r>
-          </a:p>
-          <a:p>
-            <a:pPr lvl="1"/>
-            <a:r>
-              <a:rPr sz="1500">
-                <a:solidFill>
-                  <a:srgbClr val="161625"/>
-                </a:solidFill>
-              </a:rPr>
-              <a:t>El modelo aprendió que las mayúsculas son señal de entidad</a:t>
-            </a:r>
-          </a:p>
-        </p:txBody>
-      </p:sp>
-      <p:sp>
-        <p:nvSpPr>
-          <p:cNvPr id="4" name="TextBox 3"/>
+            <a:r>
+              <a:rPr sz="2000">
+                <a:solidFill>
+                  <a:srgbClr val="161625"/>
+                </a:solidFill>
+              </a:rPr>
+              <a:t>30 min · 30 líneas de Python, bayes puro</a:t>
+            </a:r>
+          </a:p>
+        </p:txBody>
+      </p:sp>
+    </p:spTree>
+  </p:cSld>
+  <p:clrMapOvr>
+    <a:masterClrMapping/>
+  </p:clrMapOvr>
+</p:sld>
+</file>
+
+<file path=ppt/slides/slide29.xml><?xml version="1.0" encoding="utf-8"?>
+<p:sld xmlns:a="http://schemas.openxmlformats.org/drawingml/2006/main" xmlns:r="http://schemas.openxmlformats.org/officeDocument/2006/relationships" xmlns:p="http://schemas.openxmlformats.org/presentationml/2006/main">
+  <p:cSld>
+    <p:spTree>
+      <p:nvGrpSpPr>
+        <p:cNvPr id="1" name=""/>
+        <p:cNvGrpSpPr/>
+        <p:nvPr/>
+      </p:nvGrpSpPr>
+      <p:grpSpPr>
+        <a:xfrm>
+          <a:off x="0" y="0"/>
+          <a:ext cx="0" cy="0"/>
+          <a:chOff x="0" y="0"/>
+          <a:chExt cx="0" cy="0"/>
+        </a:xfrm>
+      </p:grpSpPr>
+      <p:sp>
+        <p:nvSpPr>
+          <p:cNvPr id="2" name="TextBox 1"/>
+          <p:cNvSpPr txBox="1"/>
+          <p:nvPr/>
+        </p:nvSpPr>
+        <p:spPr>
+          <a:xfrm>
+            <a:off x="548640" y="365760"/>
+            <a:ext cx="8046720" cy="731520"/>
+          </a:xfrm>
+          <a:prstGeom prst="rect">
+            <a:avLst/>
+          </a:prstGeom>
+          <a:noFill/>
+        </p:spPr>
+        <p:txBody>
+          <a:bodyPr wrap="none">
+            <a:spAutoFit/>
+          </a:bodyPr>
+          <a:lstStyle/>
+          <a:p>
+            <a:r>
+              <a:rPr sz="1600" b="1">
+                <a:solidFill>
+                  <a:srgbClr val="FF743B"/>
+                </a:solidFill>
+                <a:latin typeface="Calibri"/>
+              </a:rPr>
+              <a:t>AHORA AL NOTEBOOK</a:t>
+            </a:r>
+          </a:p>
+        </p:txBody>
+      </p:sp>
+      <p:sp>
+        <p:nvSpPr>
+          <p:cNvPr id="3" name="TextBox 2"/>
+          <p:cNvSpPr txBox="1"/>
+          <p:nvPr/>
+        </p:nvSpPr>
+        <p:spPr>
+          <a:xfrm>
+            <a:off x="548640" y="914400"/>
+            <a:ext cx="8046720" cy="914400"/>
+          </a:xfrm>
+          <a:prstGeom prst="rect">
+            <a:avLst/>
+          </a:prstGeom>
+          <a:noFill/>
+        </p:spPr>
+        <p:txBody>
+          <a:bodyPr wrap="none">
+            <a:spAutoFit/>
+          </a:bodyPr>
+          <a:lstStyle/>
+          <a:p>
+            <a:r>
+              <a:rPr sz="3400" b="1">
+                <a:solidFill>
+                  <a:srgbClr val="FF743B"/>
+                </a:solidFill>
+              </a:rPr>
+              <a:t>Notebook 4 · Spelling Corrector (Norvig)</a:t>
+            </a:r>
+          </a:p>
+        </p:txBody>
+      </p:sp>
+      <p:sp>
+        <p:nvSpPr>
+          <p:cNvPr id="4" name="Rounded Rectangle 3"/>
+          <p:cNvSpPr/>
+          <p:nvPr/>
+        </p:nvSpPr>
+        <p:spPr>
+          <a:xfrm>
+            <a:off x="548640" y="1920240"/>
+            <a:ext cx="8046720" cy="640080"/>
+          </a:xfrm>
+          <a:prstGeom prst="roundRect">
+            <a:avLst/>
+          </a:prstGeom>
+          <a:solidFill>
+            <a:srgbClr val="FFECDE"/>
+          </a:solidFill>
+          <a:ln w="19050">
+            <a:solidFill>
+              <a:srgbClr val="FF743B"/>
+            </a:solidFill>
+          </a:ln>
+        </p:spPr>
+        <p:style>
+          <a:lnRef idx="1">
+            <a:schemeClr val="accent1"/>
+          </a:lnRef>
+          <a:fillRef idx="3">
+            <a:schemeClr val="accent1"/>
+          </a:fillRef>
+          <a:effectRef idx="2">
+            <a:schemeClr val="accent1"/>
+          </a:effectRef>
+          <a:fontRef idx="minor">
+            <a:schemeClr val="lt1"/>
+          </a:fontRef>
+        </p:style>
+        <p:txBody>
+          <a:bodyPr lIns="182880" rIns="182880" rtlCol="0" anchor="ctr"/>
+          <a:lstStyle/>
+          <a:p>
+            <a:pPr algn="l"/>
+            <a:r>
+              <a:rPr sz="1800" b="1">
+                <a:solidFill>
+                  <a:srgbClr val="FF743B"/>
+                </a:solidFill>
+                <a:latin typeface="Consolas"/>
+              </a:rPr>
+              <a:t>▶  notebooks/04 - Spelling Corrector (Norvig).ipynb</a:t>
+            </a:r>
+          </a:p>
+        </p:txBody>
+      </p:sp>
+      <p:sp>
+        <p:nvSpPr>
+          <p:cNvPr id="5" name="TextBox 4"/>
+          <p:cNvSpPr txBox="1"/>
+          <p:nvPr/>
+        </p:nvSpPr>
+        <p:spPr>
+          <a:xfrm>
+            <a:off x="548640" y="2743200"/>
+            <a:ext cx="8046720" cy="1828800"/>
+          </a:xfrm>
+          <a:prstGeom prst="rect">
+            <a:avLst/>
+          </a:prstGeom>
+          <a:noFill/>
+        </p:spPr>
+        <p:txBody>
+          <a:bodyPr wrap="square">
+            <a:spAutoFit/>
+          </a:bodyPr>
+          <a:lstStyle/>
+          <a:p>
+            <a:r>
+              <a:rPr sz="1600">
+                <a:solidFill>
+                  <a:srgbClr val="161625"/>
+                </a:solidFill>
+              </a:rPr>
+              <a:t>•  30 líneas de Python para corregir typos con probabilidad bayesiana</a:t>
+            </a:r>
+          </a:p>
+          <a:p>
+            <a:r>
+              <a:rPr sz="1600">
+                <a:solidFill>
+                  <a:srgbClr val="161625"/>
+                </a:solidFill>
+              </a:rPr>
+              <a:t>•  Autor: Peter Norvig (ex-Director de Calidad de Búsqueda en Google)</a:t>
+            </a:r>
+          </a:p>
+          <a:p>
+            <a:r>
+              <a:rPr sz="1600">
+                <a:solidFill>
+                  <a:srgbClr val="161625"/>
+                </a:solidFill>
+              </a:rPr>
+              <a:t>•  Lectura obligatoria: https://norvig.com/spell-correct.html</a:t>
+            </a:r>
+          </a:p>
+        </p:txBody>
+      </p:sp>
+      <p:sp>
+        <p:nvSpPr>
+          <p:cNvPr id="6" name="TextBox 5"/>
           <p:cNvSpPr txBox="1"/>
           <p:nvPr/>
         </p:nvSpPr>
@@ -9068,6 +10432,471 @@
           <a:noFill/>
         </p:spPr>
         <p:txBody>
+          <a:bodyPr wrap="none">
+            <a:spAutoFit/>
+          </a:bodyPr>
+          <a:lstStyle/>
+          <a:p>
+            <a:pPr algn="ctr"/>
+            <a:r>
+              <a:rPr sz="1100" i="1">
+                <a:solidFill>
+                  <a:srgbClr val="595959"/>
+                </a:solidFill>
+              </a:rPr>
+              <a:t>3:10 – 3:15</a:t>
+            </a:r>
+          </a:p>
+        </p:txBody>
+      </p:sp>
+    </p:spTree>
+  </p:cSld>
+  <p:clrMapOvr>
+    <a:masterClrMapping/>
+  </p:clrMapOvr>
+</p:sld>
+</file>
+
+<file path=ppt/slides/slide3.xml><?xml version="1.0" encoding="utf-8"?>
+<p:sld xmlns:a="http://schemas.openxmlformats.org/drawingml/2006/main" xmlns:r="http://schemas.openxmlformats.org/officeDocument/2006/relationships" xmlns:p="http://schemas.openxmlformats.org/presentationml/2006/main">
+  <p:cSld>
+    <p:spTree>
+      <p:nvGrpSpPr>
+        <p:cNvPr id="1" name=""/>
+        <p:cNvGrpSpPr/>
+        <p:nvPr/>
+      </p:nvGrpSpPr>
+      <p:grpSpPr>
+        <a:xfrm>
+          <a:off x="0" y="0"/>
+          <a:ext cx="0" cy="0"/>
+          <a:chOff x="0" y="0"/>
+          <a:chExt cx="0" cy="0"/>
+        </a:xfrm>
+      </p:grpSpPr>
+      <p:sp>
+        <p:nvSpPr>
+          <p:cNvPr id="2" name="Title 1"/>
+          <p:cNvSpPr>
+            <a:spLocks noGrp="1"/>
+          </p:cNvSpPr>
+          <p:nvPr>
+            <p:ph type="title"/>
+          </p:nvPr>
+        </p:nvSpPr>
+        <p:spPr/>
+        <p:txBody>
+          <a:bodyPr/>
+          <a:lstStyle/>
+          <a:p>
+            <a:r>
+              <a:rPr sz="2800" b="1">
+                <a:solidFill>
+                  <a:srgbClr val="FF743B"/>
+                </a:solidFill>
+              </a:rPr>
+              <a:t>Reglas del juego</a:t>
+            </a:r>
+          </a:p>
+        </p:txBody>
+      </p:sp>
+      <p:sp>
+        <p:nvSpPr>
+          <p:cNvPr id="3" name="Text Placeholder 2"/>
+          <p:cNvSpPr>
+            <a:spLocks noGrp="1"/>
+          </p:cNvSpPr>
+          <p:nvPr>
+            <p:ph type="body" idx="1"/>
+          </p:nvPr>
+        </p:nvSpPr>
+        <p:spPr/>
+        <p:txBody>
+          <a:bodyPr wrap="square"/>
+          <a:lstStyle/>
+          <a:p>
+            <a:r>
+              <a:rPr sz="1800" dirty="0">
+                <a:solidFill>
+                  <a:srgbClr val="161625"/>
+                </a:solidFill>
+              </a:rPr>
+              <a:t>Parad la </a:t>
+            </a:r>
+            <a:r>
+              <a:rPr sz="1800" dirty="0" err="1">
+                <a:solidFill>
+                  <a:srgbClr val="161625"/>
+                </a:solidFill>
+              </a:rPr>
+              <a:t>clase</a:t>
+            </a:r>
+            <a:r>
+              <a:rPr sz="1800" dirty="0">
+                <a:solidFill>
+                  <a:srgbClr val="161625"/>
+                </a:solidFill>
+              </a:rPr>
+              <a:t> </a:t>
+            </a:r>
+            <a:r>
+              <a:rPr sz="1800" dirty="0" err="1">
+                <a:solidFill>
+                  <a:srgbClr val="161625"/>
+                </a:solidFill>
+              </a:rPr>
+              <a:t>cuando</a:t>
+            </a:r>
+            <a:r>
+              <a:rPr sz="1800" dirty="0">
+                <a:solidFill>
+                  <a:srgbClr val="161625"/>
+                </a:solidFill>
+              </a:rPr>
+              <a:t> algo no se </a:t>
+            </a:r>
+            <a:r>
+              <a:rPr sz="1800" dirty="0" err="1">
+                <a:solidFill>
+                  <a:srgbClr val="161625"/>
+                </a:solidFill>
+              </a:rPr>
+              <a:t>entienda</a:t>
+            </a:r>
+            <a:endParaRPr sz="1800" dirty="0">
+              <a:solidFill>
+                <a:srgbClr val="161625"/>
+              </a:solidFill>
+            </a:endParaRPr>
+          </a:p>
+          <a:p>
+            <a:r>
+              <a:rPr sz="1800" dirty="0" err="1">
+                <a:solidFill>
+                  <a:srgbClr val="161625"/>
+                </a:solidFill>
+              </a:rPr>
+              <a:t>Intentad</a:t>
+            </a:r>
+            <a:r>
+              <a:rPr sz="1800" dirty="0">
+                <a:solidFill>
+                  <a:srgbClr val="161625"/>
+                </a:solidFill>
+              </a:rPr>
+              <a:t> </a:t>
+            </a:r>
+            <a:r>
+              <a:rPr sz="1800" dirty="0" err="1">
+                <a:solidFill>
+                  <a:srgbClr val="161625"/>
+                </a:solidFill>
+              </a:rPr>
+              <a:t>seguir</a:t>
+            </a:r>
+            <a:r>
+              <a:rPr sz="1800" dirty="0">
+                <a:solidFill>
+                  <a:srgbClr val="161625"/>
+                </a:solidFill>
+              </a:rPr>
+              <a:t> </a:t>
+            </a:r>
+            <a:r>
+              <a:rPr sz="1800" dirty="0" err="1">
+                <a:solidFill>
+                  <a:srgbClr val="161625"/>
+                </a:solidFill>
+              </a:rPr>
+              <a:t>el</a:t>
+            </a:r>
+            <a:r>
+              <a:rPr sz="1800" dirty="0">
+                <a:solidFill>
+                  <a:srgbClr val="161625"/>
+                </a:solidFill>
+              </a:rPr>
+              <a:t> </a:t>
+            </a:r>
+            <a:r>
+              <a:rPr sz="1800" dirty="0" err="1">
+                <a:solidFill>
+                  <a:srgbClr val="161625"/>
+                </a:solidFill>
+              </a:rPr>
+              <a:t>código</a:t>
+            </a:r>
+            <a:r>
+              <a:rPr sz="1800" dirty="0">
+                <a:solidFill>
+                  <a:srgbClr val="161625"/>
+                </a:solidFill>
+              </a:rPr>
+              <a:t> </a:t>
+            </a:r>
+            <a:r>
+              <a:rPr sz="1800" dirty="0" err="1">
+                <a:solidFill>
+                  <a:srgbClr val="161625"/>
+                </a:solidFill>
+              </a:rPr>
+              <a:t>en</a:t>
+            </a:r>
+            <a:r>
+              <a:rPr sz="1800" dirty="0">
+                <a:solidFill>
+                  <a:srgbClr val="161625"/>
+                </a:solidFill>
+              </a:rPr>
+              <a:t> </a:t>
+            </a:r>
+            <a:r>
+              <a:rPr sz="1800" dirty="0" err="1">
+                <a:solidFill>
+                  <a:srgbClr val="161625"/>
+                </a:solidFill>
+              </a:rPr>
+              <a:t>vuestra</a:t>
+            </a:r>
+            <a:r>
+              <a:rPr sz="1800" dirty="0">
+                <a:solidFill>
+                  <a:srgbClr val="161625"/>
+                </a:solidFill>
+              </a:rPr>
+              <a:t> </a:t>
+            </a:r>
+            <a:r>
+              <a:rPr sz="1800" dirty="0" err="1">
+                <a:solidFill>
+                  <a:srgbClr val="161625"/>
+                </a:solidFill>
+              </a:rPr>
+              <a:t>máquina</a:t>
+            </a:r>
+            <a:endParaRPr sz="1800" dirty="0">
+              <a:solidFill>
+                <a:srgbClr val="161625"/>
+              </a:solidFill>
+            </a:endParaRPr>
+          </a:p>
+          <a:p>
+            <a:r>
+              <a:rPr sz="1800" dirty="0">
+                <a:solidFill>
+                  <a:srgbClr val="161625"/>
+                </a:solidFill>
+              </a:rPr>
+              <a:t>Los notebooks con </a:t>
+            </a:r>
+            <a:r>
+              <a:rPr sz="1800" dirty="0" err="1">
+                <a:solidFill>
+                  <a:srgbClr val="161625"/>
+                </a:solidFill>
+              </a:rPr>
+              <a:t>explicaciones</a:t>
+            </a:r>
+            <a:r>
+              <a:rPr sz="1800" dirty="0">
+                <a:solidFill>
+                  <a:srgbClr val="161625"/>
+                </a:solidFill>
+              </a:rPr>
+              <a:t> </a:t>
+            </a:r>
+            <a:r>
+              <a:rPr sz="1800" dirty="0" err="1">
+                <a:solidFill>
+                  <a:srgbClr val="161625"/>
+                </a:solidFill>
+              </a:rPr>
+              <a:t>detalladas</a:t>
+            </a:r>
+            <a:r>
+              <a:rPr sz="1800" dirty="0">
+                <a:solidFill>
+                  <a:srgbClr val="161625"/>
+                </a:solidFill>
+              </a:rPr>
+              <a:t> </a:t>
+            </a:r>
+            <a:r>
+              <a:rPr sz="1800" dirty="0" err="1">
+                <a:solidFill>
+                  <a:srgbClr val="161625"/>
+                </a:solidFill>
+              </a:rPr>
+              <a:t>están</a:t>
+            </a:r>
+            <a:r>
+              <a:rPr sz="1800" dirty="0">
+                <a:solidFill>
+                  <a:srgbClr val="161625"/>
+                </a:solidFill>
+              </a:rPr>
+              <a:t> </a:t>
+            </a:r>
+            <a:r>
+              <a:rPr sz="1800" dirty="0" err="1">
+                <a:solidFill>
+                  <a:srgbClr val="161625"/>
+                </a:solidFill>
+              </a:rPr>
+              <a:t>en</a:t>
+            </a:r>
+            <a:r>
+              <a:rPr sz="1800" dirty="0">
+                <a:solidFill>
+                  <a:srgbClr val="161625"/>
+                </a:solidFill>
+              </a:rPr>
+              <a:t> </a:t>
+            </a:r>
+            <a:r>
+              <a:rPr sz="1800" dirty="0" err="1">
+                <a:solidFill>
+                  <a:srgbClr val="161625"/>
+                </a:solidFill>
+              </a:rPr>
+              <a:t>notebooks_explicados</a:t>
+            </a:r>
+            <a:r>
+              <a:rPr sz="1800" dirty="0">
+                <a:solidFill>
+                  <a:srgbClr val="161625"/>
+                </a:solidFill>
+              </a:rPr>
+              <a:t>/</a:t>
+            </a:r>
+          </a:p>
+        </p:txBody>
+      </p:sp>
+    </p:spTree>
+  </p:cSld>
+  <p:clrMapOvr>
+    <a:masterClrMapping/>
+  </p:clrMapOvr>
+</p:sld>
+</file>
+
+<file path=ppt/slides/slide30.xml><?xml version="1.0" encoding="utf-8"?>
+<p:sld xmlns:a="http://schemas.openxmlformats.org/drawingml/2006/main" xmlns:r="http://schemas.openxmlformats.org/officeDocument/2006/relationships" xmlns:p="http://schemas.openxmlformats.org/presentationml/2006/main">
+  <p:cSld>
+    <p:spTree>
+      <p:nvGrpSpPr>
+        <p:cNvPr id="1" name=""/>
+        <p:cNvGrpSpPr/>
+        <p:nvPr/>
+      </p:nvGrpSpPr>
+      <p:grpSpPr>
+        <a:xfrm>
+          <a:off x="0" y="0"/>
+          <a:ext cx="0" cy="0"/>
+          <a:chOff x="0" y="0"/>
+          <a:chExt cx="0" cy="0"/>
+        </a:xfrm>
+      </p:grpSpPr>
+      <p:sp>
+        <p:nvSpPr>
+          <p:cNvPr id="2" name="Title 1"/>
+          <p:cNvSpPr>
+            <a:spLocks noGrp="1"/>
+          </p:cNvSpPr>
+          <p:nvPr>
+            <p:ph type="title"/>
+          </p:nvPr>
+        </p:nvSpPr>
+        <p:spPr/>
+        <p:txBody>
+          <a:bodyPr/>
+          <a:lstStyle/>
+          <a:p>
+            <a:r>
+              <a:rPr sz="2800" b="1">
+                <a:solidFill>
+                  <a:srgbClr val="FF743B"/>
+                </a:solidFill>
+              </a:rPr>
+              <a:t>Bayes en pizarra</a:t>
+            </a:r>
+          </a:p>
+        </p:txBody>
+      </p:sp>
+      <p:sp>
+        <p:nvSpPr>
+          <p:cNvPr id="3" name="Text Placeholder 2"/>
+          <p:cNvSpPr>
+            <a:spLocks noGrp="1"/>
+          </p:cNvSpPr>
+          <p:nvPr>
+            <p:ph type="body" idx="1"/>
+          </p:nvPr>
+        </p:nvSpPr>
+        <p:spPr/>
+        <p:txBody>
+          <a:bodyPr wrap="square"/>
+          <a:lstStyle/>
+          <a:p>
+            <a:r>
+              <a:rPr sz="1800">
+                <a:solidFill>
+                  <a:srgbClr val="161625"/>
+                </a:solidFill>
+              </a:rPr>
+              <a:t>arg max P(c|w) = arg max P(w|c) · P(c)</a:t>
+            </a:r>
+          </a:p>
+          <a:p>
+            <a:r>
+              <a:rPr sz="1800">
+                <a:solidFill>
+                  <a:srgbClr val="161625"/>
+                </a:solidFill>
+              </a:rPr>
+              <a:t>P(c) → modelo de lenguaje (frecuencia en corpus)</a:t>
+            </a:r>
+          </a:p>
+          <a:p>
+            <a:r>
+              <a:rPr sz="1800">
+                <a:solidFill>
+                  <a:srgbClr val="161625"/>
+                </a:solidFill>
+              </a:rPr>
+              <a:t>P(w|c) → modelo de error</a:t>
+            </a:r>
+          </a:p>
+          <a:p>
+            <a:pPr lvl="1"/>
+            <a:r>
+              <a:rPr sz="1500">
+                <a:solidFill>
+                  <a:srgbClr val="161625"/>
+                </a:solidFill>
+              </a:rPr>
+              <a:t>💡 Este esquema bayesiano lo verás en spam, traducción y buscadores</a:t>
+            </a:r>
+          </a:p>
+        </p:txBody>
+      </p:sp>
+      <p:sp>
+        <p:nvSpPr>
+          <p:cNvPr id="4" name="TextBox 3"/>
+          <p:cNvSpPr txBox="1"/>
+          <p:nvPr/>
+        </p:nvSpPr>
+        <p:spPr>
+          <a:xfrm>
+            <a:off x="7315200" y="164592"/>
+            <a:ext cx="1737360" cy="320040"/>
+          </a:xfrm>
+          <a:prstGeom prst="rect">
+            <a:avLst/>
+          </a:prstGeom>
+          <a:noFill/>
+        </p:spPr>
+        <p:txBody>
           <a:bodyPr wrap="none" lIns="0" rIns="0">
             <a:spAutoFit/>
           </a:bodyPr>
@@ -9080,7 +10909,7 @@
                   <a:srgbClr val="595959"/>
                 </a:solidFill>
               </a:rPr>
-              <a:t>3:00 – 3:05</a:t>
+              <a:t>3:15 – 3:20</a:t>
             </a:r>
           </a:p>
         </p:txBody>
@@ -9123,7 +10952,7 @@
           </a:fontRef>
         </p:style>
         <p:txBody>
-          <a:bodyPr rtlCol="0" anchor="ctr" lIns="137160" rIns="137160" tIns="36576" bIns="36576"/>
+          <a:bodyPr lIns="137160" tIns="36576" rIns="137160" bIns="36576" rtlCol="0" anchor="ctr"/>
           <a:lstStyle/>
           <a:p>
             <a:pPr algn="l"/>
@@ -9133,7 +10962,7 @@
                   <a:srgbClr val="FF743B"/>
                 </a:solidFill>
               </a:rPr>
-              <a:t>▶  NOTEBOOK: 07 - NER.ipynb</a:t>
+              <a:t>▶  NOTEBOOK: 04 - Spelling Corrector (Norvig).ipynb</a:t>
             </a:r>
           </a:p>
         </p:txBody>
@@ -9146,8 +10975,8 @@
 </p:sld>
 </file>
 
-<file path=ppt/slides/slide25.xml><?xml version="1.0" encoding="utf-8"?>
-<p:sld xmlns:a="http://schemas.openxmlformats.org/drawingml/2006/main" xmlns:p="http://schemas.openxmlformats.org/presentationml/2006/main" xmlns:r="http://schemas.openxmlformats.org/officeDocument/2006/relationships">
+<file path=ppt/slides/slide31.xml><?xml version="1.0" encoding="utf-8"?>
+<p:sld xmlns:a="http://schemas.openxmlformats.org/drawingml/2006/main" xmlns:r="http://schemas.openxmlformats.org/officeDocument/2006/relationships" xmlns:p="http://schemas.openxmlformats.org/presentationml/2006/main">
   <p:cSld>
     <p:spTree>
       <p:nvGrpSpPr>
@@ -9155,7 +10984,14 @@
         <p:cNvGrpSpPr/>
         <p:nvPr/>
       </p:nvGrpSpPr>
-      <p:grpSpPr/>
+      <p:grpSpPr>
+        <a:xfrm>
+          <a:off x="0" y="0"/>
+          <a:ext cx="0" cy="0"/>
+          <a:chOff x="0" y="0"/>
+          <a:chExt cx="0" cy="0"/>
+        </a:xfrm>
+      </p:grpSpPr>
       <p:sp>
         <p:nvSpPr>
           <p:cNvPr id="2" name="Title 1"/>
@@ -9172,12 +11008,12 @@
           <a:lstStyle/>
           <a:p>
             <a:r>
-              <a:rPr sz="2600" b="1">
-                <a:solidFill>
-                  <a:srgbClr val="161625"/>
-                </a:solidFill>
-              </a:rPr>
-              <a:t>NER · qué predice un CRF entrenado</a:t>
+              <a:rPr sz="2800" b="1">
+                <a:solidFill>
+                  <a:srgbClr val="FF743B"/>
+                </a:solidFill>
+              </a:rPr>
+              <a:t>Implementación celda a celda</a:t>
             </a:r>
           </a:p>
         </p:txBody>
@@ -9194,45 +11030,60 @@
         </p:nvSpPr>
         <p:spPr/>
         <p:txBody>
-          <a:bodyPr/>
+          <a:bodyPr wrap="square"/>
           <a:lstStyle/>
-          <a:p/>
-        </p:txBody>
-      </p:sp>
-      <p:pic>
-        <p:nvPicPr>
-          <p:cNvPr id="4" name="Picture 3" descr="02_ner_example.png"/>
-          <p:cNvPicPr>
-            <a:picLocks noChangeAspect="1"/>
-          </p:cNvPicPr>
+          <a:p>
+            <a:r>
+              <a:rPr sz="1800">
+                <a:solidFill>
+                  <a:srgbClr val="161625"/>
+                </a:solidFill>
+              </a:rPr>
+              <a:t>Counter con el corpus de cine</a:t>
+            </a:r>
+          </a:p>
+          <a:p>
+            <a:r>
+              <a:rPr sz="1800">
+                <a:solidFill>
+                  <a:srgbClr val="161625"/>
+                </a:solidFill>
+              </a:rPr>
+              <a:t>edits1 paso a paso: delete, transpose, replace, insert</a:t>
+            </a:r>
+          </a:p>
+          <a:p>
+            <a:r>
+              <a:rPr sz="1800">
+                <a:solidFill>
+                  <a:srgbClr val="161625"/>
+                </a:solidFill>
+              </a:rPr>
+              <a:t>~400 candidatos a distancia 1 · ~160.000 a distancia 2 → filtrar con known()</a:t>
+            </a:r>
+          </a:p>
+          <a:p>
+            <a:r>
+              <a:rPr sz="1800">
+                <a:solidFill>
+                  <a:srgbClr val="161625"/>
+                </a:solidFill>
+              </a:rPr>
+              <a:t>correction('pelicul')  → magia</a:t>
+            </a:r>
+          </a:p>
+        </p:txBody>
+      </p:sp>
+      <p:sp>
+        <p:nvSpPr>
+          <p:cNvPr id="4" name="TextBox 3"/>
+          <p:cNvSpPr txBox="1"/>
           <p:nvPr/>
-        </p:nvPicPr>
-        <p:blipFill>
-          <a:blip r:embed="rId2"/>
-          <a:stretch>
-            <a:fillRect/>
-          </a:stretch>
-        </p:blipFill>
+        </p:nvSpPr>
         <p:spPr>
           <a:xfrm>
-            <a:off x="640080" y="1280160"/>
-            <a:ext cx="7863840" cy="2123738"/>
-          </a:xfrm>
-          <a:prstGeom prst="rect">
-            <a:avLst/>
-          </a:prstGeom>
-        </p:spPr>
-      </p:pic>
-      <p:sp>
-        <p:nvSpPr>
-          <p:cNvPr id="5" name="TextBox 4"/>
-          <p:cNvSpPr txBox="1"/>
-          <p:nvPr/>
-        </p:nvSpPr>
-        <p:spPr>
-          <a:xfrm>
-            <a:off x="640080" y="3495338"/>
-            <a:ext cx="7863840" cy="365760"/>
+            <a:off x="7315200" y="164592"/>
+            <a:ext cx="1737360" cy="320040"/>
           </a:xfrm>
           <a:prstGeom prst="rect">
             <a:avLst/>
@@ -9240,26 +11091,26 @@
           <a:noFill/>
         </p:spPr>
         <p:txBody>
-          <a:bodyPr wrap="none">
+          <a:bodyPr wrap="none" lIns="0" rIns="0">
             <a:spAutoFit/>
           </a:bodyPr>
           <a:lstStyle/>
           <a:p>
-            <a:pPr algn="l"/>
-            <a:r>
-              <a:rPr sz="1300" i="1">
+            <a:pPr algn="ctr"/>
+            <a:r>
+              <a:rPr sz="1100" i="1">
                 <a:solidFill>
                   <a:srgbClr val="595959"/>
                 </a:solidFill>
               </a:rPr>
-              <a:t>Lo mismo que vimos con spaCy, pero ahora entrenado por nosotros</a:t>
-            </a:r>
-          </a:p>
-        </p:txBody>
-      </p:sp>
-      <p:sp>
-        <p:nvSpPr>
-          <p:cNvPr id="6" name="Rounded Rectangle 5"/>
+              <a:t>3:20 – 3:30</a:t>
+            </a:r>
+          </a:p>
+        </p:txBody>
+      </p:sp>
+      <p:sp>
+        <p:nvSpPr>
+          <p:cNvPr id="5" name="Rounded Rectangle 4"/>
           <p:cNvSpPr/>
           <p:nvPr/>
         </p:nvSpPr>
@@ -9295,7 +11146,7 @@
           </a:fontRef>
         </p:style>
         <p:txBody>
-          <a:bodyPr rtlCol="0" anchor="ctr" lIns="137160" rIns="137160" tIns="36576" bIns="36576"/>
+          <a:bodyPr lIns="137160" tIns="36576" rIns="137160" bIns="36576" rtlCol="0" anchor="ctr"/>
           <a:lstStyle/>
           <a:p>
             <a:pPr algn="l"/>
@@ -9305,7 +11156,7 @@
                   <a:srgbClr val="FF743B"/>
                 </a:solidFill>
               </a:rPr>
-              <a:t>▶  NOTEBOOK: 07 - NER.ipynb</a:t>
+              <a:t>▶  NOTEBOOK: 04 - Spelling Corrector (Norvig).ipynb</a:t>
             </a:r>
           </a:p>
         </p:txBody>
@@ -9318,8 +11169,8 @@
 </p:sld>
 </file>
 
-<file path=ppt/slides/slide26.xml><?xml version="1.0" encoding="utf-8"?>
-<p:sld xmlns:a="http://schemas.openxmlformats.org/drawingml/2006/main" xmlns:p="http://schemas.openxmlformats.org/presentationml/2006/main" xmlns:r="http://schemas.openxmlformats.org/officeDocument/2006/relationships">
+<file path=ppt/slides/slide32.xml><?xml version="1.0" encoding="utf-8"?>
+<p:sld xmlns:a="http://schemas.openxmlformats.org/drawingml/2006/main" xmlns:r="http://schemas.openxmlformats.org/officeDocument/2006/relationships" xmlns:p="http://schemas.openxmlformats.org/presentationml/2006/main">
   <p:cSld>
     <p:spTree>
       <p:nvGrpSpPr>
@@ -9327,17 +11178,96 @@
         <p:cNvGrpSpPr/>
         <p:nvPr/>
       </p:nvGrpSpPr>
-      <p:grpSpPr/>
-      <p:sp>
-        <p:nvSpPr>
-          <p:cNvPr id="2" name="TextBox 1"/>
+      <p:grpSpPr>
+        <a:xfrm>
+          <a:off x="0" y="0"/>
+          <a:ext cx="0" cy="0"/>
+          <a:chOff x="0" y="0"/>
+          <a:chExt cx="0" cy="0"/>
+        </a:xfrm>
+      </p:grpSpPr>
+      <p:sp>
+        <p:nvSpPr>
+          <p:cNvPr id="2" name="Title 1"/>
+          <p:cNvSpPr>
+            <a:spLocks noGrp="1"/>
+          </p:cNvSpPr>
+          <p:nvPr>
+            <p:ph type="title"/>
+          </p:nvPr>
+        </p:nvSpPr>
+        <p:spPr/>
+        <p:txBody>
+          <a:bodyPr/>
+          <a:lstStyle/>
+          <a:p>
+            <a:r>
+              <a:rPr sz="2800" b="1">
+                <a:solidFill>
+                  <a:srgbClr val="FF743B"/>
+                </a:solidFill>
+              </a:rPr>
+              <a:t>Limitaciones y alternativas</a:t>
+            </a:r>
+          </a:p>
+        </p:txBody>
+      </p:sp>
+      <p:sp>
+        <p:nvSpPr>
+          <p:cNvPr id="3" name="Text Placeholder 2"/>
+          <p:cNvSpPr>
+            <a:spLocks noGrp="1"/>
+          </p:cNvSpPr>
+          <p:nvPr>
+            <p:ph type="body" idx="1"/>
+          </p:nvPr>
+        </p:nvSpPr>
+        <p:spPr/>
+        <p:txBody>
+          <a:bodyPr wrap="square"/>
+          <a:lstStyle/>
+          <a:p>
+            <a:r>
+              <a:rPr sz="1800">
+                <a:solidFill>
+                  <a:srgbClr val="161625"/>
+                </a:solidFill>
+              </a:rPr>
+              <a:t>Demo con typos preparados: cime, bueena, perona, entrida</a:t>
+            </a:r>
+          </a:p>
+          <a:p>
+            <a:r>
+              <a:rPr sz="1800">
+                <a:solidFill>
+                  <a:srgbClr val="161625"/>
+                </a:solidFill>
+              </a:rPr>
+              <a:t>Alternativas modernas: SymSpell, Hunspell, seq2seq</a:t>
+            </a:r>
+          </a:p>
+          <a:p>
+            <a:r>
+              <a:rPr sz="1800">
+                <a:solidFill>
+                  <a:srgbClr val="161625"/>
+                </a:solidFill>
+              </a:rPr>
+              <a:t>Cuándo cada una</a:t>
+            </a:r>
+          </a:p>
+        </p:txBody>
+      </p:sp>
+      <p:sp>
+        <p:nvSpPr>
+          <p:cNvPr id="4" name="TextBox 3"/>
           <p:cNvSpPr txBox="1"/>
           <p:nvPr/>
         </p:nvSpPr>
         <p:spPr>
           <a:xfrm>
-            <a:off x="548640" y="1645920"/>
-            <a:ext cx="8046720" cy="1371600"/>
+            <a:off x="7315200" y="164592"/>
+            <a:ext cx="1737360" cy="320040"/>
           </a:xfrm>
           <a:prstGeom prst="rect">
             <a:avLst/>
@@ -9345,19 +11275,72 @@
           <a:noFill/>
         </p:spPr>
         <p:txBody>
-          <a:bodyPr wrap="none">
+          <a:bodyPr wrap="none" lIns="0" rIns="0">
             <a:spAutoFit/>
           </a:bodyPr>
           <a:lstStyle/>
           <a:p>
+            <a:pPr algn="ctr"/>
+            <a:r>
+              <a:rPr sz="1100" i="1">
+                <a:solidFill>
+                  <a:srgbClr val="595959"/>
+                </a:solidFill>
+              </a:rPr>
+              <a:t>3:30 – 3:40</a:t>
+            </a:r>
+          </a:p>
+        </p:txBody>
+      </p:sp>
+      <p:sp>
+        <p:nvSpPr>
+          <p:cNvPr id="5" name="Rounded Rectangle 4"/>
+          <p:cNvSpPr/>
+          <p:nvPr/>
+        </p:nvSpPr>
+        <p:spPr>
+          <a:xfrm>
+            <a:off x="365760" y="4617720"/>
+            <a:ext cx="8412480" cy="411480"/>
+          </a:xfrm>
+          <a:prstGeom prst="roundRect">
+            <a:avLst/>
+          </a:prstGeom>
+          <a:solidFill>
+            <a:srgbClr val="FFECDE"/>
+          </a:solidFill>
+          <a:ln w="12700">
+            <a:solidFill>
+              <a:srgbClr val="FF743B"/>
+            </a:solidFill>
+          </a:ln>
+        </p:spPr>
+        <p:style>
+          <a:lnRef idx="1">
+            <a:schemeClr val="accent1"/>
+          </a:lnRef>
+          <a:fillRef idx="3">
+            <a:schemeClr val="accent1"/>
+          </a:fillRef>
+          <a:effectRef idx="2">
+            <a:schemeClr val="accent1"/>
+          </a:effectRef>
+          <a:fontRef idx="minor">
+            <a:schemeClr val="lt1"/>
+          </a:fontRef>
+        </p:style>
+        <p:txBody>
+          <a:bodyPr lIns="137160" tIns="36576" rIns="137160" bIns="36576" rtlCol="0" anchor="ctr"/>
+          <a:lstStyle/>
+          <a:p>
             <a:pPr algn="l"/>
             <a:r>
-              <a:rPr sz="4800" b="1">
+              <a:rPr sz="1400" b="1">
                 <a:solidFill>
                   <a:srgbClr val="FF743B"/>
                 </a:solidFill>
               </a:rPr>
-              <a:t>☕  DESCANSO  ·  15 min</a:t>
+              <a:t>▶  NOTEBOOK: 04 - Spelling Corrector (Norvig).ipynb</a:t>
             </a:r>
           </a:p>
         </p:txBody>
@@ -9370,8 +11353,8 @@
 </p:sld>
 </file>
 
-<file path=ppt/slides/slide27.xml><?xml version="1.0" encoding="utf-8"?>
-<p:sld xmlns:a="http://schemas.openxmlformats.org/drawingml/2006/main" xmlns:p="http://schemas.openxmlformats.org/presentationml/2006/main" xmlns:r="http://schemas.openxmlformats.org/officeDocument/2006/relationships">
+<file path=ppt/slides/slide33.xml><?xml version="1.0" encoding="utf-8"?>
+<p:sld xmlns:a="http://schemas.openxmlformats.org/drawingml/2006/main" xmlns:r="http://schemas.openxmlformats.org/officeDocument/2006/relationships" xmlns:p="http://schemas.openxmlformats.org/presentationml/2006/main">
   <p:cSld>
     <p:spTree>
       <p:nvGrpSpPr>
@@ -9379,7 +11362,14 @@
         <p:cNvGrpSpPr/>
         <p:nvPr/>
       </p:nvGrpSpPr>
-      <p:grpSpPr/>
+      <p:grpSpPr>
+        <a:xfrm>
+          <a:off x="0" y="0"/>
+          <a:ext cx="0" cy="0"/>
+          <a:chOff x="0" y="0"/>
+          <a:chExt cx="0" cy="0"/>
+        </a:xfrm>
+      </p:grpSpPr>
       <p:sp>
         <p:nvSpPr>
           <p:cNvPr id="2" name="Title 1"/>
@@ -9401,7 +11391,7 @@
                   <a:srgbClr val="FF743B"/>
                 </a:solidFill>
               </a:rPr>
-              <a:t>Notebook 8 · BoW y TF-IDF</a:t>
+              <a:t>Notebook 5 · Teaser de Matching</a:t>
             </a:r>
           </a:p>
         </p:txBody>
@@ -9427,7 +11417,7 @@
                   <a:srgbClr val="161625"/>
                 </a:solidFill>
               </a:rPr>
-              <a:t>35 min</a:t>
+              <a:t>15 min · enlace con la clase 2</a:t>
             </a:r>
           </a:p>
         </p:txBody>
@@ -9440,8 +11430,8 @@
 </p:sld>
 </file>
 
-<file path=ppt/slides/slide28.xml><?xml version="1.0" encoding="utf-8"?>
-<p:sld xmlns:a="http://schemas.openxmlformats.org/drawingml/2006/main" xmlns:p="http://schemas.openxmlformats.org/presentationml/2006/main" xmlns:r="http://schemas.openxmlformats.org/officeDocument/2006/relationships">
+<file path=ppt/slides/slide34.xml><?xml version="1.0" encoding="utf-8"?>
+<p:sld xmlns:a="http://schemas.openxmlformats.org/drawingml/2006/main" xmlns:r="http://schemas.openxmlformats.org/officeDocument/2006/relationships" xmlns:p="http://schemas.openxmlformats.org/presentationml/2006/main">
   <p:cSld>
     <p:spTree>
       <p:nvGrpSpPr>
@@ -9449,7 +11439,14 @@
         <p:cNvGrpSpPr/>
         <p:nvPr/>
       </p:nvGrpSpPr>
-      <p:grpSpPr/>
+      <p:grpSpPr>
+        <a:xfrm>
+          <a:off x="0" y="0"/>
+          <a:ext cx="0" cy="0"/>
+          <a:chOff x="0" y="0"/>
+          <a:chExt cx="0" cy="0"/>
+        </a:xfrm>
+      </p:grpSpPr>
       <p:sp>
         <p:nvSpPr>
           <p:cNvPr id="2" name="TextBox 1"/>
@@ -9512,7 +11509,7 @@
                   <a:srgbClr val="FF743B"/>
                 </a:solidFill>
               </a:rPr>
-              <a:t>Notebook 8 · Text Representation</a:t>
+              <a:t>Notebook 5 · Matching (intro)</a:t>
             </a:r>
           </a:p>
         </p:txBody>
@@ -9555,7 +11552,7 @@
           </a:fontRef>
         </p:style>
         <p:txBody>
-          <a:bodyPr rtlCol="0" anchor="ctr" lIns="182880" rIns="182880"/>
+          <a:bodyPr lIns="182880" rIns="182880" rtlCol="0" anchor="ctr"/>
           <a:lstStyle/>
           <a:p>
             <a:pPr algn="l"/>
@@ -9566,7 +11563,7 @@
                 </a:solidFill>
                 <a:latin typeface="Consolas"/>
               </a:rPr>
-              <a:t>▶  notebooks/08 - Text Representation.ipynb</a:t>
+              <a:t>▶  notebooks/05 - Matching.ipynb  (o notebooks_explicados/05 - Matching (intro - explicado).ipynb)</a:t>
             </a:r>
           </a:p>
         </p:txBody>
@@ -9599,7 +11596,7 @@
                   <a:srgbClr val="161625"/>
                 </a:solidFill>
               </a:rPr>
-              <a:t>•  Recap de representaciones: One-hot → BoW → TF-IDF → embeddings (próximas clases)</a:t>
+              <a:t>•  Regex · Levenshtein con jellyfish · Soundex / Metaphone</a:t>
             </a:r>
           </a:p>
           <a:p>
@@ -9609,7 +11606,17 @@
                   <a:srgbClr val="161625"/>
                 </a:solidFill>
               </a:rPr>
-              <a:t>•  Cierra con caso real de detección de spam</a:t>
+              <a:t>•  Lo que hicimos con Norvig es el caso particular más sencillo</a:t>
+            </a:r>
+          </a:p>
+          <a:p>
+            <a:r>
+              <a:rPr sz="1600">
+                <a:solidFill>
+                  <a:srgbClr val="161625"/>
+                </a:solidFill>
+              </a:rPr>
+              <a:t>•  Próxima clase: matching completo + autocompletador de títulos tolerante a typos</a:t>
             </a:r>
           </a:p>
         </p:txBody>
@@ -9643,7 +11650,7 @@
                   <a:srgbClr val="595959"/>
                 </a:solidFill>
               </a:rPr>
-              <a:t>3:20 – 3:25</a:t>
+              <a:t>3:40 – 3:55</a:t>
             </a:r>
           </a:p>
         </p:txBody>
@@ -9656,8 +11663,8 @@
 </p:sld>
 </file>
 
-<file path=ppt/slides/slide29.xml><?xml version="1.0" encoding="utf-8"?>
-<p:sld xmlns:a="http://schemas.openxmlformats.org/drawingml/2006/main" xmlns:p="http://schemas.openxmlformats.org/presentationml/2006/main" xmlns:r="http://schemas.openxmlformats.org/officeDocument/2006/relationships">
+<file path=ppt/slides/slide35.xml><?xml version="1.0" encoding="utf-8"?>
+<p:sld xmlns:a="http://schemas.openxmlformats.org/drawingml/2006/main" xmlns:r="http://schemas.openxmlformats.org/officeDocument/2006/relationships" xmlns:p="http://schemas.openxmlformats.org/presentationml/2006/main">
   <p:cSld>
     <p:spTree>
       <p:nvGrpSpPr>
@@ -9665,7 +11672,14 @@
         <p:cNvGrpSpPr/>
         <p:nvPr/>
       </p:nvGrpSpPr>
-      <p:grpSpPr/>
+      <p:grpSpPr>
+        <a:xfrm>
+          <a:off x="0" y="0"/>
+          <a:ext cx="0" cy="0"/>
+          <a:chOff x="0" y="0"/>
+          <a:chExt cx="0" cy="0"/>
+        </a:xfrm>
+      </p:grpSpPr>
       <p:sp>
         <p:nvSpPr>
           <p:cNvPr id="2" name="Title 1"/>
@@ -9682,12 +11696,12 @@
           <a:lstStyle/>
           <a:p>
             <a:r>
-              <a:rPr sz="2800" b="1">
+              <a:rPr sz="3000" b="1">
                 <a:solidFill>
                   <a:srgbClr val="FF743B"/>
                 </a:solidFill>
               </a:rPr>
-              <a:t>CountVectorizer</a:t>
+              <a:t>Cierre · Ideas clave</a:t>
             </a:r>
           </a:p>
         </p:txBody>
@@ -9704,39 +11718,258 @@
         </p:nvSpPr>
         <p:spPr/>
         <p:txBody>
+          <a:bodyPr/>
+          <a:lstStyle/>
+          <a:p>
+            <a:r>
+              <a:rPr sz="1800">
+                <a:solidFill>
+                  <a:srgbClr val="161625"/>
+                </a:solidFill>
+              </a:rPr>
+              <a:t>1. El preprocesado es el CIMIENTO — lo siguiente es decoración</a:t>
+            </a:r>
+          </a:p>
+          <a:p>
+            <a:r>
+              <a:rPr sz="1800">
+                <a:solidFill>
+                  <a:srgbClr val="161625"/>
+                </a:solidFill>
+              </a:rPr>
+              <a:t>2. Tokenizar y normalizar bien evita 90% de los errores posteriores</a:t>
+            </a:r>
+          </a:p>
+          <a:p>
+            <a:r>
+              <a:rPr sz="1800">
+                <a:solidFill>
+                  <a:srgbClr val="161625"/>
+                </a:solidFill>
+              </a:rPr>
+              <a:t>3. Cuidado con las stopwords cuando importa la negación</a:t>
+            </a:r>
+          </a:p>
+          <a:p>
+            <a:r>
+              <a:rPr sz="1800">
+                <a:solidFill>
+                  <a:srgbClr val="161625"/>
+                </a:solidFill>
+              </a:rPr>
+              <a:t>4. spaCy es el caballo de batalla en producción</a:t>
+            </a:r>
+          </a:p>
+          <a:p>
+            <a:r>
+              <a:rPr sz="1800">
+                <a:solidFill>
+                  <a:srgbClr val="161625"/>
+                </a:solidFill>
+              </a:rPr>
+              <a:t>5. Bayes es una idea muy potente con muy pocas líneas</a:t>
+            </a:r>
+          </a:p>
+          <a:p>
+            <a:endParaRPr sz="1800">
+              <a:solidFill>
+                <a:srgbClr val="161625"/>
+              </a:solidFill>
+            </a:endParaRPr>
+          </a:p>
+          <a:p>
+            <a:r>
+              <a:rPr sz="1600" i="1">
+                <a:solidFill>
+                  <a:srgbClr val="FF743B"/>
+                </a:solidFill>
+              </a:rPr>
+              <a:t>Próxima clase: Matching completo · Visualización · NER con CRFs · BoW y TF-IDF</a:t>
+            </a:r>
+          </a:p>
+        </p:txBody>
+      </p:sp>
+    </p:spTree>
+  </p:cSld>
+  <p:clrMapOvr>
+    <a:masterClrMapping/>
+  </p:clrMapOvr>
+</p:sld>
+</file>
+
+<file path=ppt/slides/slide4.xml><?xml version="1.0" encoding="utf-8"?>
+<p:sld xmlns:a="http://schemas.openxmlformats.org/drawingml/2006/main" xmlns:r="http://schemas.openxmlformats.org/officeDocument/2006/relationships" xmlns:p="http://schemas.openxmlformats.org/presentationml/2006/main">
+  <p:cSld>
+    <p:spTree>
+      <p:nvGrpSpPr>
+        <p:cNvPr id="1" name=""/>
+        <p:cNvGrpSpPr/>
+        <p:nvPr/>
+      </p:nvGrpSpPr>
+      <p:grpSpPr>
+        <a:xfrm>
+          <a:off x="0" y="0"/>
+          <a:ext cx="0" cy="0"/>
+          <a:chOff x="0" y="0"/>
+          <a:chExt cx="0" cy="0"/>
+        </a:xfrm>
+      </p:grpSpPr>
+      <p:sp>
+        <p:nvSpPr>
+          <p:cNvPr id="2" name="Title 1"/>
+          <p:cNvSpPr>
+            <a:spLocks noGrp="1"/>
+          </p:cNvSpPr>
+          <p:nvPr>
+            <p:ph type="title"/>
+          </p:nvPr>
+        </p:nvSpPr>
+        <p:spPr/>
+        <p:txBody>
+          <a:bodyPr/>
+          <a:lstStyle/>
+          <a:p>
+            <a:r>
+              <a:rPr sz="3600" b="1">
+                <a:solidFill>
+                  <a:srgbClr val="FF743B"/>
+                </a:solidFill>
+              </a:rPr>
+              <a:t>Bloque 0 · ¿Qué es NLP?</a:t>
+            </a:r>
+          </a:p>
+        </p:txBody>
+      </p:sp>
+      <p:sp>
+        <p:nvSpPr>
+          <p:cNvPr id="3" name="Text Placeholder 2"/>
+          <p:cNvSpPr>
+            <a:spLocks noGrp="1"/>
+          </p:cNvSpPr>
+          <p:nvPr>
+            <p:ph type="body" idx="1"/>
+          </p:nvPr>
+        </p:nvSpPr>
+        <p:spPr/>
+        <p:txBody>
+          <a:bodyPr/>
+          <a:lstStyle/>
+          <a:p>
+            <a:r>
+              <a:rPr sz="2000">
+                <a:solidFill>
+                  <a:srgbClr val="161625"/>
+                </a:solidFill>
+              </a:rPr>
+              <a:t>Teoría rápida antes de tocar código</a:t>
+            </a:r>
+          </a:p>
+        </p:txBody>
+      </p:sp>
+    </p:spTree>
+  </p:cSld>
+  <p:clrMapOvr>
+    <a:masterClrMapping/>
+  </p:clrMapOvr>
+</p:sld>
+</file>
+
+<file path=ppt/slides/slide5.xml><?xml version="1.0" encoding="utf-8"?>
+<p:sld xmlns:a="http://schemas.openxmlformats.org/drawingml/2006/main" xmlns:r="http://schemas.openxmlformats.org/officeDocument/2006/relationships" xmlns:p="http://schemas.openxmlformats.org/presentationml/2006/main">
+  <p:cSld>
+    <p:spTree>
+      <p:nvGrpSpPr>
+        <p:cNvPr id="1" name=""/>
+        <p:cNvGrpSpPr/>
+        <p:nvPr/>
+      </p:nvGrpSpPr>
+      <p:grpSpPr>
+        <a:xfrm>
+          <a:off x="0" y="0"/>
+          <a:ext cx="0" cy="0"/>
+          <a:chOff x="0" y="0"/>
+          <a:chExt cx="0" cy="0"/>
+        </a:xfrm>
+      </p:grpSpPr>
+      <p:sp>
+        <p:nvSpPr>
+          <p:cNvPr id="2" name="Title 1"/>
+          <p:cNvSpPr>
+            <a:spLocks noGrp="1"/>
+          </p:cNvSpPr>
+          <p:nvPr>
+            <p:ph type="title"/>
+          </p:nvPr>
+        </p:nvSpPr>
+        <p:spPr/>
+        <p:txBody>
+          <a:bodyPr/>
+          <a:lstStyle/>
+          <a:p>
+            <a:r>
+              <a:rPr sz="2800" b="1">
+                <a:solidFill>
+                  <a:srgbClr val="FF743B"/>
+                </a:solidFill>
+              </a:rPr>
+              <a:t>Definición de NLP</a:t>
+            </a:r>
+          </a:p>
+        </p:txBody>
+      </p:sp>
+      <p:sp>
+        <p:nvSpPr>
+          <p:cNvPr id="3" name="Text Placeholder 2"/>
+          <p:cNvSpPr>
+            <a:spLocks noGrp="1"/>
+          </p:cNvSpPr>
+          <p:nvPr>
+            <p:ph type="body" idx="1"/>
+          </p:nvPr>
+        </p:nvSpPr>
+        <p:spPr/>
+        <p:txBody>
           <a:bodyPr wrap="square"/>
           <a:lstStyle/>
           <a:p>
-            <a:pPr/>
             <a:r>
               <a:rPr sz="1800">
                 <a:solidFill>
                   <a:srgbClr val="161625"/>
                 </a:solidFill>
               </a:rPr>
-              <a:t>Ejemplo mínimo con 3 frases</a:t>
-            </a:r>
-          </a:p>
-          <a:p>
-            <a:pPr/>
+              <a:t>NLP = intersección entre lingüística, estadística e ingeniería</a:t>
+            </a:r>
+          </a:p>
+          <a:p>
             <a:r>
               <a:rPr sz="1800">
                 <a:solidFill>
                   <a:srgbClr val="161625"/>
                 </a:solidFill>
               </a:rPr>
-              <a:t>Visualizar matriz documento-término con pandas</a:t>
-            </a:r>
-          </a:p>
-          <a:p>
-            <a:pPr/>
+              <a:t>Objetivo: que una máquina lea, entienda, manipule y genere lenguaje humano</a:t>
+            </a:r>
+          </a:p>
+          <a:p>
             <a:r>
               <a:rPr sz="1800">
                 <a:solidFill>
                   <a:srgbClr val="161625"/>
                 </a:solidFill>
               </a:rPr>
-              <a:t>Parámetros clave: ngram_range, max_features, max_df, min_df, stop_words</a:t>
+              <a:t>Está en ChatGPT, Google Search, Copilot, autocompletados, filtros de spam…</a:t>
+            </a:r>
+          </a:p>
+          <a:p>
+            <a:pPr lvl="1"/>
+            <a:r>
+              <a:rPr sz="1500">
+                <a:solidFill>
+                  <a:srgbClr val="161625"/>
+                </a:solidFill>
+              </a:rPr>
+              <a:t>💡 Anécdota: ELIZA (MIT, 1966) fue el primer chatbot — terapia rogeriana a base de regex</a:t>
             </a:r>
           </a:p>
         </p:txBody>
@@ -9770,60 +12003,7 @@
                   <a:srgbClr val="595959"/>
                 </a:solidFill>
               </a:rPr>
-              <a:t>3:25 – 3:40</a:t>
-            </a:r>
-          </a:p>
-        </p:txBody>
-      </p:sp>
-      <p:sp>
-        <p:nvSpPr>
-          <p:cNvPr id="5" name="Rounded Rectangle 4"/>
-          <p:cNvSpPr/>
-          <p:nvPr/>
-        </p:nvSpPr>
-        <p:spPr>
-          <a:xfrm>
-            <a:off x="365760" y="4617720"/>
-            <a:ext cx="8412480" cy="411480"/>
-          </a:xfrm>
-          <a:prstGeom prst="roundRect">
-            <a:avLst/>
-          </a:prstGeom>
-          <a:solidFill>
-            <a:srgbClr val="FFECDE"/>
-          </a:solidFill>
-          <a:ln w="12700">
-            <a:solidFill>
-              <a:srgbClr val="FF743B"/>
-            </a:solidFill>
-          </a:ln>
-        </p:spPr>
-        <p:style>
-          <a:lnRef idx="1">
-            <a:schemeClr val="accent1"/>
-          </a:lnRef>
-          <a:fillRef idx="3">
-            <a:schemeClr val="accent1"/>
-          </a:fillRef>
-          <a:effectRef idx="2">
-            <a:schemeClr val="accent1"/>
-          </a:effectRef>
-          <a:fontRef idx="minor">
-            <a:schemeClr val="lt1"/>
-          </a:fontRef>
-        </p:style>
-        <p:txBody>
-          <a:bodyPr rtlCol="0" anchor="ctr" lIns="137160" rIns="137160" tIns="36576" bIns="36576"/>
-          <a:lstStyle/>
-          <a:p>
-            <a:pPr algn="l"/>
-            <a:r>
-              <a:rPr sz="1400" b="1">
-                <a:solidFill>
-                  <a:srgbClr val="FF743B"/>
-                </a:solidFill>
-              </a:rPr>
-              <a:t>▶  NOTEBOOK: 08 - Text Representation.ipynb</a:t>
+              <a:t>0:10 – 0:15</a:t>
             </a:r>
           </a:p>
         </p:txBody>
@@ -9836,8 +12016,8 @@
 </p:sld>
 </file>
 
-<file path=ppt/slides/slide3.xml><?xml version="1.0" encoding="utf-8"?>
-<p:sld xmlns:a="http://schemas.openxmlformats.org/drawingml/2006/main" xmlns:p="http://schemas.openxmlformats.org/presentationml/2006/main" xmlns:r="http://schemas.openxmlformats.org/officeDocument/2006/relationships">
+<file path=ppt/slides/slide6.xml><?xml version="1.0" encoding="utf-8"?>
+<p:sld xmlns:a="http://schemas.openxmlformats.org/drawingml/2006/main" xmlns:r="http://schemas.openxmlformats.org/officeDocument/2006/relationships" xmlns:p="http://schemas.openxmlformats.org/presentationml/2006/main">
   <p:cSld>
     <p:spTree>
       <p:nvGrpSpPr>
@@ -9845,7 +12025,14 @@
         <p:cNvGrpSpPr/>
         <p:nvPr/>
       </p:nvGrpSpPr>
-      <p:grpSpPr/>
+      <p:grpSpPr>
+        <a:xfrm>
+          <a:off x="0" y="0"/>
+          <a:ext cx="0" cy="0"/>
+          <a:chOff x="0" y="0"/>
+          <a:chExt cx="0" cy="0"/>
+        </a:xfrm>
+      </p:grpSpPr>
       <p:sp>
         <p:nvSpPr>
           <p:cNvPr id="2" name="Title 1"/>
@@ -9867,7 +12054,7 @@
                   <a:srgbClr val="FF743B"/>
                 </a:solidFill>
               </a:rPr>
-              <a:t>Agenda</a:t>
+              <a:t>Por qué NLP es difícil</a:t>
             </a:r>
           </a:p>
         </p:txBody>
@@ -9887,184 +12074,44 @@
           <a:bodyPr wrap="square"/>
           <a:lstStyle/>
           <a:p>
-            <a:pPr/>
             <a:r>
               <a:rPr sz="1800">
                 <a:solidFill>
                   <a:srgbClr val="161625"/>
                 </a:solidFill>
               </a:rPr>
-              <a:t>Recap Clase 1 + dudas práctica final — 20 min</a:t>
-            </a:r>
-          </a:p>
-          <a:p>
-            <a:pPr/>
+              <a:t>Polisemia, ironía, negación, variabilidad</a:t>
+            </a:r>
+          </a:p>
+          <a:p>
             <a:r>
               <a:rPr sz="1800">
                 <a:solidFill>
                   <a:srgbClr val="161625"/>
                 </a:solidFill>
               </a:rPr>
-              <a:t>Notebook 5 · Matching completo — 60 min</a:t>
-            </a:r>
-          </a:p>
-          <a:p>
-            <a:pPr/>
+              <a:t>Multiplicado por todos los idiomas</a:t>
+            </a:r>
+          </a:p>
+          <a:p>
             <a:r>
               <a:rPr sz="1800">
                 <a:solidFill>
                   <a:srgbClr val="161625"/>
                 </a:solidFill>
               </a:rPr>
-              <a:t>☕ Descanso · 15 min</a:t>
-            </a:r>
-          </a:p>
-          <a:p>
-            <a:pPr/>
-            <a:r>
-              <a:rPr sz="1800">
-                <a:solidFill>
-                  <a:srgbClr val="161625"/>
-                </a:solidFill>
-              </a:rPr>
-              <a:t>Notebook 6 · Visualización — 45 min</a:t>
-            </a:r>
-          </a:p>
-          <a:p>
-            <a:pPr/>
-            <a:r>
-              <a:rPr sz="1800">
-                <a:solidFill>
-                  <a:srgbClr val="161625"/>
-                </a:solidFill>
-              </a:rPr>
-              <a:t>Notebook 7 · NER con CRFs — 45 min</a:t>
-            </a:r>
-          </a:p>
-          <a:p>
-            <a:pPr/>
-            <a:r>
-              <a:rPr sz="1800">
-                <a:solidFill>
-                  <a:srgbClr val="161625"/>
-                </a:solidFill>
-              </a:rPr>
-              <a:t>☕ Descanso · 15 min</a:t>
-            </a:r>
-          </a:p>
-          <a:p>
-            <a:pPr/>
-            <a:r>
-              <a:rPr sz="1800">
-                <a:solidFill>
-                  <a:srgbClr val="161625"/>
-                </a:solidFill>
-              </a:rPr>
-              <a:t>Notebook 8 · BoW y TF-IDF — 35 min</a:t>
-            </a:r>
-          </a:p>
-          <a:p>
-            <a:pPr/>
-            <a:r>
-              <a:rPr sz="1800">
-                <a:solidFill>
-                  <a:srgbClr val="161625"/>
-                </a:solidFill>
-              </a:rPr>
-              <a:t>Cierre y Q&amp;A — 5 min</a:t>
-            </a:r>
-          </a:p>
-        </p:txBody>
-      </p:sp>
-    </p:spTree>
-  </p:cSld>
-  <p:clrMapOvr>
-    <a:masterClrMapping/>
-  </p:clrMapOvr>
-</p:sld>
-</file>
-
-<file path=ppt/slides/slide30.xml><?xml version="1.0" encoding="utf-8"?>
-<p:sld xmlns:a="http://schemas.openxmlformats.org/drawingml/2006/main" xmlns:p="http://schemas.openxmlformats.org/presentationml/2006/main" xmlns:r="http://schemas.openxmlformats.org/officeDocument/2006/relationships">
-  <p:cSld>
-    <p:spTree>
-      <p:nvGrpSpPr>
-        <p:cNvPr id="1" name=""/>
-        <p:cNvGrpSpPr/>
-        <p:nvPr/>
-      </p:nvGrpSpPr>
-      <p:grpSpPr/>
-      <p:sp>
-        <p:nvSpPr>
-          <p:cNvPr id="2" name="Title 1"/>
-          <p:cNvSpPr>
-            <a:spLocks noGrp="1"/>
-          </p:cNvSpPr>
-          <p:nvPr>
-            <p:ph type="title"/>
-          </p:nvPr>
-        </p:nvSpPr>
-        <p:spPr/>
-        <p:txBody>
-          <a:bodyPr/>
-          <a:lstStyle/>
-          <a:p>
-            <a:r>
-              <a:rPr sz="2800" b="1">
-                <a:solidFill>
-                  <a:srgbClr val="FF743B"/>
-                </a:solidFill>
-              </a:rPr>
-              <a:t>TfidfVectorizer</a:t>
-            </a:r>
-          </a:p>
-        </p:txBody>
-      </p:sp>
-      <p:sp>
-        <p:nvSpPr>
-          <p:cNvPr id="3" name="Text Placeholder 2"/>
-          <p:cNvSpPr>
-            <a:spLocks noGrp="1"/>
-          </p:cNvSpPr>
-          <p:nvPr>
-            <p:ph type="body" idx="1"/>
-          </p:nvPr>
-        </p:nvSpPr>
-        <p:spPr/>
-        <p:txBody>
-          <a:bodyPr wrap="square"/>
-          <a:lstStyle/>
-          <a:p>
-            <a:pPr/>
-            <a:r>
-              <a:rPr sz="1800">
-                <a:solidFill>
-                  <a:srgbClr val="161625"/>
-                </a:solidFill>
-              </a:rPr>
-              <a:t>Intuición: TF × log(N/DF)</a:t>
-            </a:r>
-          </a:p>
-          <a:p>
-            <a:pPr/>
-            <a:r>
-              <a:rPr sz="1800">
-                <a:solidFill>
-                  <a:srgbClr val="161625"/>
-                </a:solidFill>
-              </a:rPr>
-              <a:t>Comparar pesos con BoW</a:t>
-            </a:r>
-          </a:p>
-          <a:p>
-            <a:pPr/>
-            <a:r>
-              <a:rPr sz="1800">
-                <a:solidFill>
-                  <a:srgbClr val="161625"/>
-                </a:solidFill>
-              </a:rPr>
-              <a:t>Cuándo elegir cada uno</a:t>
+              <a:t>Necesitamos un pipeline ordenado</a:t>
+            </a:r>
+          </a:p>
+          <a:p>
+            <a:pPr lvl="1"/>
+            <a:r>
+              <a:rPr sz="1500">
+                <a:solidFill>
+                  <a:srgbClr val="161625"/>
+                </a:solidFill>
+              </a:rPr>
+              <a:t>Ejemplo: 'qué buena idea ir a la playa con esta lluvia' (en tono sarcástico)</a:t>
             </a:r>
           </a:p>
         </p:txBody>
@@ -10098,60 +12145,7 @@
                   <a:srgbClr val="595959"/>
                 </a:solidFill>
               </a:rPr>
-              <a:t>3:40 – 3:50</a:t>
-            </a:r>
-          </a:p>
-        </p:txBody>
-      </p:sp>
-      <p:sp>
-        <p:nvSpPr>
-          <p:cNvPr id="5" name="Rounded Rectangle 4"/>
-          <p:cNvSpPr/>
-          <p:nvPr/>
-        </p:nvSpPr>
-        <p:spPr>
-          <a:xfrm>
-            <a:off x="365760" y="4617720"/>
-            <a:ext cx="8412480" cy="411480"/>
-          </a:xfrm>
-          <a:prstGeom prst="roundRect">
-            <a:avLst/>
-          </a:prstGeom>
-          <a:solidFill>
-            <a:srgbClr val="FFECDE"/>
-          </a:solidFill>
-          <a:ln w="12700">
-            <a:solidFill>
-              <a:srgbClr val="FF743B"/>
-            </a:solidFill>
-          </a:ln>
-        </p:spPr>
-        <p:style>
-          <a:lnRef idx="1">
-            <a:schemeClr val="accent1"/>
-          </a:lnRef>
-          <a:fillRef idx="3">
-            <a:schemeClr val="accent1"/>
-          </a:fillRef>
-          <a:effectRef idx="2">
-            <a:schemeClr val="accent1"/>
-          </a:effectRef>
-          <a:fontRef idx="minor">
-            <a:schemeClr val="lt1"/>
-          </a:fontRef>
-        </p:style>
-        <p:txBody>
-          <a:bodyPr rtlCol="0" anchor="ctr" lIns="137160" rIns="137160" tIns="36576" bIns="36576"/>
-          <a:lstStyle/>
-          <a:p>
-            <a:pPr algn="l"/>
-            <a:r>
-              <a:rPr sz="1400" b="1">
-                <a:solidFill>
-                  <a:srgbClr val="FF743B"/>
-                </a:solidFill>
-              </a:rPr>
-              <a:t>▶  NOTEBOOK: 08 - Text Representation.ipynb</a:t>
+              <a:t>0:15 – 0:20</a:t>
             </a:r>
           </a:p>
         </p:txBody>
@@ -10164,8 +12158,8 @@
 </p:sld>
 </file>
 
-<file path=ppt/slides/slide31.xml><?xml version="1.0" encoding="utf-8"?>
-<p:sld xmlns:a="http://schemas.openxmlformats.org/drawingml/2006/main" xmlns:p="http://schemas.openxmlformats.org/presentationml/2006/main" xmlns:r="http://schemas.openxmlformats.org/officeDocument/2006/relationships">
+<file path=ppt/slides/slide7.xml><?xml version="1.0" encoding="utf-8"?>
+<p:sld xmlns:a="http://schemas.openxmlformats.org/drawingml/2006/main" xmlns:r="http://schemas.openxmlformats.org/officeDocument/2006/relationships" xmlns:p="http://schemas.openxmlformats.org/presentationml/2006/main">
   <p:cSld>
     <p:spTree>
       <p:nvGrpSpPr>
@@ -10173,7 +12167,14 @@
         <p:cNvGrpSpPr/>
         <p:nvPr/>
       </p:nvGrpSpPr>
-      <p:grpSpPr/>
+      <p:grpSpPr>
+        <a:xfrm>
+          <a:off x="0" y="0"/>
+          <a:ext cx="0" cy="0"/>
+          <a:chOff x="0" y="0"/>
+          <a:chExt cx="0" cy="0"/>
+        </a:xfrm>
+      </p:grpSpPr>
       <p:sp>
         <p:nvSpPr>
           <p:cNvPr id="2" name="Title 1"/>
@@ -10195,7 +12196,7 @@
                   <a:srgbClr val="FF743B"/>
                 </a:solidFill>
               </a:rPr>
-              <a:t>Caso spam (SMS)</a:t>
+              <a:t>Pipeline NLP en 4 etapas</a:t>
             </a:r>
           </a:p>
         </p:txBody>
@@ -10215,36 +12216,54 @@
           <a:bodyPr wrap="square"/>
           <a:lstStyle/>
           <a:p>
-            <a:pPr/>
             <a:r>
               <a:rPr sz="1800">
                 <a:solidFill>
                   <a:srgbClr val="161625"/>
                 </a:solidFill>
               </a:rPr>
-              <a:t>Dataset SMS spam (5.572 mensajes)</a:t>
-            </a:r>
-          </a:p>
-          <a:p>
-            <a:pPr/>
+              <a:t>1. Adquisición / corpus</a:t>
+            </a:r>
+          </a:p>
+          <a:p>
             <a:r>
               <a:rPr sz="1800">
                 <a:solidFill>
                   <a:srgbClr val="161625"/>
                 </a:solidFill>
               </a:rPr>
-              <a:t>4 configuraciones × LogReg — comparar F1 de la clase 'spam'</a:t>
-            </a:r>
-          </a:p>
-          <a:p>
-            <a:pPr/>
+              <a:t>2. Preprocesado  ← hoy vivimos aquí</a:t>
+            </a:r>
+          </a:p>
+          <a:p>
             <a:r>
               <a:rPr sz="1800">
                 <a:solidFill>
                   <a:srgbClr val="161625"/>
                 </a:solidFill>
               </a:rPr>
-              <a:t>Mensaje: para sentiment de Amazon (la práctica), aplica lo mismo</a:t>
+              <a:t>3. Representación (features / embeddings)</a:t>
+            </a:r>
+          </a:p>
+          <a:p>
+            <a:r>
+              <a:rPr sz="1800">
+                <a:solidFill>
+                  <a:srgbClr val="161625"/>
+                </a:solidFill>
+              </a:rPr>
+              <a:t>4. Modelado y evaluación</a:t>
+            </a:r>
+          </a:p>
+          <a:p>
+            <a:pPr lvl="1"/>
+            <a:r>
+              <a:rPr sz="1500">
+                <a:solidFill>
+                  <a:srgbClr val="161625"/>
+                </a:solidFill>
+              </a:rPr>
+              <a:t>Si la etapa 2 falla, la 3 y la 4 colapsan</a:t>
             </a:r>
           </a:p>
         </p:txBody>
@@ -10278,60 +12297,7 @@
                   <a:srgbClr val="595959"/>
                 </a:solidFill>
               </a:rPr>
-              <a:t>3:50 – 3:55</a:t>
-            </a:r>
-          </a:p>
-        </p:txBody>
-      </p:sp>
-      <p:sp>
-        <p:nvSpPr>
-          <p:cNvPr id="5" name="Rounded Rectangle 4"/>
-          <p:cNvSpPr/>
-          <p:nvPr/>
-        </p:nvSpPr>
-        <p:spPr>
-          <a:xfrm>
-            <a:off x="365760" y="4617720"/>
-            <a:ext cx="8412480" cy="411480"/>
-          </a:xfrm>
-          <a:prstGeom prst="roundRect">
-            <a:avLst/>
-          </a:prstGeom>
-          <a:solidFill>
-            <a:srgbClr val="FFECDE"/>
-          </a:solidFill>
-          <a:ln w="12700">
-            <a:solidFill>
-              <a:srgbClr val="FF743B"/>
-            </a:solidFill>
-          </a:ln>
-        </p:spPr>
-        <p:style>
-          <a:lnRef idx="1">
-            <a:schemeClr val="accent1"/>
-          </a:lnRef>
-          <a:fillRef idx="3">
-            <a:schemeClr val="accent1"/>
-          </a:fillRef>
-          <a:effectRef idx="2">
-            <a:schemeClr val="accent1"/>
-          </a:effectRef>
-          <a:fontRef idx="minor">
-            <a:schemeClr val="lt1"/>
-          </a:fontRef>
-        </p:style>
-        <p:txBody>
-          <a:bodyPr rtlCol="0" anchor="ctr" lIns="137160" rIns="137160" tIns="36576" bIns="36576"/>
-          <a:lstStyle/>
-          <a:p>
-            <a:pPr algn="l"/>
-            <a:r>
-              <a:rPr sz="1400" b="1">
-                <a:solidFill>
-                  <a:srgbClr val="FF743B"/>
-                </a:solidFill>
-              </a:rPr>
-              <a:t>▶  NOTEBOOK: 08 - Text Representation.ipynb</a:t>
+              <a:t>0:20 – 0:25</a:t>
             </a:r>
           </a:p>
         </p:txBody>
@@ -10344,8 +12310,8 @@
 </p:sld>
 </file>
 
-<file path=ppt/slides/slide32.xml><?xml version="1.0" encoding="utf-8"?>
-<p:sld xmlns:a="http://schemas.openxmlformats.org/drawingml/2006/main" xmlns:p="http://schemas.openxmlformats.org/presentationml/2006/main" xmlns:r="http://schemas.openxmlformats.org/officeDocument/2006/relationships">
+<file path=ppt/slides/slide8.xml><?xml version="1.0" encoding="utf-8"?>
+<p:sld xmlns:a="http://schemas.openxmlformats.org/drawingml/2006/main" xmlns:r="http://schemas.openxmlformats.org/officeDocument/2006/relationships" xmlns:p="http://schemas.openxmlformats.org/presentationml/2006/main">
   <p:cSld>
     <p:spTree>
       <p:nvGrpSpPr>
@@ -10353,7 +12319,14 @@
         <p:cNvGrpSpPr/>
         <p:nvPr/>
       </p:nvGrpSpPr>
-      <p:grpSpPr/>
+      <p:grpSpPr>
+        <a:xfrm>
+          <a:off x="0" y="0"/>
+          <a:ext cx="0" cy="0"/>
+          <a:chOff x="0" y="0"/>
+          <a:chExt cx="0" cy="0"/>
+        </a:xfrm>
+      </p:grpSpPr>
       <p:sp>
         <p:nvSpPr>
           <p:cNvPr id="2" name="Title 1"/>
@@ -10364,277 +12337,104 @@
             <p:ph type="title"/>
           </p:nvPr>
         </p:nvSpPr>
-        <p:spPr/>
+        <p:spPr>
+          <a:xfrm>
+            <a:off x="2331315" y="573146"/>
+            <a:ext cx="4600576" cy="1737300"/>
+          </a:xfrm>
+        </p:spPr>
         <p:txBody>
           <a:bodyPr/>
           <a:lstStyle/>
           <a:p>
             <a:r>
-              <a:rPr sz="3000" b="1">
-                <a:solidFill>
-                  <a:srgbClr val="FF743B"/>
-                </a:solidFill>
-              </a:rPr>
-              <a:t>Cierre · Ideas clave</a:t>
-            </a:r>
-          </a:p>
-        </p:txBody>
-      </p:sp>
-      <p:sp>
-        <p:nvSpPr>
-          <p:cNvPr id="3" name="Text Placeholder 2"/>
-          <p:cNvSpPr>
-            <a:spLocks noGrp="1"/>
-          </p:cNvSpPr>
-          <p:nvPr>
-            <p:ph type="body" idx="1"/>
-          </p:nvPr>
-        </p:nvSpPr>
-        <p:spPr/>
-        <p:txBody>
-          <a:bodyPr/>
+              <a:rPr sz="2600" b="1" dirty="0">
+                <a:solidFill>
+                  <a:srgbClr val="161625"/>
+                </a:solidFill>
+              </a:rPr>
+              <a:t>Pipeline NLP · </a:t>
+            </a:r>
+            <a:r>
+              <a:rPr sz="2600" b="1" dirty="0" err="1">
+                <a:solidFill>
+                  <a:srgbClr val="161625"/>
+                </a:solidFill>
+              </a:rPr>
+              <a:t>visión</a:t>
+            </a:r>
+            <a:r>
+              <a:rPr sz="2600" b="1" dirty="0">
+                <a:solidFill>
+                  <a:srgbClr val="161625"/>
+                </a:solidFill>
+              </a:rPr>
+              <a:t> global</a:t>
+            </a:r>
+          </a:p>
+        </p:txBody>
+      </p:sp>
+      <p:pic>
+        <p:nvPicPr>
+          <p:cNvPr id="4" name="Picture 3" descr="01_pipeline_nlp.png"/>
+          <p:cNvPicPr>
+            <a:picLocks noChangeAspect="1"/>
+          </p:cNvPicPr>
+          <p:nvPr/>
+        </p:nvPicPr>
+        <p:blipFill>
+          <a:blip r:embed="rId2"/>
+          <a:stretch>
+            <a:fillRect/>
+          </a:stretch>
+        </p:blipFill>
+        <p:spPr>
+          <a:xfrm>
+            <a:off x="699683" y="1483359"/>
+            <a:ext cx="7863840" cy="2399223"/>
+          </a:xfrm>
+          <a:prstGeom prst="rect">
+            <a:avLst/>
+          </a:prstGeom>
+        </p:spPr>
+      </p:pic>
+      <p:sp>
+        <p:nvSpPr>
+          <p:cNvPr id="5" name="TextBox 4"/>
+          <p:cNvSpPr txBox="1"/>
+          <p:nvPr/>
+        </p:nvSpPr>
+        <p:spPr>
+          <a:xfrm>
+            <a:off x="640080" y="3770823"/>
+            <a:ext cx="7863840" cy="365760"/>
+          </a:xfrm>
+          <a:prstGeom prst="rect">
+            <a:avLst/>
+          </a:prstGeom>
+          <a:noFill/>
+        </p:spPr>
+        <p:txBody>
+          <a:bodyPr wrap="none">
+            <a:spAutoFit/>
+          </a:bodyPr>
           <a:lstStyle/>
           <a:p>
-            <a:r>
-              <a:rPr sz="1800">
-                <a:solidFill>
-                  <a:srgbClr val="161625"/>
-                </a:solidFill>
-              </a:rPr>
-              <a:t>1. Matching = regex + edit distance + fonética según el caso</a:t>
-            </a:r>
-          </a:p>
-          <a:p>
-            <a:r>
-              <a:rPr sz="1800">
-                <a:solidFill>
-                  <a:srgbClr val="161625"/>
-                </a:solidFill>
-              </a:rPr>
-              <a:t>2. Visualizar siempre con stopwords filtradas</a:t>
-            </a:r>
-          </a:p>
-          <a:p>
-            <a:r>
-              <a:rPr sz="1800">
-                <a:solidFill>
-                  <a:srgbClr val="161625"/>
-                </a:solidFill>
-              </a:rPr>
-              <a:t>3. NER clásico vive de feature engineering</a:t>
-            </a:r>
-          </a:p>
-          <a:p>
-            <a:r>
-              <a:rPr sz="1800">
-                <a:solidFill>
-                  <a:srgbClr val="161625"/>
-                </a:solidFill>
-              </a:rPr>
-              <a:t>4. BoW y TF-IDF son tu baseline obligatorio</a:t>
-            </a:r>
-          </a:p>
-          <a:p/>
-          <a:p>
-            <a:r>
-              <a:rPr sz="1600" i="1">
-                <a:solidFill>
-                  <a:srgbClr val="FF743B"/>
-                </a:solidFill>
-              </a:rPr>
-              <a:t>Próxima clase: Sentiment analysis y topic modeling con LDA</a:t>
-            </a:r>
-          </a:p>
-        </p:txBody>
-      </p:sp>
-    </p:spTree>
-  </p:cSld>
-  <p:clrMapOvr>
-    <a:masterClrMapping/>
-  </p:clrMapOvr>
-</p:sld>
-</file>
-
-<file path=ppt/slides/slide4.xml><?xml version="1.0" encoding="utf-8"?>
-<p:sld xmlns:a="http://schemas.openxmlformats.org/drawingml/2006/main" xmlns:p="http://schemas.openxmlformats.org/presentationml/2006/main" xmlns:r="http://schemas.openxmlformats.org/officeDocument/2006/relationships">
-  <p:cSld>
-    <p:spTree>
-      <p:nvGrpSpPr>
-        <p:cNvPr id="1" name=""/>
-        <p:cNvGrpSpPr/>
-        <p:nvPr/>
-      </p:nvGrpSpPr>
-      <p:grpSpPr/>
-      <p:sp>
-        <p:nvSpPr>
-          <p:cNvPr id="2" name="Title 1"/>
-          <p:cNvSpPr>
-            <a:spLocks noGrp="1"/>
-          </p:cNvSpPr>
-          <p:nvPr>
-            <p:ph type="title"/>
-          </p:nvPr>
-        </p:nvSpPr>
-        <p:spPr/>
-        <p:txBody>
-          <a:bodyPr/>
-          <a:lstStyle/>
-          <a:p>
-            <a:r>
-              <a:rPr sz="3600" b="1">
-                <a:solidFill>
-                  <a:srgbClr val="FF743B"/>
-                </a:solidFill>
-              </a:rPr>
-              <a:t>Recap Clase 1</a:t>
-            </a:r>
-          </a:p>
-        </p:txBody>
-      </p:sp>
-      <p:sp>
-        <p:nvSpPr>
-          <p:cNvPr id="3" name="Text Placeholder 2"/>
-          <p:cNvSpPr>
-            <a:spLocks noGrp="1"/>
-          </p:cNvSpPr>
-          <p:nvPr>
-            <p:ph type="body" idx="1"/>
-          </p:nvPr>
-        </p:nvSpPr>
-        <p:spPr/>
-        <p:txBody>
-          <a:bodyPr/>
-          <a:lstStyle/>
-          <a:p>
-            <a:r>
-              <a:rPr sz="2000">
-                <a:solidFill>
-                  <a:srgbClr val="161625"/>
-                </a:solidFill>
-              </a:rPr>
-              <a:t>5 min y resolvemos dudas de la práctica</a:t>
-            </a:r>
-          </a:p>
-        </p:txBody>
-      </p:sp>
-    </p:spTree>
-  </p:cSld>
-  <p:clrMapOvr>
-    <a:masterClrMapping/>
-  </p:clrMapOvr>
-</p:sld>
-</file>
-
-<file path=ppt/slides/slide5.xml><?xml version="1.0" encoding="utf-8"?>
-<p:sld xmlns:a="http://schemas.openxmlformats.org/drawingml/2006/main" xmlns:p="http://schemas.openxmlformats.org/presentationml/2006/main" xmlns:r="http://schemas.openxmlformats.org/officeDocument/2006/relationships">
-  <p:cSld>
-    <p:spTree>
-      <p:nvGrpSpPr>
-        <p:cNvPr id="1" name=""/>
-        <p:cNvGrpSpPr/>
-        <p:nvPr/>
-      </p:nvGrpSpPr>
-      <p:grpSpPr/>
-      <p:sp>
-        <p:nvSpPr>
-          <p:cNvPr id="2" name="Title 1"/>
-          <p:cNvSpPr>
-            <a:spLocks noGrp="1"/>
-          </p:cNvSpPr>
-          <p:nvPr>
-            <p:ph type="title"/>
-          </p:nvPr>
-        </p:nvSpPr>
-        <p:spPr/>
-        <p:txBody>
-          <a:bodyPr/>
-          <a:lstStyle/>
-          <a:p>
-            <a:r>
-              <a:rPr sz="2800" b="1">
-                <a:solidFill>
-                  <a:srgbClr val="FF743B"/>
-                </a:solidFill>
-              </a:rPr>
-              <a:t>Recap rápido</a:t>
-            </a:r>
-          </a:p>
-        </p:txBody>
-      </p:sp>
-      <p:sp>
-        <p:nvSpPr>
-          <p:cNvPr id="3" name="Text Placeholder 2"/>
-          <p:cNvSpPr>
-            <a:spLocks noGrp="1"/>
-          </p:cNvSpPr>
-          <p:nvPr>
-            <p:ph type="body" idx="1"/>
-          </p:nvPr>
-        </p:nvSpPr>
-        <p:spPr/>
-        <p:txBody>
-          <a:bodyPr wrap="square"/>
-          <a:lstStyle/>
-          <a:p>
-            <a:pPr/>
-            <a:r>
-              <a:rPr sz="1800">
-                <a:solidFill>
-                  <a:srgbClr val="161625"/>
-                </a:solidFill>
-              </a:rPr>
-              <a:t>Preprocesado, normalización, stopwords (¡cuidado con la negación!)</a:t>
-            </a:r>
-          </a:p>
-          <a:p>
-            <a:pPr/>
-            <a:r>
-              <a:rPr sz="1800">
-                <a:solidFill>
-                  <a:srgbClr val="161625"/>
-                </a:solidFill>
-              </a:rPr>
-              <a:t>spaCy: pipeline completo en una pasada</a:t>
-            </a:r>
-          </a:p>
-          <a:p>
-            <a:pPr/>
-            <a:r>
-              <a:rPr sz="1800">
-                <a:solidFill>
-                  <a:srgbClr val="161625"/>
-                </a:solidFill>
-              </a:rPr>
-              <a:t>NLTK: sent_tokenize y Snowball stemmer</a:t>
-            </a:r>
-          </a:p>
-          <a:p>
-            <a:pPr/>
-            <a:r>
-              <a:rPr sz="1800">
-                <a:solidFill>
-                  <a:srgbClr val="161625"/>
-                </a:solidFill>
-              </a:rPr>
-              <a:t>Norvig: corrector ortográfico bayesiano</a:t>
-            </a:r>
-          </a:p>
-          <a:p>
-            <a:pPr/>
-            <a:r>
-              <a:rPr sz="1800">
-                <a:solidFill>
-                  <a:srgbClr val="161625"/>
-                </a:solidFill>
-              </a:rPr>
-              <a:t>Pregunta: ¿alguien ha empezado el EDA de la práctica?</a:t>
-            </a:r>
-          </a:p>
-        </p:txBody>
-      </p:sp>
-      <p:sp>
-        <p:nvSpPr>
-          <p:cNvPr id="4" name="TextBox 3"/>
+            <a:pPr algn="l"/>
+            <a:r>
+              <a:rPr sz="1300" i="1">
+                <a:solidFill>
+                  <a:srgbClr val="595959"/>
+                </a:solidFill>
+              </a:rPr>
+              <a:t>Hoy nos centramos en la etapa 2: preprocesado</a:t>
+            </a:r>
+          </a:p>
+        </p:txBody>
+      </p:sp>
+      <p:sp>
+        <p:nvSpPr>
+          <p:cNvPr id="6" name="TextBox 5"/>
           <p:cNvSpPr txBox="1"/>
           <p:nvPr/>
         </p:nvSpPr>
@@ -10649,7 +12449,7 @@
           <a:noFill/>
         </p:spPr>
         <p:txBody>
-          <a:bodyPr wrap="none" lIns="0" rIns="0">
+          <a:bodyPr wrap="none">
             <a:spAutoFit/>
           </a:bodyPr>
           <a:lstStyle/>
@@ -10661,7 +12461,7 @@
                   <a:srgbClr val="595959"/>
                 </a:solidFill>
               </a:rPr>
-              <a:t>0:00 – 0:20</a:t>
+              <a:t>0:20 – 0:25</a:t>
             </a:r>
           </a:p>
         </p:txBody>
@@ -10674,8 +12474,8 @@
 </p:sld>
 </file>
 
-<file path=ppt/slides/slide6.xml><?xml version="1.0" encoding="utf-8"?>
-<p:sld xmlns:a="http://schemas.openxmlformats.org/drawingml/2006/main" xmlns:p="http://schemas.openxmlformats.org/presentationml/2006/main" xmlns:r="http://schemas.openxmlformats.org/officeDocument/2006/relationships">
+<file path=ppt/slides/slide9.xml><?xml version="1.0" encoding="utf-8"?>
+<p:sld xmlns:a="http://schemas.openxmlformats.org/drawingml/2006/main" xmlns:r="http://schemas.openxmlformats.org/officeDocument/2006/relationships" xmlns:p="http://schemas.openxmlformats.org/presentationml/2006/main">
   <p:cSld>
     <p:spTree>
       <p:nvGrpSpPr>
@@ -10683,7 +12483,14 @@
         <p:cNvGrpSpPr/>
         <p:nvPr/>
       </p:nvGrpSpPr>
-      <p:grpSpPr/>
+      <p:grpSpPr>
+        <a:xfrm>
+          <a:off x="0" y="0"/>
+          <a:ext cx="0" cy="0"/>
+          <a:chOff x="0" y="0"/>
+          <a:chExt cx="0" cy="0"/>
+        </a:xfrm>
+      </p:grpSpPr>
       <p:sp>
         <p:nvSpPr>
           <p:cNvPr id="2" name="Title 1"/>
@@ -10700,12 +12507,12 @@
           <a:lstStyle/>
           <a:p>
             <a:r>
-              <a:rPr sz="3600" b="1">
+              <a:rPr sz="2800" b="1">
                 <a:solidFill>
                   <a:srgbClr val="FF743B"/>
                 </a:solidFill>
               </a:rPr>
-              <a:t>Notebook 5 · Matching completo</a:t>
+              <a:t>La práctica final del módulo</a:t>
             </a:r>
           </a:p>
         </p:txBody>
@@ -10722,215 +12529,53 @@
         </p:nvSpPr>
         <p:spPr/>
         <p:txBody>
-          <a:bodyPr/>
+          <a:bodyPr wrap="square"/>
           <a:lstStyle/>
           <a:p>
             <a:r>
-              <a:rPr sz="2000">
-                <a:solidFill>
-                  <a:srgbClr val="161625"/>
-                </a:solidFill>
-              </a:rPr>
-              <a:t>60 min</a:t>
-            </a:r>
-          </a:p>
-        </p:txBody>
-      </p:sp>
-    </p:spTree>
-  </p:cSld>
-  <p:clrMapOvr>
-    <a:masterClrMapping/>
-  </p:clrMapOvr>
-</p:sld>
-</file>
-
-<file path=ppt/slides/slide7.xml><?xml version="1.0" encoding="utf-8"?>
-<p:sld xmlns:a="http://schemas.openxmlformats.org/drawingml/2006/main" xmlns:p="http://schemas.openxmlformats.org/presentationml/2006/main" xmlns:r="http://schemas.openxmlformats.org/officeDocument/2006/relationships">
-  <p:cSld>
-    <p:spTree>
-      <p:nvGrpSpPr>
-        <p:cNvPr id="1" name=""/>
-        <p:cNvGrpSpPr/>
-        <p:nvPr/>
-      </p:nvGrpSpPr>
-      <p:grpSpPr/>
-      <p:sp>
-        <p:nvSpPr>
-          <p:cNvPr id="2" name="TextBox 1"/>
-          <p:cNvSpPr txBox="1"/>
-          <p:nvPr/>
-        </p:nvSpPr>
-        <p:spPr>
-          <a:xfrm>
-            <a:off x="548640" y="365760"/>
-            <a:ext cx="8046720" cy="731520"/>
-          </a:xfrm>
-          <a:prstGeom prst="rect">
-            <a:avLst/>
-          </a:prstGeom>
-          <a:noFill/>
-        </p:spPr>
-        <p:txBody>
-          <a:bodyPr wrap="none">
-            <a:spAutoFit/>
-          </a:bodyPr>
-          <a:lstStyle/>
-          <a:p>
-            <a:r>
-              <a:rPr sz="1600" b="1">
-                <a:solidFill>
-                  <a:srgbClr val="FF743B"/>
-                </a:solidFill>
-                <a:latin typeface="Calibri"/>
-              </a:rPr>
-              <a:t>AHORA AL NOTEBOOK</a:t>
-            </a:r>
-          </a:p>
-        </p:txBody>
-      </p:sp>
-      <p:sp>
-        <p:nvSpPr>
-          <p:cNvPr id="3" name="TextBox 2"/>
-          <p:cNvSpPr txBox="1"/>
-          <p:nvPr/>
-        </p:nvSpPr>
-        <p:spPr>
-          <a:xfrm>
-            <a:off x="548640" y="914400"/>
-            <a:ext cx="8046720" cy="914400"/>
-          </a:xfrm>
-          <a:prstGeom prst="rect">
-            <a:avLst/>
-          </a:prstGeom>
-          <a:noFill/>
-        </p:spPr>
-        <p:txBody>
-          <a:bodyPr wrap="none">
-            <a:spAutoFit/>
-          </a:bodyPr>
-          <a:lstStyle/>
-          <a:p>
-            <a:r>
-              <a:rPr sz="3400" b="1">
-                <a:solidFill>
-                  <a:srgbClr val="FF743B"/>
-                </a:solidFill>
-              </a:rPr>
-              <a:t>Notebook 5 · Matching</a:t>
-            </a:r>
-          </a:p>
-        </p:txBody>
-      </p:sp>
-      <p:sp>
-        <p:nvSpPr>
-          <p:cNvPr id="4" name="Rounded Rectangle 3"/>
-          <p:cNvSpPr/>
-          <p:nvPr/>
-        </p:nvSpPr>
-        <p:spPr>
-          <a:xfrm>
-            <a:off x="548640" y="1920240"/>
-            <a:ext cx="8046720" cy="640080"/>
-          </a:xfrm>
-          <a:prstGeom prst="roundRect">
-            <a:avLst/>
-          </a:prstGeom>
-          <a:solidFill>
-            <a:srgbClr val="FFECDE"/>
-          </a:solidFill>
-          <a:ln w="19050">
-            <a:solidFill>
-              <a:srgbClr val="FF743B"/>
-            </a:solidFill>
-          </a:ln>
-        </p:spPr>
-        <p:style>
-          <a:lnRef idx="1">
-            <a:schemeClr val="accent1"/>
-          </a:lnRef>
-          <a:fillRef idx="3">
-            <a:schemeClr val="accent1"/>
-          </a:fillRef>
-          <a:effectRef idx="2">
-            <a:schemeClr val="accent1"/>
-          </a:effectRef>
-          <a:fontRef idx="minor">
-            <a:schemeClr val="lt1"/>
-          </a:fontRef>
-        </p:style>
-        <p:txBody>
-          <a:bodyPr rtlCol="0" anchor="ctr" lIns="182880" rIns="182880"/>
-          <a:lstStyle/>
-          <a:p>
-            <a:pPr algn="l"/>
-            <a:r>
-              <a:rPr sz="1800" b="1">
-                <a:solidFill>
-                  <a:srgbClr val="FF743B"/>
-                </a:solidFill>
-                <a:latin typeface="Consolas"/>
-              </a:rPr>
-              <a:t>▶  notebooks/05 - Matching.ipynb</a:t>
-            </a:r>
-          </a:p>
-        </p:txBody>
-      </p:sp>
-      <p:sp>
-        <p:nvSpPr>
-          <p:cNvPr id="5" name="TextBox 4"/>
-          <p:cNvSpPr txBox="1"/>
-          <p:nvPr/>
-        </p:nvSpPr>
-        <p:spPr>
-          <a:xfrm>
-            <a:off x="548640" y="2743200"/>
-            <a:ext cx="8046720" cy="1828800"/>
-          </a:xfrm>
-          <a:prstGeom prst="rect">
-            <a:avLst/>
-          </a:prstGeom>
-          <a:noFill/>
-        </p:spPr>
-        <p:txBody>
-          <a:bodyPr wrap="square">
-            <a:spAutoFit/>
-          </a:bodyPr>
-          <a:lstStyle/>
-          <a:p>
-            <a:r>
-              <a:rPr sz="1600">
-                <a:solidFill>
-                  <a:srgbClr val="161625"/>
-                </a:solidFill>
-              </a:rPr>
-              <a:t>•  O en notebooks_explicados/05 - Matching (explicado).ipynb</a:t>
-            </a:r>
-          </a:p>
-          <a:p>
-            <a:r>
-              <a:rPr sz="1600">
-                <a:solidFill>
-                  <a:srgbClr val="161625"/>
-                </a:solidFill>
-              </a:rPr>
-              <a:t>•  Hoy desarrollamos el matching completo: regex, edit distances, fonética</a:t>
-            </a:r>
-          </a:p>
-          <a:p>
-            <a:r>
-              <a:rPr sz="1600">
-                <a:solidFill>
-                  <a:srgbClr val="161625"/>
-                </a:solidFill>
-              </a:rPr>
-              <a:t>•  Cerramos con un autocompletador tolerante a typos</a:t>
-            </a:r>
-          </a:p>
-        </p:txBody>
-      </p:sp>
-      <p:sp>
-        <p:nvSpPr>
-          <p:cNvPr id="6" name="TextBox 5"/>
+              <a:rPr sz="1800">
+                <a:solidFill>
+                  <a:srgbClr val="161625"/>
+                </a:solidFill>
+              </a:rPr>
+              <a:t>Vamos a verla YA para entender hacia dónde vamos</a:t>
+            </a:r>
+          </a:p>
+          <a:p>
+            <a:r>
+              <a:rPr sz="1800">
+                <a:solidFill>
+                  <a:srgbClr val="161625"/>
+                </a:solidFill>
+              </a:rPr>
+              <a:t>Archivos: practica/Practica_final_NLP.pdf · Resumen_Practica_Final.md</a:t>
+            </a:r>
+          </a:p>
+          <a:p>
+            <a:r>
+              <a:rPr sz="1800">
+                <a:solidFill>
+                  <a:srgbClr val="161625"/>
+                </a:solidFill>
+              </a:rPr>
+              <a:t>Mensaje clave: NO se busca el F1 perfecto — se busca que los pasos sean razonables y justificados</a:t>
+            </a:r>
+          </a:p>
+          <a:p>
+            <a:r>
+              <a:rPr sz="1800">
+                <a:solidFill>
+                  <a:srgbClr val="161625"/>
+                </a:solidFill>
+              </a:rPr>
+              <a:t>Recordar fechas y canal de entrega</a:t>
+            </a:r>
+          </a:p>
+        </p:txBody>
+      </p:sp>
+      <p:sp>
+        <p:nvSpPr>
+          <p:cNvPr id="4" name="TextBox 3"/>
           <p:cNvSpPr txBox="1"/>
           <p:nvPr/>
         </p:nvSpPr>
@@ -10945,144 +12590,6 @@
           <a:noFill/>
         </p:spPr>
         <p:txBody>
-          <a:bodyPr wrap="none">
-            <a:spAutoFit/>
-          </a:bodyPr>
-          <a:lstStyle/>
-          <a:p>
-            <a:pPr algn="ctr"/>
-            <a:r>
-              <a:rPr sz="1100" i="1">
-                <a:solidFill>
-                  <a:srgbClr val="595959"/>
-                </a:solidFill>
-              </a:rPr>
-              <a:t>0:20 – 0:25</a:t>
-            </a:r>
-          </a:p>
-        </p:txBody>
-      </p:sp>
-    </p:spTree>
-  </p:cSld>
-  <p:clrMapOvr>
-    <a:masterClrMapping/>
-  </p:clrMapOvr>
-</p:sld>
-</file>
-
-<file path=ppt/slides/slide8.xml><?xml version="1.0" encoding="utf-8"?>
-<p:sld xmlns:a="http://schemas.openxmlformats.org/drawingml/2006/main" xmlns:p="http://schemas.openxmlformats.org/presentationml/2006/main" xmlns:r="http://schemas.openxmlformats.org/officeDocument/2006/relationships">
-  <p:cSld>
-    <p:spTree>
-      <p:nvGrpSpPr>
-        <p:cNvPr id="1" name=""/>
-        <p:cNvGrpSpPr/>
-        <p:nvPr/>
-      </p:nvGrpSpPr>
-      <p:grpSpPr/>
-      <p:sp>
-        <p:nvSpPr>
-          <p:cNvPr id="2" name="Title 1"/>
-          <p:cNvSpPr>
-            <a:spLocks noGrp="1"/>
-          </p:cNvSpPr>
-          <p:nvPr>
-            <p:ph type="title"/>
-          </p:nvPr>
-        </p:nvSpPr>
-        <p:spPr/>
-        <p:txBody>
-          <a:bodyPr/>
-          <a:lstStyle/>
-          <a:p>
-            <a:r>
-              <a:rPr sz="2800" b="1">
-                <a:solidFill>
-                  <a:srgbClr val="FF743B"/>
-                </a:solidFill>
-              </a:rPr>
-              <a:t>Regex</a:t>
-            </a:r>
-          </a:p>
-        </p:txBody>
-      </p:sp>
-      <p:sp>
-        <p:nvSpPr>
-          <p:cNvPr id="3" name="Text Placeholder 2"/>
-          <p:cNvSpPr>
-            <a:spLocks noGrp="1"/>
-          </p:cNvSpPr>
-          <p:nvPr>
-            <p:ph type="body" idx="1"/>
-          </p:nvPr>
-        </p:nvSpPr>
-        <p:spPr/>
-        <p:txBody>
-          <a:bodyPr wrap="square"/>
-          <a:lstStyle/>
-          <a:p>
-            <a:pPr/>
-            <a:r>
-              <a:rPr sz="1800">
-                <a:solidFill>
-                  <a:srgbClr val="161625"/>
-                </a:solidFill>
-              </a:rPr>
-              <a:t>Cheatsheet: \w · \d · [^@] · + · * · ? · {n,m}</a:t>
-            </a:r>
-          </a:p>
-          <a:p>
-            <a:pPr/>
-            <a:r>
-              <a:rPr sz="1800">
-                <a:solidFill>
-                  <a:srgbClr val="161625"/>
-                </a:solidFill>
-              </a:rPr>
-              <a:t>Ejemplos en vivo: email, precios, URLs</a:t>
-            </a:r>
-          </a:p>
-          <a:p>
-            <a:pPr/>
-            <a:r>
-              <a:rPr sz="1800">
-                <a:solidFill>
-                  <a:srgbClr val="161625"/>
-                </a:solidFill>
-              </a:rPr>
-              <a:t>Demo en https://regexr.com</a:t>
-            </a:r>
-          </a:p>
-          <a:p>
-            <a:pPr lvl="1"/>
-            <a:r>
-              <a:rPr sz="1500">
-                <a:solidFill>
-                  <a:srgbClr val="161625"/>
-                </a:solidFill>
-              </a:rPr>
-              <a:t>💡 Catastrophic backtracking: prueba (a+)+b con string adversario</a:t>
-            </a:r>
-          </a:p>
-        </p:txBody>
-      </p:sp>
-      <p:sp>
-        <p:nvSpPr>
-          <p:cNvPr id="4" name="TextBox 3"/>
-          <p:cNvSpPr txBox="1"/>
-          <p:nvPr/>
-        </p:nvSpPr>
-        <p:spPr>
-          <a:xfrm>
-            <a:off x="7315200" y="164592"/>
-            <a:ext cx="1737360" cy="320040"/>
-          </a:xfrm>
-          <a:prstGeom prst="rect">
-            <a:avLst/>
-          </a:prstGeom>
-          <a:noFill/>
-        </p:spPr>
-        <p:txBody>
           <a:bodyPr wrap="none" lIns="0" rIns="0">
             <a:spAutoFit/>
           </a:bodyPr>
@@ -11095,262 +12602,7 @@
                   <a:srgbClr val="595959"/>
                 </a:solidFill>
               </a:rPr>
-              <a:t>0:20 – 0:35</a:t>
-            </a:r>
-          </a:p>
-        </p:txBody>
-      </p:sp>
-      <p:sp>
-        <p:nvSpPr>
-          <p:cNvPr id="5" name="Rounded Rectangle 4"/>
-          <p:cNvSpPr/>
-          <p:nvPr/>
-        </p:nvSpPr>
-        <p:spPr>
-          <a:xfrm>
-            <a:off x="365760" y="4617720"/>
-            <a:ext cx="8412480" cy="411480"/>
-          </a:xfrm>
-          <a:prstGeom prst="roundRect">
-            <a:avLst/>
-          </a:prstGeom>
-          <a:solidFill>
-            <a:srgbClr val="FFECDE"/>
-          </a:solidFill>
-          <a:ln w="12700">
-            <a:solidFill>
-              <a:srgbClr val="FF743B"/>
-            </a:solidFill>
-          </a:ln>
-        </p:spPr>
-        <p:style>
-          <a:lnRef idx="1">
-            <a:schemeClr val="accent1"/>
-          </a:lnRef>
-          <a:fillRef idx="3">
-            <a:schemeClr val="accent1"/>
-          </a:fillRef>
-          <a:effectRef idx="2">
-            <a:schemeClr val="accent1"/>
-          </a:effectRef>
-          <a:fontRef idx="minor">
-            <a:schemeClr val="lt1"/>
-          </a:fontRef>
-        </p:style>
-        <p:txBody>
-          <a:bodyPr rtlCol="0" anchor="ctr" lIns="137160" rIns="137160" tIns="36576" bIns="36576"/>
-          <a:lstStyle/>
-          <a:p>
-            <a:pPr algn="l"/>
-            <a:r>
-              <a:rPr sz="1400" b="1">
-                <a:solidFill>
-                  <a:srgbClr val="FF743B"/>
-                </a:solidFill>
-              </a:rPr>
-              <a:t>▶  NOTEBOOK: 05 - Matching.ipynb</a:t>
-            </a:r>
-          </a:p>
-        </p:txBody>
-      </p:sp>
-    </p:spTree>
-  </p:cSld>
-  <p:clrMapOvr>
-    <a:masterClrMapping/>
-  </p:clrMapOvr>
-</p:sld>
-</file>
-
-<file path=ppt/slides/slide9.xml><?xml version="1.0" encoding="utf-8"?>
-<p:sld xmlns:a="http://schemas.openxmlformats.org/drawingml/2006/main" xmlns:p="http://schemas.openxmlformats.org/presentationml/2006/main" xmlns:r="http://schemas.openxmlformats.org/officeDocument/2006/relationships">
-  <p:cSld>
-    <p:spTree>
-      <p:nvGrpSpPr>
-        <p:cNvPr id="1" name=""/>
-        <p:cNvGrpSpPr/>
-        <p:nvPr/>
-      </p:nvGrpSpPr>
-      <p:grpSpPr/>
-      <p:sp>
-        <p:nvSpPr>
-          <p:cNvPr id="2" name="Title 1"/>
-          <p:cNvSpPr>
-            <a:spLocks noGrp="1"/>
-          </p:cNvSpPr>
-          <p:nvPr>
-            <p:ph type="title"/>
-          </p:nvPr>
-        </p:nvSpPr>
-        <p:spPr/>
-        <p:txBody>
-          <a:bodyPr/>
-          <a:lstStyle/>
-          <a:p>
-            <a:r>
-              <a:rPr sz="2800" b="1">
-                <a:solidFill>
-                  <a:srgbClr val="FF743B"/>
-                </a:solidFill>
-              </a:rPr>
-              <a:t>Distancias de edición</a:t>
-            </a:r>
-          </a:p>
-        </p:txBody>
-      </p:sp>
-      <p:sp>
-        <p:nvSpPr>
-          <p:cNvPr id="3" name="Text Placeholder 2"/>
-          <p:cNvSpPr>
-            <a:spLocks noGrp="1"/>
-          </p:cNvSpPr>
-          <p:nvPr>
-            <p:ph type="body" idx="1"/>
-          </p:nvPr>
-        </p:nvSpPr>
-        <p:spPr/>
-        <p:txBody>
-          <a:bodyPr wrap="square"/>
-          <a:lstStyle/>
-          <a:p>
-            <a:pPr/>
-            <a:r>
-              <a:rPr sz="1800">
-                <a:solidFill>
-                  <a:srgbClr val="161625"/>
-                </a:solidFill>
-              </a:rPr>
-              <a:t>Levenshtein con DP (escribir fórmula en pizarra)</a:t>
-            </a:r>
-          </a:p>
-          <a:p>
-            <a:pPr/>
-            <a:r>
-              <a:rPr sz="1800">
-                <a:solidFill>
-                  <a:srgbClr val="161625"/>
-                </a:solidFill>
-              </a:rPr>
-              <a:t>Damerau-Levenshtein (incluye transposiciones)</a:t>
-            </a:r>
-          </a:p>
-          <a:p>
-            <a:pPr/>
-            <a:r>
-              <a:rPr sz="1800">
-                <a:solidFill>
-                  <a:srgbClr val="161625"/>
-                </a:solidFill>
-              </a:rPr>
-              <a:t>Jaro-Winkler</a:t>
-            </a:r>
-          </a:p>
-          <a:p>
-            <a:pPr/>
-            <a:r>
-              <a:rPr sz="1800">
-                <a:solidFill>
-                  <a:srgbClr val="161625"/>
-                </a:solidFill>
-              </a:rPr>
-              <a:t>jellyfish para comparar en tabla</a:t>
-            </a:r>
-          </a:p>
-          <a:p>
-            <a:pPr lvl="1"/>
-            <a:r>
-              <a:rPr sz="1500">
-                <a:solidFill>
-                  <a:srgbClr val="161625"/>
-                </a:solidFill>
-              </a:rPr>
-              <a:t>Pregunta: ¿cuál usarías para corregir typos de teclado? → Damerau</a:t>
-            </a:r>
-          </a:p>
-        </p:txBody>
-      </p:sp>
-      <p:sp>
-        <p:nvSpPr>
-          <p:cNvPr id="4" name="TextBox 3"/>
-          <p:cNvSpPr txBox="1"/>
-          <p:nvPr/>
-        </p:nvSpPr>
-        <p:spPr>
-          <a:xfrm>
-            <a:off x="7315200" y="164592"/>
-            <a:ext cx="1737360" cy="320040"/>
-          </a:xfrm>
-          <a:prstGeom prst="rect">
-            <a:avLst/>
-          </a:prstGeom>
-          <a:noFill/>
-        </p:spPr>
-        <p:txBody>
-          <a:bodyPr wrap="none" lIns="0" rIns="0">
-            <a:spAutoFit/>
-          </a:bodyPr>
-          <a:lstStyle/>
-          <a:p>
-            <a:pPr algn="ctr"/>
-            <a:r>
-              <a:rPr sz="1100" i="1">
-                <a:solidFill>
-                  <a:srgbClr val="595959"/>
-                </a:solidFill>
-              </a:rPr>
-              <a:t>0:35 – 0:50</a:t>
-            </a:r>
-          </a:p>
-        </p:txBody>
-      </p:sp>
-      <p:sp>
-        <p:nvSpPr>
-          <p:cNvPr id="5" name="Rounded Rectangle 4"/>
-          <p:cNvSpPr/>
-          <p:nvPr/>
-        </p:nvSpPr>
-        <p:spPr>
-          <a:xfrm>
-            <a:off x="365760" y="4617720"/>
-            <a:ext cx="8412480" cy="411480"/>
-          </a:xfrm>
-          <a:prstGeom prst="roundRect">
-            <a:avLst/>
-          </a:prstGeom>
-          <a:solidFill>
-            <a:srgbClr val="FFECDE"/>
-          </a:solidFill>
-          <a:ln w="12700">
-            <a:solidFill>
-              <a:srgbClr val="FF743B"/>
-            </a:solidFill>
-          </a:ln>
-        </p:spPr>
-        <p:style>
-          <a:lnRef idx="1">
-            <a:schemeClr val="accent1"/>
-          </a:lnRef>
-          <a:fillRef idx="3">
-            <a:schemeClr val="accent1"/>
-          </a:fillRef>
-          <a:effectRef idx="2">
-            <a:schemeClr val="accent1"/>
-          </a:effectRef>
-          <a:fontRef idx="minor">
-            <a:schemeClr val="lt1"/>
-          </a:fontRef>
-        </p:style>
-        <p:txBody>
-          <a:bodyPr rtlCol="0" anchor="ctr" lIns="137160" rIns="137160" tIns="36576" bIns="36576"/>
-          <a:lstStyle/>
-          <a:p>
-            <a:pPr algn="l"/>
-            <a:r>
-              <a:rPr sz="1400" b="1">
-                <a:solidFill>
-                  <a:srgbClr val="FF743B"/>
-                </a:solidFill>
-              </a:rPr>
-              <a:t>▶  NOTEBOOK: 05 - Matching.ipynb</a:t>
+              <a:t>0:25 – 0:30</a:t>
             </a:r>
           </a:p>
         </p:txBody>
@@ -11364,7 +12616,7 @@
 </file>
 
 <file path=ppt/theme/theme1.xml><?xml version="1.0" encoding="utf-8"?>
-<a:theme xmlns:a="http://schemas.openxmlformats.org/drawingml/2006/main" xmlns:r="http://schemas.openxmlformats.org/officeDocument/2006/relationships" name="Simple Light">
+<a:theme xmlns:a="http://schemas.openxmlformats.org/drawingml/2006/main" name="Simple Light">
   <a:themeElements>
     <a:clrScheme name="Simple Light">
       <a:dk1>
@@ -11639,11 +12891,13 @@
       </a:bgFillStyleLst>
     </a:fmtScheme>
   </a:themeElements>
+  <a:objectDefaults/>
+  <a:extraClrSchemeLst/>
 </a:theme>
 </file>
 
 <file path=ppt/theme/theme2.xml><?xml version="1.0" encoding="utf-8"?>
-<a:theme xmlns:a="http://schemas.openxmlformats.org/drawingml/2006/main" xmlns:r="http://schemas.openxmlformats.org/officeDocument/2006/relationships">
+<a:theme xmlns:a="http://schemas.openxmlformats.org/drawingml/2006/main">
   <a:themeElements>
     <a:clrScheme name="Default">
       <a:dk1>
@@ -11918,5 +13172,7 @@
       </a:bgFillStyleLst>
     </a:fmtScheme>
   </a:themeElements>
+  <a:objectDefaults/>
+  <a:extraClrSchemeLst/>
 </a:theme>
 </file>